--- a/CSE-3104/Slides/ch20.pptx
+++ b/CSE-3104/Slides/ch20.pptx
@@ -54,23 +54,25 @@
     <p:sldId id="299" r:id="rId50"/>
     <p:sldId id="300" r:id="rId51"/>
     <p:sldId id="301" r:id="rId52"/>
+    <p:sldId id="302" r:id="rId53"/>
+    <p:sldId id="303" r:id="rId54"/>
   </p:sldIdLst>
   <p:sldSz cy="6858000" cx="9144000"/>
   <p:notesSz cx="6997700" cy="9283700"/>
   <p:embeddedFontLst>
     <p:embeddedFont>
       <p:font typeface="Helvetica Neue"/>
-      <p:regular r:id="rId53"/>
-      <p:bold r:id="rId54"/>
-      <p:italic r:id="rId55"/>
-      <p:boldItalic r:id="rId56"/>
+      <p:regular r:id="rId55"/>
+      <p:bold r:id="rId56"/>
+      <p:italic r:id="rId57"/>
+      <p:boldItalic r:id="rId58"/>
     </p:embeddedFont>
     <p:embeddedFont>
       <p:font typeface="Roboto Mono"/>
-      <p:regular r:id="rId57"/>
-      <p:bold r:id="rId58"/>
-      <p:italic r:id="rId59"/>
-      <p:boldItalic r:id="rId60"/>
+      <p:regular r:id="rId59"/>
+      <p:bold r:id="rId60"/>
+      <p:italic r:id="rId61"/>
+      <p:boldItalic r:id="rId62"/>
     </p:embeddedFont>
   </p:embeddedFontLst>
   <p:defaultTextStyle>
@@ -318,7 +320,7 @@
       </p15:sldGuideLst>
     </p:ext>
     <p:ext uri="GoogleSlidesCustomDataVersion2">
-      <go:slidesCustomData xmlns:go="http://customooxmlschemas.google.com/" r:id="rId61" roundtripDataSignature="AMtx7mg18+QAUfcq+rZeW+QjYIT8MBzcmQ=="/>
+      <go:slidesCustomData xmlns:go="http://customooxmlschemas.google.com/" r:id="rId63" roundtripDataSignature="AMtx7mhUX0JMtvC0+7qN1OUZTG3WYXxbFA=="/>
     </p:ext>
   </p:extLst>
 </p:presentation>
@@ -3075,7 +3077,7 @@
   <p:cSld>
     <p:spTree>
       <p:nvGrpSpPr>
-        <p:cNvPr id="207" name="Shape 207"/>
+        <p:cNvPr id="208" name="Shape 208"/>
         <p:cNvGrpSpPr/>
         <p:nvPr/>
       </p:nvGrpSpPr>
@@ -3089,7 +3091,7 @@
       </p:grpSpPr>
       <p:sp>
         <p:nvSpPr>
-          <p:cNvPr id="208" name="Google Shape;208;p18:notes"/>
+          <p:cNvPr id="209" name="Google Shape;209;p18:notes"/>
           <p:cNvSpPr txBox="1"/>
           <p:nvPr>
             <p:ph idx="12" type="sldNum"/>
@@ -3149,7 +3151,7 @@
       </p:sp>
       <p:sp>
         <p:nvSpPr>
-          <p:cNvPr id="209" name="Google Shape;209;p18:notes"/>
+          <p:cNvPr id="210" name="Google Shape;210;p18:notes"/>
           <p:cNvSpPr/>
           <p:nvPr>
             <p:ph idx="2" type="sldImg"/>
@@ -3188,7 +3190,7 @@
       </p:sp>
       <p:sp>
         <p:nvSpPr>
-          <p:cNvPr id="210" name="Google Shape;210;p18:notes"/>
+          <p:cNvPr id="211" name="Google Shape;211;p18:notes"/>
           <p:cNvSpPr txBox="1"/>
           <p:nvPr>
             <p:ph idx="1" type="body"/>
@@ -3409,7 +3411,7 @@
   <p:cSld>
     <p:spTree>
       <p:nvGrpSpPr>
-        <p:cNvPr id="214" name="Shape 214"/>
+        <p:cNvPr id="216" name="Shape 216"/>
         <p:cNvGrpSpPr/>
         <p:nvPr/>
       </p:nvGrpSpPr>
@@ -3423,7 +3425,7 @@
       </p:grpSpPr>
       <p:sp>
         <p:nvSpPr>
-          <p:cNvPr id="215" name="Google Shape;215;p19:notes"/>
+          <p:cNvPr id="217" name="Google Shape;217;p19:notes"/>
           <p:cNvSpPr txBox="1"/>
           <p:nvPr>
             <p:ph idx="12" type="sldNum"/>
@@ -3483,7 +3485,7 @@
       </p:sp>
       <p:sp>
         <p:nvSpPr>
-          <p:cNvPr id="216" name="Google Shape;216;p19:notes"/>
+          <p:cNvPr id="218" name="Google Shape;218;p19:notes"/>
           <p:cNvSpPr/>
           <p:nvPr>
             <p:ph idx="2" type="sldImg"/>
@@ -3522,7 +3524,7 @@
       </p:sp>
       <p:sp>
         <p:nvSpPr>
-          <p:cNvPr id="217" name="Google Shape;217;p19:notes"/>
+          <p:cNvPr id="219" name="Google Shape;219;p19:notes"/>
           <p:cNvSpPr txBox="1"/>
           <p:nvPr>
             <p:ph idx="1" type="body"/>
@@ -3576,7 +3578,7 @@
   <p:cSld>
     <p:spTree>
       <p:nvGrpSpPr>
-        <p:cNvPr id="221" name="Shape 221"/>
+        <p:cNvPr id="223" name="Shape 223"/>
         <p:cNvGrpSpPr/>
         <p:nvPr/>
       </p:nvGrpSpPr>
@@ -3590,7 +3592,7 @@
       </p:grpSpPr>
       <p:sp>
         <p:nvSpPr>
-          <p:cNvPr id="222" name="Google Shape;222;p20:notes"/>
+          <p:cNvPr id="224" name="Google Shape;224;p20:notes"/>
           <p:cNvSpPr txBox="1"/>
           <p:nvPr>
             <p:ph idx="12" type="sldNum"/>
@@ -3650,7 +3652,7 @@
       </p:sp>
       <p:sp>
         <p:nvSpPr>
-          <p:cNvPr id="223" name="Google Shape;223;p20:notes"/>
+          <p:cNvPr id="225" name="Google Shape;225;p20:notes"/>
           <p:cNvSpPr/>
           <p:nvPr>
             <p:ph idx="2" type="sldImg"/>
@@ -3689,7 +3691,7 @@
       </p:sp>
       <p:sp>
         <p:nvSpPr>
-          <p:cNvPr id="224" name="Google Shape;224;p20:notes"/>
+          <p:cNvPr id="226" name="Google Shape;226;p20:notes"/>
           <p:cNvSpPr txBox="1"/>
           <p:nvPr>
             <p:ph idx="1" type="body"/>
@@ -3743,7 +3745,7 @@
   <p:cSld>
     <p:spTree>
       <p:nvGrpSpPr>
-        <p:cNvPr id="229" name="Shape 229"/>
+        <p:cNvPr id="231" name="Shape 231"/>
         <p:cNvGrpSpPr/>
         <p:nvPr/>
       </p:nvGrpSpPr>
@@ -3757,7 +3759,293 @@
       </p:grpSpPr>
       <p:sp>
         <p:nvSpPr>
-          <p:cNvPr id="230" name="Google Shape;230;p21:notes"/>
+          <p:cNvPr id="232" name="Google Shape;232;g36bf5fe6ea5_0_0:notes"/>
+          <p:cNvSpPr/>
+          <p:nvPr>
+            <p:ph idx="2" type="sldImg"/>
+          </p:nvPr>
+        </p:nvSpPr>
+        <p:spPr>
+          <a:xfrm>
+            <a:off x="1177925" y="696913"/>
+            <a:ext cx="4641900" cy="3481500"/>
+          </a:xfrm>
+          <a:custGeom>
+            <a:rect b="b" l="l" r="r" t="t"/>
+            <a:pathLst>
+              <a:path extrusionOk="0" h="120000" w="120000">
+                <a:moveTo>
+                  <a:pt x="0" y="0"/>
+                </a:moveTo>
+                <a:lnTo>
+                  <a:pt x="120000" y="0"/>
+                </a:lnTo>
+                <a:lnTo>
+                  <a:pt x="120000" y="120000"/>
+                </a:lnTo>
+                <a:lnTo>
+                  <a:pt x="0" y="120000"/>
+                </a:lnTo>
+                <a:close/>
+              </a:path>
+            </a:pathLst>
+          </a:custGeom>
+        </p:spPr>
+      </p:sp>
+      <p:sp>
+        <p:nvSpPr>
+          <p:cNvPr id="233" name="Google Shape;233;g36bf5fe6ea5_0_0:notes"/>
+          <p:cNvSpPr txBox="1"/>
+          <p:nvPr>
+            <p:ph idx="1" type="body"/>
+          </p:nvPr>
+        </p:nvSpPr>
+        <p:spPr>
+          <a:xfrm>
+            <a:off x="931863" y="4410075"/>
+            <a:ext cx="5133900" cy="4176600"/>
+          </a:xfrm>
+          <a:prstGeom prst="rect">
+            <a:avLst/>
+          </a:prstGeom>
+        </p:spPr>
+        <p:txBody>
+          <a:bodyPr anchorCtr="0" anchor="t" bIns="46500" lIns="93025" spcFirstLastPara="1" rIns="93025" wrap="square" tIns="46500">
+            <a:noAutofit/>
+          </a:bodyPr>
+          <a:lstStyle/>
+          <a:p>
+            <a:pPr indent="0" lvl="0" marL="0" rtl="0" algn="l">
+              <a:spcBef>
+                <a:spcPts val="360"/>
+              </a:spcBef>
+              <a:spcAft>
+                <a:spcPts val="0"/>
+              </a:spcAft>
+              <a:buNone/>
+            </a:pPr>
+            <a:r>
+              <a:t/>
+            </a:r>
+            <a:endParaRPr/>
+          </a:p>
+        </p:txBody>
+      </p:sp>
+      <p:sp>
+        <p:nvSpPr>
+          <p:cNvPr id="234" name="Google Shape;234;g36bf5fe6ea5_0_0:notes"/>
+          <p:cNvSpPr txBox="1"/>
+          <p:nvPr>
+            <p:ph idx="12" type="sldNum"/>
+          </p:nvPr>
+        </p:nvSpPr>
+        <p:spPr>
+          <a:xfrm>
+            <a:off x="3965575" y="8820150"/>
+            <a:ext cx="3032100" cy="463500"/>
+          </a:xfrm>
+          <a:prstGeom prst="rect">
+            <a:avLst/>
+          </a:prstGeom>
+        </p:spPr>
+        <p:txBody>
+          <a:bodyPr anchorCtr="0" anchor="b" bIns="46500" lIns="93025" spcFirstLastPara="1" rIns="93025" wrap="square" tIns="46500">
+            <a:noAutofit/>
+          </a:bodyPr>
+          <a:lstStyle/>
+          <a:p>
+            <a:pPr indent="0" lvl="0" marL="0" rtl="0" algn="r">
+              <a:spcBef>
+                <a:spcPts val="0"/>
+              </a:spcBef>
+              <a:spcAft>
+                <a:spcPts val="0"/>
+              </a:spcAft>
+              <a:buClr>
+                <a:srgbClr val="000000"/>
+              </a:buClr>
+              <a:buFont typeface="Arial"/>
+              <a:buNone/>
+            </a:pPr>
+            <a:fld id="{00000000-1234-1234-1234-123412341234}" type="slidenum">
+              <a:rPr lang="en-US"/>
+              <a:t>‹#›</a:t>
+            </a:fld>
+            <a:endParaRPr/>
+          </a:p>
+        </p:txBody>
+      </p:sp>
+    </p:spTree>
+  </p:cSld>
+  <p:clrMapOvr>
+    <a:masterClrMapping/>
+  </p:clrMapOvr>
+</p:notes>
+</file>
+
+<file path=ppt/notesSlides/notesSlide23.xml><?xml version="1.0" encoding="utf-8"?>
+<p:notes xmlns:a="http://schemas.openxmlformats.org/drawingml/2006/main" xmlns:r="http://schemas.openxmlformats.org/officeDocument/2006/relationships" xmlns:mc="http://schemas.openxmlformats.org/markup-compatibility/2006" xmlns:mv="urn:schemas-microsoft-com:mac:vml" xmlns:p="http://schemas.openxmlformats.org/presentationml/2006/main" xmlns:c="http://schemas.openxmlformats.org/drawingml/2006/chart" xmlns:dgm="http://schemas.openxmlformats.org/drawingml/2006/diagram" xmlns:o="urn:schemas-microsoft-com:office:office" xmlns:v="urn:schemas-microsoft-com:vml" xmlns:pvml="urn:schemas-microsoft-com:office:powerpoint" xmlns:com="http://schemas.openxmlformats.org/drawingml/2006/compatibility" xmlns:p14="http://schemas.microsoft.com/office/powerpoint/2010/main" xmlns:p15="http://schemas.microsoft.com/office/powerpoint/2012/main" xmlns:ahyp="http://schemas.microsoft.com/office/drawing/2018/hyperlinkcolor" showMasterPhAnim="0" showMasterSp="0">
+  <p:cSld>
+    <p:spTree>
+      <p:nvGrpSpPr>
+        <p:cNvPr id="238" name="Shape 238"/>
+        <p:cNvGrpSpPr/>
+        <p:nvPr/>
+      </p:nvGrpSpPr>
+      <p:grpSpPr>
+        <a:xfrm>
+          <a:off x="0" y="0"/>
+          <a:ext cx="0" cy="0"/>
+          <a:chOff x="0" y="0"/>
+          <a:chExt cx="0" cy="0"/>
+        </a:xfrm>
+      </p:grpSpPr>
+      <p:sp>
+        <p:nvSpPr>
+          <p:cNvPr id="239" name="Google Shape;239;g36bf5fe6ea5_0_11:notes"/>
+          <p:cNvSpPr/>
+          <p:nvPr>
+            <p:ph idx="2" type="sldImg"/>
+          </p:nvPr>
+        </p:nvSpPr>
+        <p:spPr>
+          <a:xfrm>
+            <a:off x="1177925" y="696913"/>
+            <a:ext cx="4641900" cy="3481500"/>
+          </a:xfrm>
+          <a:custGeom>
+            <a:rect b="b" l="l" r="r" t="t"/>
+            <a:pathLst>
+              <a:path extrusionOk="0" h="120000" w="120000">
+                <a:moveTo>
+                  <a:pt x="0" y="0"/>
+                </a:moveTo>
+                <a:lnTo>
+                  <a:pt x="120000" y="0"/>
+                </a:lnTo>
+                <a:lnTo>
+                  <a:pt x="120000" y="120000"/>
+                </a:lnTo>
+                <a:lnTo>
+                  <a:pt x="0" y="120000"/>
+                </a:lnTo>
+                <a:close/>
+              </a:path>
+            </a:pathLst>
+          </a:custGeom>
+        </p:spPr>
+      </p:sp>
+      <p:sp>
+        <p:nvSpPr>
+          <p:cNvPr id="240" name="Google Shape;240;g36bf5fe6ea5_0_11:notes"/>
+          <p:cNvSpPr txBox="1"/>
+          <p:nvPr>
+            <p:ph idx="1" type="body"/>
+          </p:nvPr>
+        </p:nvSpPr>
+        <p:spPr>
+          <a:xfrm>
+            <a:off x="931863" y="4410075"/>
+            <a:ext cx="5133900" cy="4176600"/>
+          </a:xfrm>
+          <a:prstGeom prst="rect">
+            <a:avLst/>
+          </a:prstGeom>
+        </p:spPr>
+        <p:txBody>
+          <a:bodyPr anchorCtr="0" anchor="t" bIns="46500" lIns="93025" spcFirstLastPara="1" rIns="93025" wrap="square" tIns="46500">
+            <a:noAutofit/>
+          </a:bodyPr>
+          <a:lstStyle/>
+          <a:p>
+            <a:pPr indent="0" lvl="0" marL="0" rtl="0" algn="l">
+              <a:spcBef>
+                <a:spcPts val="360"/>
+              </a:spcBef>
+              <a:spcAft>
+                <a:spcPts val="0"/>
+              </a:spcAft>
+              <a:buNone/>
+            </a:pPr>
+            <a:r>
+              <a:t/>
+            </a:r>
+            <a:endParaRPr/>
+          </a:p>
+        </p:txBody>
+      </p:sp>
+      <p:sp>
+        <p:nvSpPr>
+          <p:cNvPr id="241" name="Google Shape;241;g36bf5fe6ea5_0_11:notes"/>
+          <p:cNvSpPr txBox="1"/>
+          <p:nvPr>
+            <p:ph idx="12" type="sldNum"/>
+          </p:nvPr>
+        </p:nvSpPr>
+        <p:spPr>
+          <a:xfrm>
+            <a:off x="3965575" y="8820150"/>
+            <a:ext cx="3032100" cy="463500"/>
+          </a:xfrm>
+          <a:prstGeom prst="rect">
+            <a:avLst/>
+          </a:prstGeom>
+        </p:spPr>
+        <p:txBody>
+          <a:bodyPr anchorCtr="0" anchor="b" bIns="46500" lIns="93025" spcFirstLastPara="1" rIns="93025" wrap="square" tIns="46500">
+            <a:noAutofit/>
+          </a:bodyPr>
+          <a:lstStyle/>
+          <a:p>
+            <a:pPr indent="0" lvl="0" marL="0" rtl="0" algn="r">
+              <a:spcBef>
+                <a:spcPts val="0"/>
+              </a:spcBef>
+              <a:spcAft>
+                <a:spcPts val="0"/>
+              </a:spcAft>
+              <a:buClr>
+                <a:srgbClr val="000000"/>
+              </a:buClr>
+              <a:buFont typeface="Arial"/>
+              <a:buNone/>
+            </a:pPr>
+            <a:fld id="{00000000-1234-1234-1234-123412341234}" type="slidenum">
+              <a:rPr lang="en-US"/>
+              <a:t>‹#›</a:t>
+            </a:fld>
+            <a:endParaRPr/>
+          </a:p>
+        </p:txBody>
+      </p:sp>
+    </p:spTree>
+  </p:cSld>
+  <p:clrMapOvr>
+    <a:masterClrMapping/>
+  </p:clrMapOvr>
+</p:notes>
+</file>
+
+<file path=ppt/notesSlides/notesSlide24.xml><?xml version="1.0" encoding="utf-8"?>
+<p:notes xmlns:a="http://schemas.openxmlformats.org/drawingml/2006/main" xmlns:r="http://schemas.openxmlformats.org/officeDocument/2006/relationships" xmlns:mc="http://schemas.openxmlformats.org/markup-compatibility/2006" xmlns:mv="urn:schemas-microsoft-com:mac:vml" xmlns:p="http://schemas.openxmlformats.org/presentationml/2006/main" xmlns:c="http://schemas.openxmlformats.org/drawingml/2006/chart" xmlns:dgm="http://schemas.openxmlformats.org/drawingml/2006/diagram" xmlns:o="urn:schemas-microsoft-com:office:office" xmlns:v="urn:schemas-microsoft-com:vml" xmlns:pvml="urn:schemas-microsoft-com:office:powerpoint" xmlns:com="http://schemas.openxmlformats.org/drawingml/2006/compatibility" xmlns:p14="http://schemas.microsoft.com/office/powerpoint/2010/main" xmlns:p15="http://schemas.microsoft.com/office/powerpoint/2012/main" xmlns:ahyp="http://schemas.microsoft.com/office/drawing/2018/hyperlinkcolor" showMasterPhAnim="0" showMasterSp="0">
+  <p:cSld>
+    <p:spTree>
+      <p:nvGrpSpPr>
+        <p:cNvPr id="245" name="Shape 245"/>
+        <p:cNvGrpSpPr/>
+        <p:nvPr/>
+      </p:nvGrpSpPr>
+      <p:grpSpPr>
+        <a:xfrm>
+          <a:off x="0" y="0"/>
+          <a:ext cx="0" cy="0"/>
+          <a:chOff x="0" y="0"/>
+          <a:chExt cx="0" cy="0"/>
+        </a:xfrm>
+      </p:grpSpPr>
+      <p:sp>
+        <p:nvSpPr>
+          <p:cNvPr id="246" name="Google Shape;246;p21:notes"/>
           <p:cNvSpPr txBox="1"/>
           <p:nvPr>
             <p:ph idx="12" type="sldNum"/>
@@ -3817,7 +4105,7 @@
       </p:sp>
       <p:sp>
         <p:nvSpPr>
-          <p:cNvPr id="231" name="Google Shape;231;p21:notes"/>
+          <p:cNvPr id="247" name="Google Shape;247;p21:notes"/>
           <p:cNvSpPr/>
           <p:nvPr>
             <p:ph idx="2" type="sldImg"/>
@@ -3856,7 +4144,7 @@
       </p:sp>
       <p:sp>
         <p:nvSpPr>
-          <p:cNvPr id="232" name="Google Shape;232;p21:notes"/>
+          <p:cNvPr id="248" name="Google Shape;248;p21:notes"/>
           <p:cNvSpPr txBox="1"/>
           <p:nvPr>
             <p:ph idx="1" type="body"/>
@@ -3905,12 +4193,12 @@
 </p:notes>
 </file>
 
-<file path=ppt/notesSlides/notesSlide23.xml><?xml version="1.0" encoding="utf-8"?>
+<file path=ppt/notesSlides/notesSlide25.xml><?xml version="1.0" encoding="utf-8"?>
 <p:notes xmlns:a="http://schemas.openxmlformats.org/drawingml/2006/main" xmlns:r="http://schemas.openxmlformats.org/officeDocument/2006/relationships" xmlns:mc="http://schemas.openxmlformats.org/markup-compatibility/2006" xmlns:mv="urn:schemas-microsoft-com:mac:vml" xmlns:p="http://schemas.openxmlformats.org/presentationml/2006/main" xmlns:c="http://schemas.openxmlformats.org/drawingml/2006/chart" xmlns:dgm="http://schemas.openxmlformats.org/drawingml/2006/diagram" xmlns:o="urn:schemas-microsoft-com:office:office" xmlns:v="urn:schemas-microsoft-com:vml" xmlns:pvml="urn:schemas-microsoft-com:office:powerpoint" xmlns:com="http://schemas.openxmlformats.org/drawingml/2006/compatibility" xmlns:p14="http://schemas.microsoft.com/office/powerpoint/2010/main" xmlns:p15="http://schemas.microsoft.com/office/powerpoint/2012/main" xmlns:ahyp="http://schemas.microsoft.com/office/drawing/2018/hyperlinkcolor" showMasterPhAnim="0" showMasterSp="0">
   <p:cSld>
     <p:spTree>
       <p:nvGrpSpPr>
-        <p:cNvPr id="236" name="Shape 236"/>
+        <p:cNvPr id="252" name="Shape 252"/>
         <p:cNvGrpSpPr/>
         <p:nvPr/>
       </p:nvGrpSpPr>
@@ -3924,7 +4212,7 @@
       </p:grpSpPr>
       <p:sp>
         <p:nvSpPr>
-          <p:cNvPr id="237" name="Google Shape;237;p22:notes"/>
+          <p:cNvPr id="253" name="Google Shape;253;p22:notes"/>
           <p:cNvSpPr txBox="1"/>
           <p:nvPr>
             <p:ph idx="12" type="sldNum"/>
@@ -3984,7 +4272,7 @@
       </p:sp>
       <p:sp>
         <p:nvSpPr>
-          <p:cNvPr id="238" name="Google Shape;238;p22:notes"/>
+          <p:cNvPr id="254" name="Google Shape;254;p22:notes"/>
           <p:cNvSpPr/>
           <p:nvPr>
             <p:ph idx="2" type="sldImg"/>
@@ -4023,7 +4311,7 @@
       </p:sp>
       <p:sp>
         <p:nvSpPr>
-          <p:cNvPr id="239" name="Google Shape;239;p22:notes"/>
+          <p:cNvPr id="255" name="Google Shape;255;p22:notes"/>
           <p:cNvSpPr txBox="1"/>
           <p:nvPr>
             <p:ph idx="1" type="body"/>
@@ -4072,12 +4360,12 @@
 </p:notes>
 </file>
 
-<file path=ppt/notesSlides/notesSlide24.xml><?xml version="1.0" encoding="utf-8"?>
+<file path=ppt/notesSlides/notesSlide26.xml><?xml version="1.0" encoding="utf-8"?>
 <p:notes xmlns:a="http://schemas.openxmlformats.org/drawingml/2006/main" xmlns:r="http://schemas.openxmlformats.org/officeDocument/2006/relationships" xmlns:mc="http://schemas.openxmlformats.org/markup-compatibility/2006" xmlns:mv="urn:schemas-microsoft-com:mac:vml" xmlns:p="http://schemas.openxmlformats.org/presentationml/2006/main" xmlns:c="http://schemas.openxmlformats.org/drawingml/2006/chart" xmlns:dgm="http://schemas.openxmlformats.org/drawingml/2006/diagram" xmlns:o="urn:schemas-microsoft-com:office:office" xmlns:v="urn:schemas-microsoft-com:vml" xmlns:pvml="urn:schemas-microsoft-com:office:powerpoint" xmlns:com="http://schemas.openxmlformats.org/drawingml/2006/compatibility" xmlns:p14="http://schemas.microsoft.com/office/powerpoint/2010/main" xmlns:p15="http://schemas.microsoft.com/office/powerpoint/2012/main" xmlns:ahyp="http://schemas.microsoft.com/office/drawing/2018/hyperlinkcolor" showMasterPhAnim="0" showMasterSp="0">
   <p:cSld>
     <p:spTree>
       <p:nvGrpSpPr>
-        <p:cNvPr id="243" name="Shape 243"/>
+        <p:cNvPr id="259" name="Shape 259"/>
         <p:cNvGrpSpPr/>
         <p:nvPr/>
       </p:nvGrpSpPr>
@@ -4091,7 +4379,7 @@
       </p:grpSpPr>
       <p:sp>
         <p:nvSpPr>
-          <p:cNvPr id="244" name="Google Shape;244;p23:notes"/>
+          <p:cNvPr id="260" name="Google Shape;260;p23:notes"/>
           <p:cNvSpPr txBox="1"/>
           <p:nvPr>
             <p:ph idx="12" type="sldNum"/>
@@ -4151,7 +4439,7 @@
       </p:sp>
       <p:sp>
         <p:nvSpPr>
-          <p:cNvPr id="245" name="Google Shape;245;p23:notes"/>
+          <p:cNvPr id="261" name="Google Shape;261;p23:notes"/>
           <p:cNvSpPr/>
           <p:nvPr>
             <p:ph idx="2" type="sldImg"/>
@@ -4190,7 +4478,7 @@
       </p:sp>
       <p:sp>
         <p:nvSpPr>
-          <p:cNvPr id="246" name="Google Shape;246;p23:notes"/>
+          <p:cNvPr id="262" name="Google Shape;262;p23:notes"/>
           <p:cNvSpPr txBox="1"/>
           <p:nvPr>
             <p:ph idx="1" type="body"/>
@@ -4239,12 +4527,12 @@
 </p:notes>
 </file>
 
-<file path=ppt/notesSlides/notesSlide25.xml><?xml version="1.0" encoding="utf-8"?>
+<file path=ppt/notesSlides/notesSlide27.xml><?xml version="1.0" encoding="utf-8"?>
 <p:notes xmlns:a="http://schemas.openxmlformats.org/drawingml/2006/main" xmlns:r="http://schemas.openxmlformats.org/officeDocument/2006/relationships" xmlns:mc="http://schemas.openxmlformats.org/markup-compatibility/2006" xmlns:mv="urn:schemas-microsoft-com:mac:vml" xmlns:p="http://schemas.openxmlformats.org/presentationml/2006/main" xmlns:c="http://schemas.openxmlformats.org/drawingml/2006/chart" xmlns:dgm="http://schemas.openxmlformats.org/drawingml/2006/diagram" xmlns:o="urn:schemas-microsoft-com:office:office" xmlns:v="urn:schemas-microsoft-com:vml" xmlns:pvml="urn:schemas-microsoft-com:office:powerpoint" xmlns:com="http://schemas.openxmlformats.org/drawingml/2006/compatibility" xmlns:p14="http://schemas.microsoft.com/office/powerpoint/2010/main" xmlns:p15="http://schemas.microsoft.com/office/powerpoint/2012/main" xmlns:ahyp="http://schemas.microsoft.com/office/drawing/2018/hyperlinkcolor" showMasterPhAnim="0" showMasterSp="0">
   <p:cSld>
     <p:spTree>
       <p:nvGrpSpPr>
-        <p:cNvPr id="251" name="Shape 251"/>
+        <p:cNvPr id="267" name="Shape 267"/>
         <p:cNvGrpSpPr/>
         <p:nvPr/>
       </p:nvGrpSpPr>
@@ -4258,7 +4546,7 @@
       </p:grpSpPr>
       <p:sp>
         <p:nvSpPr>
-          <p:cNvPr id="252" name="Google Shape;252;p24:notes"/>
+          <p:cNvPr id="268" name="Google Shape;268;p24:notes"/>
           <p:cNvSpPr txBox="1"/>
           <p:nvPr>
             <p:ph idx="1" type="body"/>
@@ -4297,7 +4585,7 @@
       </p:sp>
       <p:sp>
         <p:nvSpPr>
-          <p:cNvPr id="253" name="Google Shape;253;p24:notes"/>
+          <p:cNvPr id="269" name="Google Shape;269;p24:notes"/>
           <p:cNvSpPr/>
           <p:nvPr>
             <p:ph idx="2" type="sldImg"/>
@@ -4338,12 +4626,12 @@
 </p:notes>
 </file>
 
-<file path=ppt/notesSlides/notesSlide26.xml><?xml version="1.0" encoding="utf-8"?>
+<file path=ppt/notesSlides/notesSlide28.xml><?xml version="1.0" encoding="utf-8"?>
 <p:notes xmlns:a="http://schemas.openxmlformats.org/drawingml/2006/main" xmlns:r="http://schemas.openxmlformats.org/officeDocument/2006/relationships" xmlns:mc="http://schemas.openxmlformats.org/markup-compatibility/2006" xmlns:mv="urn:schemas-microsoft-com:mac:vml" xmlns:p="http://schemas.openxmlformats.org/presentationml/2006/main" xmlns:c="http://schemas.openxmlformats.org/drawingml/2006/chart" xmlns:dgm="http://schemas.openxmlformats.org/drawingml/2006/diagram" xmlns:o="urn:schemas-microsoft-com:office:office" xmlns:v="urn:schemas-microsoft-com:vml" xmlns:pvml="urn:schemas-microsoft-com:office:powerpoint" xmlns:com="http://schemas.openxmlformats.org/drawingml/2006/compatibility" xmlns:p14="http://schemas.microsoft.com/office/powerpoint/2010/main" xmlns:p15="http://schemas.microsoft.com/office/powerpoint/2012/main" xmlns:ahyp="http://schemas.microsoft.com/office/drawing/2018/hyperlinkcolor" showMasterPhAnim="0" showMasterSp="0">
   <p:cSld>
     <p:spTree>
       <p:nvGrpSpPr>
-        <p:cNvPr id="257" name="Shape 257"/>
+        <p:cNvPr id="273" name="Shape 273"/>
         <p:cNvGrpSpPr/>
         <p:nvPr/>
       </p:nvGrpSpPr>
@@ -4357,7 +4645,7 @@
       </p:grpSpPr>
       <p:sp>
         <p:nvSpPr>
-          <p:cNvPr id="258" name="Google Shape;258;p25:notes"/>
+          <p:cNvPr id="274" name="Google Shape;274;p25:notes"/>
           <p:cNvSpPr txBox="1"/>
           <p:nvPr>
             <p:ph idx="12" type="sldNum"/>
@@ -4417,7 +4705,7 @@
       </p:sp>
       <p:sp>
         <p:nvSpPr>
-          <p:cNvPr id="259" name="Google Shape;259;p25:notes"/>
+          <p:cNvPr id="275" name="Google Shape;275;p25:notes"/>
           <p:cNvSpPr/>
           <p:nvPr>
             <p:ph idx="2" type="sldImg"/>
@@ -4456,7 +4744,7 @@
       </p:sp>
       <p:sp>
         <p:nvSpPr>
-          <p:cNvPr id="260" name="Google Shape;260;p25:notes"/>
+          <p:cNvPr id="276" name="Google Shape;276;p25:notes"/>
           <p:cNvSpPr txBox="1"/>
           <p:nvPr>
             <p:ph idx="1" type="body"/>
@@ -4505,12 +4793,12 @@
 </p:notes>
 </file>
 
-<file path=ppt/notesSlides/notesSlide27.xml><?xml version="1.0" encoding="utf-8"?>
+<file path=ppt/notesSlides/notesSlide29.xml><?xml version="1.0" encoding="utf-8"?>
 <p:notes xmlns:a="http://schemas.openxmlformats.org/drawingml/2006/main" xmlns:r="http://schemas.openxmlformats.org/officeDocument/2006/relationships" xmlns:mc="http://schemas.openxmlformats.org/markup-compatibility/2006" xmlns:mv="urn:schemas-microsoft-com:mac:vml" xmlns:p="http://schemas.openxmlformats.org/presentationml/2006/main" xmlns:c="http://schemas.openxmlformats.org/drawingml/2006/chart" xmlns:dgm="http://schemas.openxmlformats.org/drawingml/2006/diagram" xmlns:o="urn:schemas-microsoft-com:office:office" xmlns:v="urn:schemas-microsoft-com:vml" xmlns:pvml="urn:schemas-microsoft-com:office:powerpoint" xmlns:com="http://schemas.openxmlformats.org/drawingml/2006/compatibility" xmlns:p14="http://schemas.microsoft.com/office/powerpoint/2010/main" xmlns:p15="http://schemas.microsoft.com/office/powerpoint/2012/main" xmlns:ahyp="http://schemas.microsoft.com/office/drawing/2018/hyperlinkcolor" showMasterPhAnim="0" showMasterSp="0">
   <p:cSld>
     <p:spTree>
       <p:nvGrpSpPr>
-        <p:cNvPr id="264" name="Shape 264"/>
+        <p:cNvPr id="280" name="Shape 280"/>
         <p:cNvGrpSpPr/>
         <p:nvPr/>
       </p:nvGrpSpPr>
@@ -4524,7 +4812,7 @@
       </p:grpSpPr>
       <p:sp>
         <p:nvSpPr>
-          <p:cNvPr id="265" name="Google Shape;265;p26:notes"/>
+          <p:cNvPr id="281" name="Google Shape;281;p26:notes"/>
           <p:cNvSpPr txBox="1"/>
           <p:nvPr>
             <p:ph idx="12" type="sldNum"/>
@@ -4584,7 +4872,7 @@
       </p:sp>
       <p:sp>
         <p:nvSpPr>
-          <p:cNvPr id="266" name="Google Shape;266;p26:notes"/>
+          <p:cNvPr id="282" name="Google Shape;282;p26:notes"/>
           <p:cNvSpPr/>
           <p:nvPr>
             <p:ph idx="2" type="sldImg"/>
@@ -4623,7 +4911,7 @@
       </p:sp>
       <p:sp>
         <p:nvSpPr>
-          <p:cNvPr id="267" name="Google Shape;267;p26:notes"/>
+          <p:cNvPr id="283" name="Google Shape;283;p26:notes"/>
           <p:cNvSpPr txBox="1"/>
           <p:nvPr>
             <p:ph idx="1" type="body"/>
@@ -4663,204 +4951,6 @@
             <a:endParaRPr/>
           </a:p>
         </p:txBody>
-      </p:sp>
-    </p:spTree>
-  </p:cSld>
-  <p:clrMapOvr>
-    <a:masterClrMapping/>
-  </p:clrMapOvr>
-</p:notes>
-</file>
-
-<file path=ppt/notesSlides/notesSlide28.xml><?xml version="1.0" encoding="utf-8"?>
-<p:notes xmlns:a="http://schemas.openxmlformats.org/drawingml/2006/main" xmlns:r="http://schemas.openxmlformats.org/officeDocument/2006/relationships" xmlns:mc="http://schemas.openxmlformats.org/markup-compatibility/2006" xmlns:mv="urn:schemas-microsoft-com:mac:vml" xmlns:p="http://schemas.openxmlformats.org/presentationml/2006/main" xmlns:c="http://schemas.openxmlformats.org/drawingml/2006/chart" xmlns:dgm="http://schemas.openxmlformats.org/drawingml/2006/diagram" xmlns:o="urn:schemas-microsoft-com:office:office" xmlns:v="urn:schemas-microsoft-com:vml" xmlns:pvml="urn:schemas-microsoft-com:office:powerpoint" xmlns:com="http://schemas.openxmlformats.org/drawingml/2006/compatibility" xmlns:p14="http://schemas.microsoft.com/office/powerpoint/2010/main" xmlns:p15="http://schemas.microsoft.com/office/powerpoint/2012/main" xmlns:ahyp="http://schemas.microsoft.com/office/drawing/2018/hyperlinkcolor" showMasterPhAnim="0" showMasterSp="0">
-  <p:cSld>
-    <p:spTree>
-      <p:nvGrpSpPr>
-        <p:cNvPr id="272" name="Shape 272"/>
-        <p:cNvGrpSpPr/>
-        <p:nvPr/>
-      </p:nvGrpSpPr>
-      <p:grpSpPr>
-        <a:xfrm>
-          <a:off x="0" y="0"/>
-          <a:ext cx="0" cy="0"/>
-          <a:chOff x="0" y="0"/>
-          <a:chExt cx="0" cy="0"/>
-        </a:xfrm>
-      </p:grpSpPr>
-      <p:sp>
-        <p:nvSpPr>
-          <p:cNvPr id="273" name="Google Shape;273;p27:notes"/>
-          <p:cNvSpPr txBox="1"/>
-          <p:nvPr>
-            <p:ph idx="1" type="body"/>
-          </p:nvPr>
-        </p:nvSpPr>
-        <p:spPr>
-          <a:xfrm>
-            <a:off x="931863" y="4410075"/>
-            <a:ext cx="5133975" cy="4176713"/>
-          </a:xfrm>
-          <a:prstGeom prst="rect">
-            <a:avLst/>
-          </a:prstGeom>
-        </p:spPr>
-        <p:txBody>
-          <a:bodyPr anchorCtr="0" anchor="t" bIns="46500" lIns="93025" spcFirstLastPara="1" rIns="93025" wrap="square" tIns="46500">
-            <a:noAutofit/>
-          </a:bodyPr>
-          <a:lstStyle/>
-          <a:p>
-            <a:pPr indent="0" lvl="0" marL="0" rtl="0" algn="l">
-              <a:spcBef>
-                <a:spcPts val="360"/>
-              </a:spcBef>
-              <a:spcAft>
-                <a:spcPts val="0"/>
-              </a:spcAft>
-              <a:buNone/>
-            </a:pPr>
-            <a:r>
-              <a:t/>
-            </a:r>
-            <a:endParaRPr/>
-          </a:p>
-        </p:txBody>
-      </p:sp>
-      <p:sp>
-        <p:nvSpPr>
-          <p:cNvPr id="274" name="Google Shape;274;p27:notes"/>
-          <p:cNvSpPr/>
-          <p:nvPr>
-            <p:ph idx="2" type="sldImg"/>
-          </p:nvPr>
-        </p:nvSpPr>
-        <p:spPr>
-          <a:xfrm>
-            <a:off x="1177925" y="696913"/>
-            <a:ext cx="4641850" cy="3481387"/>
-          </a:xfrm>
-          <a:custGeom>
-            <a:rect b="b" l="l" r="r" t="t"/>
-            <a:pathLst>
-              <a:path extrusionOk="0" h="120000" w="120000">
-                <a:moveTo>
-                  <a:pt x="0" y="0"/>
-                </a:moveTo>
-                <a:lnTo>
-                  <a:pt x="120000" y="0"/>
-                </a:lnTo>
-                <a:lnTo>
-                  <a:pt x="120000" y="120000"/>
-                </a:lnTo>
-                <a:lnTo>
-                  <a:pt x="0" y="120000"/>
-                </a:lnTo>
-                <a:close/>
-              </a:path>
-            </a:pathLst>
-          </a:custGeom>
-        </p:spPr>
-      </p:sp>
-    </p:spTree>
-  </p:cSld>
-  <p:clrMapOvr>
-    <a:masterClrMapping/>
-  </p:clrMapOvr>
-</p:notes>
-</file>
-
-<file path=ppt/notesSlides/notesSlide29.xml><?xml version="1.0" encoding="utf-8"?>
-<p:notes xmlns:a="http://schemas.openxmlformats.org/drawingml/2006/main" xmlns:r="http://schemas.openxmlformats.org/officeDocument/2006/relationships" xmlns:mc="http://schemas.openxmlformats.org/markup-compatibility/2006" xmlns:mv="urn:schemas-microsoft-com:mac:vml" xmlns:p="http://schemas.openxmlformats.org/presentationml/2006/main" xmlns:c="http://schemas.openxmlformats.org/drawingml/2006/chart" xmlns:dgm="http://schemas.openxmlformats.org/drawingml/2006/diagram" xmlns:o="urn:schemas-microsoft-com:office:office" xmlns:v="urn:schemas-microsoft-com:vml" xmlns:pvml="urn:schemas-microsoft-com:office:powerpoint" xmlns:com="http://schemas.openxmlformats.org/drawingml/2006/compatibility" xmlns:p14="http://schemas.microsoft.com/office/powerpoint/2010/main" xmlns:p15="http://schemas.microsoft.com/office/powerpoint/2012/main" xmlns:ahyp="http://schemas.microsoft.com/office/drawing/2018/hyperlinkcolor" showMasterPhAnim="0" showMasterSp="0">
-  <p:cSld>
-    <p:spTree>
-      <p:nvGrpSpPr>
-        <p:cNvPr id="278" name="Shape 278"/>
-        <p:cNvGrpSpPr/>
-        <p:nvPr/>
-      </p:nvGrpSpPr>
-      <p:grpSpPr>
-        <a:xfrm>
-          <a:off x="0" y="0"/>
-          <a:ext cx="0" cy="0"/>
-          <a:chOff x="0" y="0"/>
-          <a:chExt cx="0" cy="0"/>
-        </a:xfrm>
-      </p:grpSpPr>
-      <p:sp>
-        <p:nvSpPr>
-          <p:cNvPr id="279" name="Google Shape;279;p28:notes"/>
-          <p:cNvSpPr txBox="1"/>
-          <p:nvPr>
-            <p:ph idx="1" type="body"/>
-          </p:nvPr>
-        </p:nvSpPr>
-        <p:spPr>
-          <a:xfrm>
-            <a:off x="931863" y="4410075"/>
-            <a:ext cx="5133975" cy="4176713"/>
-          </a:xfrm>
-          <a:prstGeom prst="rect">
-            <a:avLst/>
-          </a:prstGeom>
-        </p:spPr>
-        <p:txBody>
-          <a:bodyPr anchorCtr="0" anchor="t" bIns="46500" lIns="93025" spcFirstLastPara="1" rIns="93025" wrap="square" tIns="46500">
-            <a:noAutofit/>
-          </a:bodyPr>
-          <a:lstStyle/>
-          <a:p>
-            <a:pPr indent="0" lvl="0" marL="0" rtl="0" algn="l">
-              <a:spcBef>
-                <a:spcPts val="360"/>
-              </a:spcBef>
-              <a:spcAft>
-                <a:spcPts val="0"/>
-              </a:spcAft>
-              <a:buNone/>
-            </a:pPr>
-            <a:r>
-              <a:t/>
-            </a:r>
-            <a:endParaRPr/>
-          </a:p>
-        </p:txBody>
-      </p:sp>
-      <p:sp>
-        <p:nvSpPr>
-          <p:cNvPr id="280" name="Google Shape;280;p28:notes"/>
-          <p:cNvSpPr/>
-          <p:nvPr>
-            <p:ph idx="2" type="sldImg"/>
-          </p:nvPr>
-        </p:nvSpPr>
-        <p:spPr>
-          <a:xfrm>
-            <a:off x="1177925" y="696913"/>
-            <a:ext cx="4641850" cy="3481387"/>
-          </a:xfrm>
-          <a:custGeom>
-            <a:rect b="b" l="l" r="r" t="t"/>
-            <a:pathLst>
-              <a:path extrusionOk="0" h="120000" w="120000">
-                <a:moveTo>
-                  <a:pt x="0" y="0"/>
-                </a:moveTo>
-                <a:lnTo>
-                  <a:pt x="120000" y="0"/>
-                </a:lnTo>
-                <a:lnTo>
-                  <a:pt x="120000" y="120000"/>
-                </a:lnTo>
-                <a:lnTo>
-                  <a:pt x="0" y="120000"/>
-                </a:lnTo>
-                <a:close/>
-              </a:path>
-            </a:pathLst>
-          </a:custGeom>
-        </p:spPr>
       </p:sp>
     </p:spTree>
   </p:cSld>
@@ -5042,7 +5132,7 @@
   <p:cSld>
     <p:spTree>
       <p:nvGrpSpPr>
-        <p:cNvPr id="286" name="Shape 286"/>
+        <p:cNvPr id="288" name="Shape 288"/>
         <p:cNvGrpSpPr/>
         <p:nvPr/>
       </p:nvGrpSpPr>
@@ -5056,7 +5146,7 @@
       </p:grpSpPr>
       <p:sp>
         <p:nvSpPr>
-          <p:cNvPr id="287" name="Google Shape;287;p29:notes"/>
+          <p:cNvPr id="289" name="Google Shape;289;p27:notes"/>
           <p:cNvSpPr txBox="1"/>
           <p:nvPr>
             <p:ph idx="1" type="body"/>
@@ -5095,7 +5185,7 @@
       </p:sp>
       <p:sp>
         <p:nvSpPr>
-          <p:cNvPr id="288" name="Google Shape;288;p29:notes"/>
+          <p:cNvPr id="290" name="Google Shape;290;p27:notes"/>
           <p:cNvSpPr/>
           <p:nvPr>
             <p:ph idx="2" type="sldImg"/>
@@ -5141,7 +5231,7 @@
   <p:cSld>
     <p:spTree>
       <p:nvGrpSpPr>
-        <p:cNvPr id="292" name="Shape 292"/>
+        <p:cNvPr id="297" name="Shape 297"/>
         <p:cNvGrpSpPr/>
         <p:nvPr/>
       </p:nvGrpSpPr>
@@ -5155,67 +5245,46 @@
       </p:grpSpPr>
       <p:sp>
         <p:nvSpPr>
-          <p:cNvPr id="293" name="Google Shape;293;p30:notes"/>
+          <p:cNvPr id="298" name="Google Shape;298;p28:notes"/>
           <p:cNvSpPr txBox="1"/>
           <p:nvPr>
-            <p:ph idx="12" type="sldNum"/>
+            <p:ph idx="1" type="body"/>
           </p:nvPr>
         </p:nvSpPr>
         <p:spPr>
           <a:xfrm>
-            <a:off x="3965575" y="8820150"/>
-            <a:ext cx="3032125" cy="463550"/>
+            <a:off x="931863" y="4410075"/>
+            <a:ext cx="5133975" cy="4176713"/>
           </a:xfrm>
           <a:prstGeom prst="rect">
             <a:avLst/>
           </a:prstGeom>
-          <a:noFill/>
-          <a:ln>
-            <a:noFill/>
-          </a:ln>
         </p:spPr>
         <p:txBody>
-          <a:bodyPr anchorCtr="0" anchor="b" bIns="46500" lIns="93025" spcFirstLastPara="1" rIns="93025" wrap="square" tIns="46500">
+          <a:bodyPr anchorCtr="0" anchor="t" bIns="46500" lIns="93025" spcFirstLastPara="1" rIns="93025" wrap="square" tIns="46500">
             <a:noAutofit/>
           </a:bodyPr>
           <a:lstStyle/>
           <a:p>
-            <a:pPr indent="0" lvl="0" marL="0" rtl="0" algn="r">
-              <a:spcBef>
-                <a:spcPts val="0"/>
-              </a:spcBef>
-              <a:spcAft>
-                <a:spcPts val="0"/>
-              </a:spcAft>
-              <a:buNone/>
-            </a:pPr>
-            <a:fld id="{00000000-1234-1234-1234-123412341234}" type="slidenum">
-              <a:rPr lang="en-US" sz="1200">
-                <a:solidFill>
-                  <a:schemeClr val="dk1"/>
-                </a:solidFill>
-                <a:latin typeface="Times New Roman"/>
-                <a:ea typeface="Times New Roman"/>
-                <a:cs typeface="Times New Roman"/>
-                <a:sym typeface="Times New Roman"/>
-              </a:rPr>
-              <a:t>‹#›</a:t>
-            </a:fld>
-            <a:endParaRPr sz="1200">
-              <a:solidFill>
-                <a:schemeClr val="dk1"/>
-              </a:solidFill>
-              <a:latin typeface="Times New Roman"/>
-              <a:ea typeface="Times New Roman"/>
-              <a:cs typeface="Times New Roman"/>
-              <a:sym typeface="Times New Roman"/>
-            </a:endParaRPr>
+            <a:pPr indent="0" lvl="0" marL="0" rtl="0" algn="l">
+              <a:spcBef>
+                <a:spcPts val="360"/>
+              </a:spcBef>
+              <a:spcAft>
+                <a:spcPts val="0"/>
+              </a:spcAft>
+              <a:buNone/>
+            </a:pPr>
+            <a:r>
+              <a:t/>
+            </a:r>
+            <a:endParaRPr/>
           </a:p>
         </p:txBody>
       </p:sp>
       <p:sp>
         <p:nvSpPr>
-          <p:cNvPr id="294" name="Google Shape;294;p30:notes"/>
+          <p:cNvPr id="299" name="Google Shape;299;p28:notes"/>
           <p:cNvSpPr/>
           <p:nvPr>
             <p:ph idx="2" type="sldImg"/>
@@ -5246,54 +5315,7 @@
               </a:path>
             </a:pathLst>
           </a:custGeom>
-          <a:noFill/>
-          <a:ln>
-            <a:noFill/>
-          </a:ln>
         </p:spPr>
-      </p:sp>
-      <p:sp>
-        <p:nvSpPr>
-          <p:cNvPr id="295" name="Google Shape;295;p30:notes"/>
-          <p:cNvSpPr txBox="1"/>
-          <p:nvPr>
-            <p:ph idx="1" type="body"/>
-          </p:nvPr>
-        </p:nvSpPr>
-        <p:spPr>
-          <a:xfrm>
-            <a:off x="931863" y="4410075"/>
-            <a:ext cx="5133975" cy="4176713"/>
-          </a:xfrm>
-          <a:prstGeom prst="rect">
-            <a:avLst/>
-          </a:prstGeom>
-          <a:noFill/>
-          <a:ln>
-            <a:noFill/>
-          </a:ln>
-        </p:spPr>
-        <p:txBody>
-          <a:bodyPr anchorCtr="0" anchor="t" bIns="46500" lIns="93025" spcFirstLastPara="1" rIns="93025" wrap="square" tIns="46500">
-            <a:noAutofit/>
-          </a:bodyPr>
-          <a:lstStyle/>
-          <a:p>
-            <a:pPr indent="0" lvl="0" marL="0" rtl="0" algn="l">
-              <a:spcBef>
-                <a:spcPts val="0"/>
-              </a:spcBef>
-              <a:spcAft>
-                <a:spcPts val="0"/>
-              </a:spcAft>
-              <a:buNone/>
-            </a:pPr>
-            <a:r>
-              <a:t/>
-            </a:r>
-            <a:endParaRPr/>
-          </a:p>
-        </p:txBody>
       </p:sp>
     </p:spTree>
   </p:cSld>
@@ -5308,7 +5330,7 @@
   <p:cSld>
     <p:spTree>
       <p:nvGrpSpPr>
-        <p:cNvPr id="300" name="Shape 300"/>
+        <p:cNvPr id="305" name="Shape 305"/>
         <p:cNvGrpSpPr/>
         <p:nvPr/>
       </p:nvGrpSpPr>
@@ -5322,7 +5344,7 @@
       </p:grpSpPr>
       <p:sp>
         <p:nvSpPr>
-          <p:cNvPr id="301" name="Google Shape;301;p31:notes"/>
+          <p:cNvPr id="306" name="Google Shape;306;p29:notes"/>
           <p:cNvSpPr txBox="1"/>
           <p:nvPr>
             <p:ph idx="1" type="body"/>
@@ -5361,7 +5383,7 @@
       </p:sp>
       <p:sp>
         <p:nvSpPr>
-          <p:cNvPr id="302" name="Google Shape;302;p31:notes"/>
+          <p:cNvPr id="307" name="Google Shape;307;p29:notes"/>
           <p:cNvSpPr/>
           <p:nvPr>
             <p:ph idx="2" type="sldImg"/>
@@ -5407,7 +5429,7 @@
   <p:cSld>
     <p:spTree>
       <p:nvGrpSpPr>
-        <p:cNvPr id="306" name="Shape 306"/>
+        <p:cNvPr id="312" name="Shape 312"/>
         <p:cNvGrpSpPr/>
         <p:nvPr/>
       </p:nvGrpSpPr>
@@ -5421,7 +5443,7 @@
       </p:grpSpPr>
       <p:sp>
         <p:nvSpPr>
-          <p:cNvPr id="307" name="Google Shape;307;p32:notes"/>
+          <p:cNvPr id="313" name="Google Shape;313;p30:notes"/>
           <p:cNvSpPr txBox="1"/>
           <p:nvPr>
             <p:ph idx="12" type="sldNum"/>
@@ -5481,7 +5503,7 @@
       </p:sp>
       <p:sp>
         <p:nvSpPr>
-          <p:cNvPr id="308" name="Google Shape;308;p32:notes"/>
+          <p:cNvPr id="314" name="Google Shape;314;p30:notes"/>
           <p:cNvSpPr/>
           <p:nvPr>
             <p:ph idx="2" type="sldImg"/>
@@ -5520,7 +5542,7 @@
       </p:sp>
       <p:sp>
         <p:nvSpPr>
-          <p:cNvPr id="309" name="Google Shape;309;p32:notes"/>
+          <p:cNvPr id="315" name="Google Shape;315;p30:notes"/>
           <p:cNvSpPr txBox="1"/>
           <p:nvPr>
             <p:ph idx="1" type="body"/>
@@ -5574,173 +5596,6 @@
   <p:cSld>
     <p:spTree>
       <p:nvGrpSpPr>
-        <p:cNvPr id="314" name="Shape 314"/>
-        <p:cNvGrpSpPr/>
-        <p:nvPr/>
-      </p:nvGrpSpPr>
-      <p:grpSpPr>
-        <a:xfrm>
-          <a:off x="0" y="0"/>
-          <a:ext cx="0" cy="0"/>
-          <a:chOff x="0" y="0"/>
-          <a:chExt cx="0" cy="0"/>
-        </a:xfrm>
-      </p:grpSpPr>
-      <p:sp>
-        <p:nvSpPr>
-          <p:cNvPr id="315" name="Google Shape;315;p33:notes"/>
-          <p:cNvSpPr txBox="1"/>
-          <p:nvPr>
-            <p:ph idx="12" type="sldNum"/>
-          </p:nvPr>
-        </p:nvSpPr>
-        <p:spPr>
-          <a:xfrm>
-            <a:off x="3965575" y="8820150"/>
-            <a:ext cx="3032125" cy="463550"/>
-          </a:xfrm>
-          <a:prstGeom prst="rect">
-            <a:avLst/>
-          </a:prstGeom>
-          <a:noFill/>
-          <a:ln>
-            <a:noFill/>
-          </a:ln>
-        </p:spPr>
-        <p:txBody>
-          <a:bodyPr anchorCtr="0" anchor="b" bIns="46500" lIns="93025" spcFirstLastPara="1" rIns="93025" wrap="square" tIns="46500">
-            <a:noAutofit/>
-          </a:bodyPr>
-          <a:lstStyle/>
-          <a:p>
-            <a:pPr indent="0" lvl="0" marL="0" rtl="0" algn="r">
-              <a:spcBef>
-                <a:spcPts val="0"/>
-              </a:spcBef>
-              <a:spcAft>
-                <a:spcPts val="0"/>
-              </a:spcAft>
-              <a:buNone/>
-            </a:pPr>
-            <a:fld id="{00000000-1234-1234-1234-123412341234}" type="slidenum">
-              <a:rPr lang="en-US" sz="1200">
-                <a:solidFill>
-                  <a:schemeClr val="dk1"/>
-                </a:solidFill>
-                <a:latin typeface="Times New Roman"/>
-                <a:ea typeface="Times New Roman"/>
-                <a:cs typeface="Times New Roman"/>
-                <a:sym typeface="Times New Roman"/>
-              </a:rPr>
-              <a:t>‹#›</a:t>
-            </a:fld>
-            <a:endParaRPr sz="1200">
-              <a:solidFill>
-                <a:schemeClr val="dk1"/>
-              </a:solidFill>
-              <a:latin typeface="Times New Roman"/>
-              <a:ea typeface="Times New Roman"/>
-              <a:cs typeface="Times New Roman"/>
-              <a:sym typeface="Times New Roman"/>
-            </a:endParaRPr>
-          </a:p>
-        </p:txBody>
-      </p:sp>
-      <p:sp>
-        <p:nvSpPr>
-          <p:cNvPr id="316" name="Google Shape;316;p33:notes"/>
-          <p:cNvSpPr/>
-          <p:nvPr>
-            <p:ph idx="2" type="sldImg"/>
-          </p:nvPr>
-        </p:nvSpPr>
-        <p:spPr>
-          <a:xfrm>
-            <a:off x="1177925" y="696913"/>
-            <a:ext cx="4641850" cy="3481387"/>
-          </a:xfrm>
-          <a:custGeom>
-            <a:rect b="b" l="l" r="r" t="t"/>
-            <a:pathLst>
-              <a:path extrusionOk="0" h="120000" w="120000">
-                <a:moveTo>
-                  <a:pt x="0" y="0"/>
-                </a:moveTo>
-                <a:lnTo>
-                  <a:pt x="120000" y="0"/>
-                </a:lnTo>
-                <a:lnTo>
-                  <a:pt x="120000" y="120000"/>
-                </a:lnTo>
-                <a:lnTo>
-                  <a:pt x="0" y="120000"/>
-                </a:lnTo>
-                <a:close/>
-              </a:path>
-            </a:pathLst>
-          </a:custGeom>
-          <a:noFill/>
-          <a:ln>
-            <a:noFill/>
-          </a:ln>
-        </p:spPr>
-      </p:sp>
-      <p:sp>
-        <p:nvSpPr>
-          <p:cNvPr id="317" name="Google Shape;317;p33:notes"/>
-          <p:cNvSpPr txBox="1"/>
-          <p:nvPr>
-            <p:ph idx="1" type="body"/>
-          </p:nvPr>
-        </p:nvSpPr>
-        <p:spPr>
-          <a:xfrm>
-            <a:off x="931863" y="4410075"/>
-            <a:ext cx="5133975" cy="4176713"/>
-          </a:xfrm>
-          <a:prstGeom prst="rect">
-            <a:avLst/>
-          </a:prstGeom>
-          <a:noFill/>
-          <a:ln>
-            <a:noFill/>
-          </a:ln>
-        </p:spPr>
-        <p:txBody>
-          <a:bodyPr anchorCtr="0" anchor="t" bIns="46500" lIns="93025" spcFirstLastPara="1" rIns="93025" wrap="square" tIns="46500">
-            <a:noAutofit/>
-          </a:bodyPr>
-          <a:lstStyle/>
-          <a:p>
-            <a:pPr indent="0" lvl="0" marL="0" rtl="0" algn="l">
-              <a:spcBef>
-                <a:spcPts val="0"/>
-              </a:spcBef>
-              <a:spcAft>
-                <a:spcPts val="0"/>
-              </a:spcAft>
-              <a:buNone/>
-            </a:pPr>
-            <a:r>
-              <a:t/>
-            </a:r>
-            <a:endParaRPr/>
-          </a:p>
-        </p:txBody>
-      </p:sp>
-    </p:spTree>
-  </p:cSld>
-  <p:clrMapOvr>
-    <a:masterClrMapping/>
-  </p:clrMapOvr>
-</p:notes>
-</file>
-
-<file path=ppt/notesSlides/notesSlide35.xml><?xml version="1.0" encoding="utf-8"?>
-<p:notes xmlns:a="http://schemas.openxmlformats.org/drawingml/2006/main" xmlns:r="http://schemas.openxmlformats.org/officeDocument/2006/relationships" xmlns:mc="http://schemas.openxmlformats.org/markup-compatibility/2006" xmlns:mv="urn:schemas-microsoft-com:mac:vml" xmlns:p="http://schemas.openxmlformats.org/presentationml/2006/main" xmlns:c="http://schemas.openxmlformats.org/drawingml/2006/chart" xmlns:dgm="http://schemas.openxmlformats.org/drawingml/2006/diagram" xmlns:o="urn:schemas-microsoft-com:office:office" xmlns:v="urn:schemas-microsoft-com:vml" xmlns:pvml="urn:schemas-microsoft-com:office:powerpoint" xmlns:com="http://schemas.openxmlformats.org/drawingml/2006/compatibility" xmlns:p14="http://schemas.microsoft.com/office/powerpoint/2010/main" xmlns:p15="http://schemas.microsoft.com/office/powerpoint/2012/main" xmlns:ahyp="http://schemas.microsoft.com/office/drawing/2018/hyperlinkcolor" showMasterPhAnim="0" showMasterSp="0">
-  <p:cSld>
-    <p:spTree>
-      <p:nvGrpSpPr>
         <p:cNvPr id="322" name="Shape 322"/>
         <p:cNvGrpSpPr/>
         <p:nvPr/>
@@ -5755,7 +5610,7 @@
       </p:grpSpPr>
       <p:sp>
         <p:nvSpPr>
-          <p:cNvPr id="323" name="Google Shape;323;p34:notes"/>
+          <p:cNvPr id="323" name="Google Shape;323;p31:notes"/>
           <p:cNvSpPr txBox="1"/>
           <p:nvPr>
             <p:ph idx="1" type="body"/>
@@ -5794,7 +5649,7 @@
       </p:sp>
       <p:sp>
         <p:nvSpPr>
-          <p:cNvPr id="324" name="Google Shape;324;p34:notes"/>
+          <p:cNvPr id="324" name="Google Shape;324;p31:notes"/>
           <p:cNvSpPr/>
           <p:nvPr>
             <p:ph idx="2" type="sldImg"/>
@@ -5835,7 +5690,7 @@
 </p:notes>
 </file>
 
-<file path=ppt/notesSlides/notesSlide36.xml><?xml version="1.0" encoding="utf-8"?>
+<file path=ppt/notesSlides/notesSlide35.xml><?xml version="1.0" encoding="utf-8"?>
 <p:notes xmlns:a="http://schemas.openxmlformats.org/drawingml/2006/main" xmlns:r="http://schemas.openxmlformats.org/officeDocument/2006/relationships" xmlns:mc="http://schemas.openxmlformats.org/markup-compatibility/2006" xmlns:mv="urn:schemas-microsoft-com:mac:vml" xmlns:p="http://schemas.openxmlformats.org/presentationml/2006/main" xmlns:c="http://schemas.openxmlformats.org/drawingml/2006/chart" xmlns:dgm="http://schemas.openxmlformats.org/drawingml/2006/diagram" xmlns:o="urn:schemas-microsoft-com:office:office" xmlns:v="urn:schemas-microsoft-com:vml" xmlns:pvml="urn:schemas-microsoft-com:office:powerpoint" xmlns:com="http://schemas.openxmlformats.org/drawingml/2006/compatibility" xmlns:p14="http://schemas.microsoft.com/office/powerpoint/2010/main" xmlns:p15="http://schemas.microsoft.com/office/powerpoint/2012/main" xmlns:ahyp="http://schemas.microsoft.com/office/drawing/2018/hyperlinkcolor" showMasterPhAnim="0" showMasterSp="0">
   <p:cSld>
     <p:spTree>
@@ -5854,7 +5709,7 @@
       </p:grpSpPr>
       <p:sp>
         <p:nvSpPr>
-          <p:cNvPr id="329" name="Google Shape;329;p35:notes"/>
+          <p:cNvPr id="329" name="Google Shape;329;p32:notes"/>
           <p:cNvSpPr txBox="1"/>
           <p:nvPr>
             <p:ph idx="12" type="sldNum"/>
@@ -5914,7 +5769,7 @@
       </p:sp>
       <p:sp>
         <p:nvSpPr>
-          <p:cNvPr id="330" name="Google Shape;330;p35:notes"/>
+          <p:cNvPr id="330" name="Google Shape;330;p32:notes"/>
           <p:cNvSpPr/>
           <p:nvPr>
             <p:ph idx="2" type="sldImg"/>
@@ -5953,7 +5808,7 @@
       </p:sp>
       <p:sp>
         <p:nvSpPr>
-          <p:cNvPr id="331" name="Google Shape;331;p35:notes"/>
+          <p:cNvPr id="331" name="Google Shape;331;p32:notes"/>
           <p:cNvSpPr txBox="1"/>
           <p:nvPr>
             <p:ph idx="1" type="body"/>
@@ -6002,7 +5857,7 @@
 </p:notes>
 </file>
 
-<file path=ppt/notesSlides/notesSlide37.xml><?xml version="1.0" encoding="utf-8"?>
+<file path=ppt/notesSlides/notesSlide36.xml><?xml version="1.0" encoding="utf-8"?>
 <p:notes xmlns:a="http://schemas.openxmlformats.org/drawingml/2006/main" xmlns:r="http://schemas.openxmlformats.org/officeDocument/2006/relationships" xmlns:mc="http://schemas.openxmlformats.org/markup-compatibility/2006" xmlns:mv="urn:schemas-microsoft-com:mac:vml" xmlns:p="http://schemas.openxmlformats.org/presentationml/2006/main" xmlns:c="http://schemas.openxmlformats.org/drawingml/2006/chart" xmlns:dgm="http://schemas.openxmlformats.org/drawingml/2006/diagram" xmlns:o="urn:schemas-microsoft-com:office:office" xmlns:v="urn:schemas-microsoft-com:vml" xmlns:pvml="urn:schemas-microsoft-com:office:powerpoint" xmlns:com="http://schemas.openxmlformats.org/drawingml/2006/compatibility" xmlns:p14="http://schemas.microsoft.com/office/powerpoint/2010/main" xmlns:p15="http://schemas.microsoft.com/office/powerpoint/2012/main" xmlns:ahyp="http://schemas.microsoft.com/office/drawing/2018/hyperlinkcolor" showMasterPhAnim="0" showMasterSp="0">
   <p:cSld>
     <p:spTree>
@@ -6021,7 +5876,7 @@
       </p:grpSpPr>
       <p:sp>
         <p:nvSpPr>
-          <p:cNvPr id="337" name="Google Shape;337;p36:notes"/>
+          <p:cNvPr id="337" name="Google Shape;337;p33:notes"/>
           <p:cNvSpPr txBox="1"/>
           <p:nvPr>
             <p:ph idx="12" type="sldNum"/>
@@ -6081,7 +5936,7 @@
       </p:sp>
       <p:sp>
         <p:nvSpPr>
-          <p:cNvPr id="338" name="Google Shape;338;p36:notes"/>
+          <p:cNvPr id="338" name="Google Shape;338;p33:notes"/>
           <p:cNvSpPr/>
           <p:nvPr>
             <p:ph idx="2" type="sldImg"/>
@@ -6120,7 +5975,7 @@
       </p:sp>
       <p:sp>
         <p:nvSpPr>
-          <p:cNvPr id="339" name="Google Shape;339;p36:notes"/>
+          <p:cNvPr id="339" name="Google Shape;339;p33:notes"/>
           <p:cNvSpPr txBox="1"/>
           <p:nvPr>
             <p:ph idx="1" type="body"/>
@@ -6169,12 +6024,12 @@
 </p:notes>
 </file>
 
-<file path=ppt/notesSlides/notesSlide38.xml><?xml version="1.0" encoding="utf-8"?>
+<file path=ppt/notesSlides/notesSlide37.xml><?xml version="1.0" encoding="utf-8"?>
 <p:notes xmlns:a="http://schemas.openxmlformats.org/drawingml/2006/main" xmlns:r="http://schemas.openxmlformats.org/officeDocument/2006/relationships" xmlns:mc="http://schemas.openxmlformats.org/markup-compatibility/2006" xmlns:mv="urn:schemas-microsoft-com:mac:vml" xmlns:p="http://schemas.openxmlformats.org/presentationml/2006/main" xmlns:c="http://schemas.openxmlformats.org/drawingml/2006/chart" xmlns:dgm="http://schemas.openxmlformats.org/drawingml/2006/diagram" xmlns:o="urn:schemas-microsoft-com:office:office" xmlns:v="urn:schemas-microsoft-com:vml" xmlns:pvml="urn:schemas-microsoft-com:office:powerpoint" xmlns:com="http://schemas.openxmlformats.org/drawingml/2006/compatibility" xmlns:p14="http://schemas.microsoft.com/office/powerpoint/2010/main" xmlns:p15="http://schemas.microsoft.com/office/powerpoint/2012/main" xmlns:ahyp="http://schemas.microsoft.com/office/drawing/2018/hyperlinkcolor" showMasterPhAnim="0" showMasterSp="0">
   <p:cSld>
     <p:spTree>
       <p:nvGrpSpPr>
-        <p:cNvPr id="343" name="Shape 343"/>
+        <p:cNvPr id="344" name="Shape 344"/>
         <p:cNvGrpSpPr/>
         <p:nvPr/>
       </p:nvGrpSpPr>
@@ -6188,7 +6043,106 @@
       </p:grpSpPr>
       <p:sp>
         <p:nvSpPr>
-          <p:cNvPr id="344" name="Google Shape;344;p37:notes"/>
+          <p:cNvPr id="345" name="Google Shape;345;p34:notes"/>
+          <p:cNvSpPr txBox="1"/>
+          <p:nvPr>
+            <p:ph idx="1" type="body"/>
+          </p:nvPr>
+        </p:nvSpPr>
+        <p:spPr>
+          <a:xfrm>
+            <a:off x="931863" y="4410075"/>
+            <a:ext cx="5133975" cy="4176713"/>
+          </a:xfrm>
+          <a:prstGeom prst="rect">
+            <a:avLst/>
+          </a:prstGeom>
+        </p:spPr>
+        <p:txBody>
+          <a:bodyPr anchorCtr="0" anchor="t" bIns="46500" lIns="93025" spcFirstLastPara="1" rIns="93025" wrap="square" tIns="46500">
+            <a:noAutofit/>
+          </a:bodyPr>
+          <a:lstStyle/>
+          <a:p>
+            <a:pPr indent="0" lvl="0" marL="0" rtl="0" algn="l">
+              <a:spcBef>
+                <a:spcPts val="360"/>
+              </a:spcBef>
+              <a:spcAft>
+                <a:spcPts val="0"/>
+              </a:spcAft>
+              <a:buNone/>
+            </a:pPr>
+            <a:r>
+              <a:t/>
+            </a:r>
+            <a:endParaRPr/>
+          </a:p>
+        </p:txBody>
+      </p:sp>
+      <p:sp>
+        <p:nvSpPr>
+          <p:cNvPr id="346" name="Google Shape;346;p34:notes"/>
+          <p:cNvSpPr/>
+          <p:nvPr>
+            <p:ph idx="2" type="sldImg"/>
+          </p:nvPr>
+        </p:nvSpPr>
+        <p:spPr>
+          <a:xfrm>
+            <a:off x="1177925" y="696913"/>
+            <a:ext cx="4641850" cy="3481387"/>
+          </a:xfrm>
+          <a:custGeom>
+            <a:rect b="b" l="l" r="r" t="t"/>
+            <a:pathLst>
+              <a:path extrusionOk="0" h="120000" w="120000">
+                <a:moveTo>
+                  <a:pt x="0" y="0"/>
+                </a:moveTo>
+                <a:lnTo>
+                  <a:pt x="120000" y="0"/>
+                </a:lnTo>
+                <a:lnTo>
+                  <a:pt x="120000" y="120000"/>
+                </a:lnTo>
+                <a:lnTo>
+                  <a:pt x="0" y="120000"/>
+                </a:lnTo>
+                <a:close/>
+              </a:path>
+            </a:pathLst>
+          </a:custGeom>
+        </p:spPr>
+      </p:sp>
+    </p:spTree>
+  </p:cSld>
+  <p:clrMapOvr>
+    <a:masterClrMapping/>
+  </p:clrMapOvr>
+</p:notes>
+</file>
+
+<file path=ppt/notesSlides/notesSlide38.xml><?xml version="1.0" encoding="utf-8"?>
+<p:notes xmlns:a="http://schemas.openxmlformats.org/drawingml/2006/main" xmlns:r="http://schemas.openxmlformats.org/officeDocument/2006/relationships" xmlns:mc="http://schemas.openxmlformats.org/markup-compatibility/2006" xmlns:mv="urn:schemas-microsoft-com:mac:vml" xmlns:p="http://schemas.openxmlformats.org/presentationml/2006/main" xmlns:c="http://schemas.openxmlformats.org/drawingml/2006/chart" xmlns:dgm="http://schemas.openxmlformats.org/drawingml/2006/diagram" xmlns:o="urn:schemas-microsoft-com:office:office" xmlns:v="urn:schemas-microsoft-com:vml" xmlns:pvml="urn:schemas-microsoft-com:office:powerpoint" xmlns:com="http://schemas.openxmlformats.org/drawingml/2006/compatibility" xmlns:p14="http://schemas.microsoft.com/office/powerpoint/2010/main" xmlns:p15="http://schemas.microsoft.com/office/powerpoint/2012/main" xmlns:ahyp="http://schemas.microsoft.com/office/drawing/2018/hyperlinkcolor" showMasterPhAnim="0" showMasterSp="0">
+  <p:cSld>
+    <p:spTree>
+      <p:nvGrpSpPr>
+        <p:cNvPr id="350" name="Shape 350"/>
+        <p:cNvGrpSpPr/>
+        <p:nvPr/>
+      </p:nvGrpSpPr>
+      <p:grpSpPr>
+        <a:xfrm>
+          <a:off x="0" y="0"/>
+          <a:ext cx="0" cy="0"/>
+          <a:chOff x="0" y="0"/>
+          <a:chExt cx="0" cy="0"/>
+        </a:xfrm>
+      </p:grpSpPr>
+      <p:sp>
+        <p:nvSpPr>
+          <p:cNvPr id="351" name="Google Shape;351;p35:notes"/>
           <p:cNvSpPr txBox="1"/>
           <p:nvPr>
             <p:ph idx="12" type="sldNum"/>
@@ -6248,7 +6202,7 @@
       </p:sp>
       <p:sp>
         <p:nvSpPr>
-          <p:cNvPr id="345" name="Google Shape;345;p37:notes"/>
+          <p:cNvPr id="352" name="Google Shape;352;p35:notes"/>
           <p:cNvSpPr/>
           <p:nvPr>
             <p:ph idx="2" type="sldImg"/>
@@ -6287,7 +6241,7 @@
       </p:sp>
       <p:sp>
         <p:nvSpPr>
-          <p:cNvPr id="346" name="Google Shape;346;p37:notes"/>
+          <p:cNvPr id="353" name="Google Shape;353;p35:notes"/>
           <p:cNvSpPr txBox="1"/>
           <p:nvPr>
             <p:ph idx="1" type="body"/>
@@ -6341,7 +6295,7 @@
   <p:cSld>
     <p:spTree>
       <p:nvGrpSpPr>
-        <p:cNvPr id="350" name="Shape 350"/>
+        <p:cNvPr id="358" name="Shape 358"/>
         <p:cNvGrpSpPr/>
         <p:nvPr/>
       </p:nvGrpSpPr>
@@ -6355,46 +6309,67 @@
       </p:grpSpPr>
       <p:sp>
         <p:nvSpPr>
-          <p:cNvPr id="351" name="Google Shape;351;p38:notes"/>
+          <p:cNvPr id="359" name="Google Shape;359;p36:notes"/>
           <p:cNvSpPr txBox="1"/>
           <p:nvPr>
-            <p:ph idx="1" type="body"/>
+            <p:ph idx="12" type="sldNum"/>
           </p:nvPr>
         </p:nvSpPr>
         <p:spPr>
           <a:xfrm>
-            <a:off x="931863" y="4410075"/>
-            <a:ext cx="5133975" cy="4176713"/>
+            <a:off x="3965575" y="8820150"/>
+            <a:ext cx="3032125" cy="463550"/>
           </a:xfrm>
           <a:prstGeom prst="rect">
             <a:avLst/>
           </a:prstGeom>
+          <a:noFill/>
+          <a:ln>
+            <a:noFill/>
+          </a:ln>
         </p:spPr>
         <p:txBody>
-          <a:bodyPr anchorCtr="0" anchor="t" bIns="46500" lIns="93025" spcFirstLastPara="1" rIns="93025" wrap="square" tIns="46500">
+          <a:bodyPr anchorCtr="0" anchor="b" bIns="46500" lIns="93025" spcFirstLastPara="1" rIns="93025" wrap="square" tIns="46500">
             <a:noAutofit/>
           </a:bodyPr>
           <a:lstStyle/>
           <a:p>
-            <a:pPr indent="0" lvl="0" marL="0" rtl="0" algn="l">
-              <a:spcBef>
-                <a:spcPts val="360"/>
-              </a:spcBef>
-              <a:spcAft>
-                <a:spcPts val="0"/>
-              </a:spcAft>
-              <a:buNone/>
-            </a:pPr>
-            <a:r>
-              <a:t/>
-            </a:r>
-            <a:endParaRPr/>
+            <a:pPr indent="0" lvl="0" marL="0" rtl="0" algn="r">
+              <a:spcBef>
+                <a:spcPts val="0"/>
+              </a:spcBef>
+              <a:spcAft>
+                <a:spcPts val="0"/>
+              </a:spcAft>
+              <a:buNone/>
+            </a:pPr>
+            <a:fld id="{00000000-1234-1234-1234-123412341234}" type="slidenum">
+              <a:rPr lang="en-US" sz="1200">
+                <a:solidFill>
+                  <a:schemeClr val="dk1"/>
+                </a:solidFill>
+                <a:latin typeface="Times New Roman"/>
+                <a:ea typeface="Times New Roman"/>
+                <a:cs typeface="Times New Roman"/>
+                <a:sym typeface="Times New Roman"/>
+              </a:rPr>
+              <a:t>‹#›</a:t>
+            </a:fld>
+            <a:endParaRPr sz="1200">
+              <a:solidFill>
+                <a:schemeClr val="dk1"/>
+              </a:solidFill>
+              <a:latin typeface="Times New Roman"/>
+              <a:ea typeface="Times New Roman"/>
+              <a:cs typeface="Times New Roman"/>
+              <a:sym typeface="Times New Roman"/>
+            </a:endParaRPr>
           </a:p>
         </p:txBody>
       </p:sp>
       <p:sp>
         <p:nvSpPr>
-          <p:cNvPr id="352" name="Google Shape;352;p38:notes"/>
+          <p:cNvPr id="360" name="Google Shape;360;p36:notes"/>
           <p:cNvSpPr/>
           <p:nvPr>
             <p:ph idx="2" type="sldImg"/>
@@ -6425,7 +6400,54 @@
               </a:path>
             </a:pathLst>
           </a:custGeom>
+          <a:noFill/>
+          <a:ln>
+            <a:noFill/>
+          </a:ln>
         </p:spPr>
+      </p:sp>
+      <p:sp>
+        <p:nvSpPr>
+          <p:cNvPr id="361" name="Google Shape;361;p36:notes"/>
+          <p:cNvSpPr txBox="1"/>
+          <p:nvPr>
+            <p:ph idx="1" type="body"/>
+          </p:nvPr>
+        </p:nvSpPr>
+        <p:spPr>
+          <a:xfrm>
+            <a:off x="931863" y="4410075"/>
+            <a:ext cx="5133975" cy="4176713"/>
+          </a:xfrm>
+          <a:prstGeom prst="rect">
+            <a:avLst/>
+          </a:prstGeom>
+          <a:noFill/>
+          <a:ln>
+            <a:noFill/>
+          </a:ln>
+        </p:spPr>
+        <p:txBody>
+          <a:bodyPr anchorCtr="0" anchor="t" bIns="46500" lIns="93025" spcFirstLastPara="1" rIns="93025" wrap="square" tIns="46500">
+            <a:noAutofit/>
+          </a:bodyPr>
+          <a:lstStyle/>
+          <a:p>
+            <a:pPr indent="0" lvl="0" marL="0" rtl="0" algn="l">
+              <a:spcBef>
+                <a:spcPts val="0"/>
+              </a:spcBef>
+              <a:spcAft>
+                <a:spcPts val="0"/>
+              </a:spcAft>
+              <a:buNone/>
+            </a:pPr>
+            <a:r>
+              <a:t/>
+            </a:r>
+            <a:endParaRPr/>
+          </a:p>
+        </p:txBody>
       </p:sp>
     </p:spTree>
   </p:cSld>
@@ -6607,7 +6629,7 @@
   <p:cSld>
     <p:spTree>
       <p:nvGrpSpPr>
-        <p:cNvPr id="356" name="Shape 356"/>
+        <p:cNvPr id="365" name="Shape 365"/>
         <p:cNvGrpSpPr/>
         <p:nvPr/>
       </p:nvGrpSpPr>
@@ -6621,7 +6643,7 @@
       </p:grpSpPr>
       <p:sp>
         <p:nvSpPr>
-          <p:cNvPr id="357" name="Google Shape;357;p39:notes"/>
+          <p:cNvPr id="366" name="Google Shape;366;p37:notes"/>
           <p:cNvSpPr txBox="1"/>
           <p:nvPr>
             <p:ph idx="12" type="sldNum"/>
@@ -6681,7 +6703,7 @@
       </p:sp>
       <p:sp>
         <p:nvSpPr>
-          <p:cNvPr id="358" name="Google Shape;358;p39:notes"/>
+          <p:cNvPr id="367" name="Google Shape;367;p37:notes"/>
           <p:cNvSpPr/>
           <p:nvPr>
             <p:ph idx="2" type="sldImg"/>
@@ -6720,7 +6742,7 @@
       </p:sp>
       <p:sp>
         <p:nvSpPr>
-          <p:cNvPr id="359" name="Google Shape;359;p39:notes"/>
+          <p:cNvPr id="368" name="Google Shape;368;p37:notes"/>
           <p:cNvSpPr txBox="1"/>
           <p:nvPr>
             <p:ph idx="1" type="body"/>
@@ -6774,7 +6796,7 @@
   <p:cSld>
     <p:spTree>
       <p:nvGrpSpPr>
-        <p:cNvPr id="363" name="Shape 363"/>
+        <p:cNvPr id="372" name="Shape 372"/>
         <p:cNvGrpSpPr/>
         <p:nvPr/>
       </p:nvGrpSpPr>
@@ -6788,7 +6810,7 @@
       </p:grpSpPr>
       <p:sp>
         <p:nvSpPr>
-          <p:cNvPr id="364" name="Google Shape;364;p40:notes"/>
+          <p:cNvPr id="373" name="Google Shape;373;p38:notes"/>
           <p:cNvSpPr txBox="1"/>
           <p:nvPr>
             <p:ph idx="1" type="body"/>
@@ -6827,7 +6849,7 @@
       </p:sp>
       <p:sp>
         <p:nvSpPr>
-          <p:cNvPr id="365" name="Google Shape;365;p40:notes"/>
+          <p:cNvPr id="374" name="Google Shape;374;p38:notes"/>
           <p:cNvSpPr/>
           <p:nvPr>
             <p:ph idx="2" type="sldImg"/>
@@ -6873,7 +6895,7 @@
   <p:cSld>
     <p:spTree>
       <p:nvGrpSpPr>
-        <p:cNvPr id="369" name="Shape 369"/>
+        <p:cNvPr id="378" name="Shape 378"/>
         <p:cNvGrpSpPr/>
         <p:nvPr/>
       </p:nvGrpSpPr>
@@ -6887,46 +6909,67 @@
       </p:grpSpPr>
       <p:sp>
         <p:nvSpPr>
-          <p:cNvPr id="370" name="Google Shape;370;p41:notes"/>
+          <p:cNvPr id="379" name="Google Shape;379;p39:notes"/>
           <p:cNvSpPr txBox="1"/>
           <p:nvPr>
-            <p:ph idx="1" type="body"/>
+            <p:ph idx="12" type="sldNum"/>
           </p:nvPr>
         </p:nvSpPr>
         <p:spPr>
           <a:xfrm>
-            <a:off x="931863" y="4410075"/>
-            <a:ext cx="5133975" cy="4176713"/>
+            <a:off x="3965575" y="8820150"/>
+            <a:ext cx="3032125" cy="463550"/>
           </a:xfrm>
           <a:prstGeom prst="rect">
             <a:avLst/>
           </a:prstGeom>
+          <a:noFill/>
+          <a:ln>
+            <a:noFill/>
+          </a:ln>
         </p:spPr>
         <p:txBody>
-          <a:bodyPr anchorCtr="0" anchor="t" bIns="46500" lIns="93025" spcFirstLastPara="1" rIns="93025" wrap="square" tIns="46500">
+          <a:bodyPr anchorCtr="0" anchor="b" bIns="46500" lIns="93025" spcFirstLastPara="1" rIns="93025" wrap="square" tIns="46500">
             <a:noAutofit/>
           </a:bodyPr>
           <a:lstStyle/>
           <a:p>
-            <a:pPr indent="0" lvl="0" marL="0" rtl="0" algn="l">
-              <a:spcBef>
-                <a:spcPts val="360"/>
-              </a:spcBef>
-              <a:spcAft>
-                <a:spcPts val="0"/>
-              </a:spcAft>
-              <a:buNone/>
-            </a:pPr>
-            <a:r>
-              <a:t/>
-            </a:r>
-            <a:endParaRPr/>
+            <a:pPr indent="0" lvl="0" marL="0" rtl="0" algn="r">
+              <a:spcBef>
+                <a:spcPts val="0"/>
+              </a:spcBef>
+              <a:spcAft>
+                <a:spcPts val="0"/>
+              </a:spcAft>
+              <a:buNone/>
+            </a:pPr>
+            <a:fld id="{00000000-1234-1234-1234-123412341234}" type="slidenum">
+              <a:rPr lang="en-US" sz="1200">
+                <a:solidFill>
+                  <a:schemeClr val="dk1"/>
+                </a:solidFill>
+                <a:latin typeface="Times New Roman"/>
+                <a:ea typeface="Times New Roman"/>
+                <a:cs typeface="Times New Roman"/>
+                <a:sym typeface="Times New Roman"/>
+              </a:rPr>
+              <a:t>‹#›</a:t>
+            </a:fld>
+            <a:endParaRPr sz="1200">
+              <a:solidFill>
+                <a:schemeClr val="dk1"/>
+              </a:solidFill>
+              <a:latin typeface="Times New Roman"/>
+              <a:ea typeface="Times New Roman"/>
+              <a:cs typeface="Times New Roman"/>
+              <a:sym typeface="Times New Roman"/>
+            </a:endParaRPr>
           </a:p>
         </p:txBody>
       </p:sp>
       <p:sp>
         <p:nvSpPr>
-          <p:cNvPr id="371" name="Google Shape;371;p41:notes"/>
+          <p:cNvPr id="380" name="Google Shape;380;p39:notes"/>
           <p:cNvSpPr/>
           <p:nvPr>
             <p:ph idx="2" type="sldImg"/>
@@ -6957,7 +7000,54 @@
               </a:path>
             </a:pathLst>
           </a:custGeom>
+          <a:noFill/>
+          <a:ln>
+            <a:noFill/>
+          </a:ln>
         </p:spPr>
+      </p:sp>
+      <p:sp>
+        <p:nvSpPr>
+          <p:cNvPr id="381" name="Google Shape;381;p39:notes"/>
+          <p:cNvSpPr txBox="1"/>
+          <p:nvPr>
+            <p:ph idx="1" type="body"/>
+          </p:nvPr>
+        </p:nvSpPr>
+        <p:spPr>
+          <a:xfrm>
+            <a:off x="931863" y="4410075"/>
+            <a:ext cx="5133975" cy="4176713"/>
+          </a:xfrm>
+          <a:prstGeom prst="rect">
+            <a:avLst/>
+          </a:prstGeom>
+          <a:noFill/>
+          <a:ln>
+            <a:noFill/>
+          </a:ln>
+        </p:spPr>
+        <p:txBody>
+          <a:bodyPr anchorCtr="0" anchor="t" bIns="46500" lIns="93025" spcFirstLastPara="1" rIns="93025" wrap="square" tIns="46500">
+            <a:noAutofit/>
+          </a:bodyPr>
+          <a:lstStyle/>
+          <a:p>
+            <a:pPr indent="0" lvl="0" marL="0" rtl="0" algn="l">
+              <a:spcBef>
+                <a:spcPts val="0"/>
+              </a:spcBef>
+              <a:spcAft>
+                <a:spcPts val="0"/>
+              </a:spcAft>
+              <a:buNone/>
+            </a:pPr>
+            <a:r>
+              <a:t/>
+            </a:r>
+            <a:endParaRPr/>
+          </a:p>
+        </p:txBody>
       </p:sp>
     </p:spTree>
   </p:cSld>
@@ -6972,7 +7062,7 @@
   <p:cSld>
     <p:spTree>
       <p:nvGrpSpPr>
-        <p:cNvPr id="375" name="Shape 375"/>
+        <p:cNvPr id="385" name="Shape 385"/>
         <p:cNvGrpSpPr/>
         <p:nvPr/>
       </p:nvGrpSpPr>
@@ -6986,7 +7076,7 @@
       </p:grpSpPr>
       <p:sp>
         <p:nvSpPr>
-          <p:cNvPr id="376" name="Google Shape;376;p42:notes"/>
+          <p:cNvPr id="386" name="Google Shape;386;p40:notes"/>
           <p:cNvSpPr txBox="1"/>
           <p:nvPr>
             <p:ph idx="1" type="body"/>
@@ -7025,7 +7115,7 @@
       </p:sp>
       <p:sp>
         <p:nvSpPr>
-          <p:cNvPr id="377" name="Google Shape;377;p42:notes"/>
+          <p:cNvPr id="387" name="Google Shape;387;p40:notes"/>
           <p:cNvSpPr/>
           <p:nvPr>
             <p:ph idx="2" type="sldImg"/>
@@ -7071,7 +7161,7 @@
   <p:cSld>
     <p:spTree>
       <p:nvGrpSpPr>
-        <p:cNvPr id="382" name="Shape 382"/>
+        <p:cNvPr id="391" name="Shape 391"/>
         <p:cNvGrpSpPr/>
         <p:nvPr/>
       </p:nvGrpSpPr>
@@ -7085,7 +7175,7 @@
       </p:grpSpPr>
       <p:sp>
         <p:nvSpPr>
-          <p:cNvPr id="383" name="Google Shape;383;p43:notes"/>
+          <p:cNvPr id="392" name="Google Shape;392;p41:notes"/>
           <p:cNvSpPr txBox="1"/>
           <p:nvPr>
             <p:ph idx="1" type="body"/>
@@ -7124,7 +7214,7 @@
       </p:sp>
       <p:sp>
         <p:nvSpPr>
-          <p:cNvPr id="384" name="Google Shape;384;p43:notes"/>
+          <p:cNvPr id="393" name="Google Shape;393;p41:notes"/>
           <p:cNvSpPr/>
           <p:nvPr>
             <p:ph idx="2" type="sldImg"/>
@@ -7170,7 +7260,7 @@
   <p:cSld>
     <p:spTree>
       <p:nvGrpSpPr>
-        <p:cNvPr id="388" name="Shape 388"/>
+        <p:cNvPr id="397" name="Shape 397"/>
         <p:cNvGrpSpPr/>
         <p:nvPr/>
       </p:nvGrpSpPr>
@@ -7184,7 +7274,205 @@
       </p:grpSpPr>
       <p:sp>
         <p:nvSpPr>
-          <p:cNvPr id="389" name="Google Shape;389;p44:notes"/>
+          <p:cNvPr id="398" name="Google Shape;398;p42:notes"/>
+          <p:cNvSpPr txBox="1"/>
+          <p:nvPr>
+            <p:ph idx="1" type="body"/>
+          </p:nvPr>
+        </p:nvSpPr>
+        <p:spPr>
+          <a:xfrm>
+            <a:off x="931863" y="4410075"/>
+            <a:ext cx="5133975" cy="4176713"/>
+          </a:xfrm>
+          <a:prstGeom prst="rect">
+            <a:avLst/>
+          </a:prstGeom>
+        </p:spPr>
+        <p:txBody>
+          <a:bodyPr anchorCtr="0" anchor="t" bIns="46500" lIns="93025" spcFirstLastPara="1" rIns="93025" wrap="square" tIns="46500">
+            <a:noAutofit/>
+          </a:bodyPr>
+          <a:lstStyle/>
+          <a:p>
+            <a:pPr indent="0" lvl="0" marL="0" rtl="0" algn="l">
+              <a:spcBef>
+                <a:spcPts val="360"/>
+              </a:spcBef>
+              <a:spcAft>
+                <a:spcPts val="0"/>
+              </a:spcAft>
+              <a:buNone/>
+            </a:pPr>
+            <a:r>
+              <a:t/>
+            </a:r>
+            <a:endParaRPr/>
+          </a:p>
+        </p:txBody>
+      </p:sp>
+      <p:sp>
+        <p:nvSpPr>
+          <p:cNvPr id="399" name="Google Shape;399;p42:notes"/>
+          <p:cNvSpPr/>
+          <p:nvPr>
+            <p:ph idx="2" type="sldImg"/>
+          </p:nvPr>
+        </p:nvSpPr>
+        <p:spPr>
+          <a:xfrm>
+            <a:off x="1177925" y="696913"/>
+            <a:ext cx="4641850" cy="3481387"/>
+          </a:xfrm>
+          <a:custGeom>
+            <a:rect b="b" l="l" r="r" t="t"/>
+            <a:pathLst>
+              <a:path extrusionOk="0" h="120000" w="120000">
+                <a:moveTo>
+                  <a:pt x="0" y="0"/>
+                </a:moveTo>
+                <a:lnTo>
+                  <a:pt x="120000" y="0"/>
+                </a:lnTo>
+                <a:lnTo>
+                  <a:pt x="120000" y="120000"/>
+                </a:lnTo>
+                <a:lnTo>
+                  <a:pt x="0" y="120000"/>
+                </a:lnTo>
+                <a:close/>
+              </a:path>
+            </a:pathLst>
+          </a:custGeom>
+        </p:spPr>
+      </p:sp>
+    </p:spTree>
+  </p:cSld>
+  <p:clrMapOvr>
+    <a:masterClrMapping/>
+  </p:clrMapOvr>
+</p:notes>
+</file>
+
+<file path=ppt/notesSlides/notesSlide46.xml><?xml version="1.0" encoding="utf-8"?>
+<p:notes xmlns:a="http://schemas.openxmlformats.org/drawingml/2006/main" xmlns:r="http://schemas.openxmlformats.org/officeDocument/2006/relationships" xmlns:mc="http://schemas.openxmlformats.org/markup-compatibility/2006" xmlns:mv="urn:schemas-microsoft-com:mac:vml" xmlns:p="http://schemas.openxmlformats.org/presentationml/2006/main" xmlns:c="http://schemas.openxmlformats.org/drawingml/2006/chart" xmlns:dgm="http://schemas.openxmlformats.org/drawingml/2006/diagram" xmlns:o="urn:schemas-microsoft-com:office:office" xmlns:v="urn:schemas-microsoft-com:vml" xmlns:pvml="urn:schemas-microsoft-com:office:powerpoint" xmlns:com="http://schemas.openxmlformats.org/drawingml/2006/compatibility" xmlns:p14="http://schemas.microsoft.com/office/powerpoint/2010/main" xmlns:p15="http://schemas.microsoft.com/office/powerpoint/2012/main" xmlns:ahyp="http://schemas.microsoft.com/office/drawing/2018/hyperlinkcolor" showMasterPhAnim="0" showMasterSp="0">
+  <p:cSld>
+    <p:spTree>
+      <p:nvGrpSpPr>
+        <p:cNvPr id="404" name="Shape 404"/>
+        <p:cNvGrpSpPr/>
+        <p:nvPr/>
+      </p:nvGrpSpPr>
+      <p:grpSpPr>
+        <a:xfrm>
+          <a:off x="0" y="0"/>
+          <a:ext cx="0" cy="0"/>
+          <a:chOff x="0" y="0"/>
+          <a:chExt cx="0" cy="0"/>
+        </a:xfrm>
+      </p:grpSpPr>
+      <p:sp>
+        <p:nvSpPr>
+          <p:cNvPr id="405" name="Google Shape;405;p43:notes"/>
+          <p:cNvSpPr txBox="1"/>
+          <p:nvPr>
+            <p:ph idx="1" type="body"/>
+          </p:nvPr>
+        </p:nvSpPr>
+        <p:spPr>
+          <a:xfrm>
+            <a:off x="931863" y="4410075"/>
+            <a:ext cx="5133975" cy="4176713"/>
+          </a:xfrm>
+          <a:prstGeom prst="rect">
+            <a:avLst/>
+          </a:prstGeom>
+        </p:spPr>
+        <p:txBody>
+          <a:bodyPr anchorCtr="0" anchor="t" bIns="46500" lIns="93025" spcFirstLastPara="1" rIns="93025" wrap="square" tIns="46500">
+            <a:noAutofit/>
+          </a:bodyPr>
+          <a:lstStyle/>
+          <a:p>
+            <a:pPr indent="0" lvl="0" marL="0" rtl="0" algn="l">
+              <a:spcBef>
+                <a:spcPts val="360"/>
+              </a:spcBef>
+              <a:spcAft>
+                <a:spcPts val="0"/>
+              </a:spcAft>
+              <a:buNone/>
+            </a:pPr>
+            <a:r>
+              <a:t/>
+            </a:r>
+            <a:endParaRPr/>
+          </a:p>
+        </p:txBody>
+      </p:sp>
+      <p:sp>
+        <p:nvSpPr>
+          <p:cNvPr id="406" name="Google Shape;406;p43:notes"/>
+          <p:cNvSpPr/>
+          <p:nvPr>
+            <p:ph idx="2" type="sldImg"/>
+          </p:nvPr>
+        </p:nvSpPr>
+        <p:spPr>
+          <a:xfrm>
+            <a:off x="1177925" y="696913"/>
+            <a:ext cx="4641850" cy="3481387"/>
+          </a:xfrm>
+          <a:custGeom>
+            <a:rect b="b" l="l" r="r" t="t"/>
+            <a:pathLst>
+              <a:path extrusionOk="0" h="120000" w="120000">
+                <a:moveTo>
+                  <a:pt x="0" y="0"/>
+                </a:moveTo>
+                <a:lnTo>
+                  <a:pt x="120000" y="0"/>
+                </a:lnTo>
+                <a:lnTo>
+                  <a:pt x="120000" y="120000"/>
+                </a:lnTo>
+                <a:lnTo>
+                  <a:pt x="0" y="120000"/>
+                </a:lnTo>
+                <a:close/>
+              </a:path>
+            </a:pathLst>
+          </a:custGeom>
+        </p:spPr>
+      </p:sp>
+    </p:spTree>
+  </p:cSld>
+  <p:clrMapOvr>
+    <a:masterClrMapping/>
+  </p:clrMapOvr>
+</p:notes>
+</file>
+
+<file path=ppt/notesSlides/notesSlide47.xml><?xml version="1.0" encoding="utf-8"?>
+<p:notes xmlns:a="http://schemas.openxmlformats.org/drawingml/2006/main" xmlns:r="http://schemas.openxmlformats.org/officeDocument/2006/relationships" xmlns:mc="http://schemas.openxmlformats.org/markup-compatibility/2006" xmlns:mv="urn:schemas-microsoft-com:mac:vml" xmlns:p="http://schemas.openxmlformats.org/presentationml/2006/main" xmlns:c="http://schemas.openxmlformats.org/drawingml/2006/chart" xmlns:dgm="http://schemas.openxmlformats.org/drawingml/2006/diagram" xmlns:o="urn:schemas-microsoft-com:office:office" xmlns:v="urn:schemas-microsoft-com:vml" xmlns:pvml="urn:schemas-microsoft-com:office:powerpoint" xmlns:com="http://schemas.openxmlformats.org/drawingml/2006/compatibility" xmlns:p14="http://schemas.microsoft.com/office/powerpoint/2010/main" xmlns:p15="http://schemas.microsoft.com/office/powerpoint/2012/main" xmlns:ahyp="http://schemas.microsoft.com/office/drawing/2018/hyperlinkcolor" showMasterPhAnim="0" showMasterSp="0">
+  <p:cSld>
+    <p:spTree>
+      <p:nvGrpSpPr>
+        <p:cNvPr id="410" name="Shape 410"/>
+        <p:cNvGrpSpPr/>
+        <p:nvPr/>
+      </p:nvGrpSpPr>
+      <p:grpSpPr>
+        <a:xfrm>
+          <a:off x="0" y="0"/>
+          <a:ext cx="0" cy="0"/>
+          <a:chOff x="0" y="0"/>
+          <a:chExt cx="0" cy="0"/>
+        </a:xfrm>
+      </p:grpSpPr>
+      <p:sp>
+        <p:nvSpPr>
+          <p:cNvPr id="411" name="Google Shape;411;p44:notes"/>
           <p:cNvSpPr txBox="1"/>
           <p:nvPr>
             <p:ph idx="12" type="sldNum"/>
@@ -7244,7 +7532,7 @@
       </p:sp>
       <p:sp>
         <p:nvSpPr>
-          <p:cNvPr id="390" name="Google Shape;390;p44:notes"/>
+          <p:cNvPr id="412" name="Google Shape;412;p44:notes"/>
           <p:cNvSpPr/>
           <p:nvPr>
             <p:ph idx="2" type="sldImg"/>
@@ -7283,7 +7571,7 @@
       </p:sp>
       <p:sp>
         <p:nvSpPr>
-          <p:cNvPr id="391" name="Google Shape;391;p44:notes"/>
+          <p:cNvPr id="413" name="Google Shape;413;p44:notes"/>
           <p:cNvSpPr txBox="1"/>
           <p:nvPr>
             <p:ph idx="1" type="body"/>
@@ -7332,12 +7620,12 @@
 </p:notes>
 </file>
 
-<file path=ppt/notesSlides/notesSlide46.xml><?xml version="1.0" encoding="utf-8"?>
+<file path=ppt/notesSlides/notesSlide48.xml><?xml version="1.0" encoding="utf-8"?>
 <p:notes xmlns:a="http://schemas.openxmlformats.org/drawingml/2006/main" xmlns:r="http://schemas.openxmlformats.org/officeDocument/2006/relationships" xmlns:mc="http://schemas.openxmlformats.org/markup-compatibility/2006" xmlns:mv="urn:schemas-microsoft-com:mac:vml" xmlns:p="http://schemas.openxmlformats.org/presentationml/2006/main" xmlns:c="http://schemas.openxmlformats.org/drawingml/2006/chart" xmlns:dgm="http://schemas.openxmlformats.org/drawingml/2006/diagram" xmlns:o="urn:schemas-microsoft-com:office:office" xmlns:v="urn:schemas-microsoft-com:vml" xmlns:pvml="urn:schemas-microsoft-com:office:powerpoint" xmlns:com="http://schemas.openxmlformats.org/drawingml/2006/compatibility" xmlns:p14="http://schemas.microsoft.com/office/powerpoint/2010/main" xmlns:p15="http://schemas.microsoft.com/office/powerpoint/2012/main" xmlns:ahyp="http://schemas.microsoft.com/office/drawing/2018/hyperlinkcolor" showMasterPhAnim="0" showMasterSp="0">
   <p:cSld>
     <p:spTree>
       <p:nvGrpSpPr>
-        <p:cNvPr id="394" name="Shape 394"/>
+        <p:cNvPr id="416" name="Shape 416"/>
         <p:cNvGrpSpPr/>
         <p:nvPr/>
       </p:nvGrpSpPr>
@@ -7351,7 +7639,7 @@
       </p:grpSpPr>
       <p:sp>
         <p:nvSpPr>
-          <p:cNvPr id="395" name="Google Shape;395;p45:notes"/>
+          <p:cNvPr id="417" name="Google Shape;417;p45:notes"/>
           <p:cNvSpPr txBox="1"/>
           <p:nvPr>
             <p:ph idx="12" type="sldNum"/>
@@ -7411,7 +7699,7 @@
       </p:sp>
       <p:sp>
         <p:nvSpPr>
-          <p:cNvPr id="396" name="Google Shape;396;p45:notes"/>
+          <p:cNvPr id="418" name="Google Shape;418;p45:notes"/>
           <p:cNvSpPr/>
           <p:nvPr>
             <p:ph idx="2" type="sldImg"/>
@@ -7450,7 +7738,7 @@
       </p:sp>
       <p:sp>
         <p:nvSpPr>
-          <p:cNvPr id="397" name="Google Shape;397;p45:notes"/>
+          <p:cNvPr id="419" name="Google Shape;419;p45:notes"/>
           <p:cNvSpPr txBox="1"/>
           <p:nvPr>
             <p:ph idx="1" type="body"/>
@@ -20476,6 +20764,87 @@
           </a:ln>
         </p:spPr>
       </p:pic>
+      <p:sp>
+        <p:nvSpPr>
+          <p:cNvPr id="207" name="Google Shape;207;p17"/>
+          <p:cNvSpPr txBox="1"/>
+          <p:nvPr/>
+        </p:nvSpPr>
+        <p:spPr>
+          <a:xfrm>
+            <a:off x="4001025" y="3727300"/>
+            <a:ext cx="4659000" cy="722700"/>
+          </a:xfrm>
+          <a:prstGeom prst="rect">
+            <a:avLst/>
+          </a:prstGeom>
+          <a:noFill/>
+          <a:ln>
+            <a:noFill/>
+          </a:ln>
+        </p:spPr>
+        <p:txBody>
+          <a:bodyPr anchorCtr="0" anchor="t" bIns="91425" lIns="91425" spcFirstLastPara="1" rIns="91425" wrap="square" tIns="91425">
+            <a:noAutofit/>
+          </a:bodyPr>
+          <a:lstStyle/>
+          <a:p>
+            <a:pPr indent="0" lvl="0" marL="0" rtl="0" algn="l">
+              <a:spcBef>
+                <a:spcPts val="0"/>
+              </a:spcBef>
+              <a:spcAft>
+                <a:spcPts val="0"/>
+              </a:spcAft>
+              <a:buNone/>
+            </a:pPr>
+            <a:r>
+              <a:rPr lang="en-US" sz="1700">
+                <a:solidFill>
+                  <a:schemeClr val="dk2"/>
+                </a:solidFill>
+                <a:latin typeface="Helvetica Neue"/>
+                <a:ea typeface="Helvetica Neue"/>
+                <a:cs typeface="Helvetica Neue"/>
+                <a:sym typeface="Helvetica Neue"/>
+              </a:rPr>
+              <a:t>A particular problem that does not speed up even if the presence of additional resources</a:t>
+            </a:r>
+            <a:endParaRPr sz="1700">
+              <a:solidFill>
+                <a:schemeClr val="dk2"/>
+              </a:solidFill>
+              <a:latin typeface="Helvetica Neue"/>
+              <a:ea typeface="Helvetica Neue"/>
+              <a:cs typeface="Helvetica Neue"/>
+              <a:sym typeface="Helvetica Neue"/>
+            </a:endParaRPr>
+          </a:p>
+          <a:p>
+            <a:pPr indent="0" lvl="0" marL="0" rtl="0" algn="l">
+              <a:spcBef>
+                <a:spcPts val="0"/>
+              </a:spcBef>
+              <a:spcAft>
+                <a:spcPts val="0"/>
+              </a:spcAft>
+              <a:buNone/>
+            </a:pPr>
+            <a:r>
+              <a:t/>
+            </a:r>
+            <a:endParaRPr sz="1700">
+              <a:solidFill>
+                <a:schemeClr val="dk2"/>
+              </a:solidFill>
+              <a:latin typeface="Helvetica Neue"/>
+              <a:ea typeface="Helvetica Neue"/>
+              <a:cs typeface="Helvetica Neue"/>
+              <a:sym typeface="Helvetica Neue"/>
+            </a:endParaRPr>
+          </a:p>
+        </p:txBody>
+      </p:sp>
     </p:spTree>
   </p:cSld>
   <p:clrMapOvr>
@@ -20489,7 +20858,7 @@
   <p:cSld>
     <p:spTree>
       <p:nvGrpSpPr>
-        <p:cNvPr id="211" name="Shape 211"/>
+        <p:cNvPr id="212" name="Shape 212"/>
         <p:cNvGrpSpPr/>
         <p:nvPr/>
       </p:nvGrpSpPr>
@@ -20503,7 +20872,7 @@
       </p:grpSpPr>
       <p:sp>
         <p:nvSpPr>
-          <p:cNvPr id="212" name="Google Shape;212;p18"/>
+          <p:cNvPr id="213" name="Google Shape;213;p18"/>
           <p:cNvSpPr txBox="1"/>
           <p:nvPr>
             <p:ph type="title"/>
@@ -20552,7 +20921,7 @@
       </p:sp>
       <p:pic>
         <p:nvPicPr>
-          <p:cNvPr id="213" name="Google Shape;213;p18"/>
+          <p:cNvPr id="214" name="Google Shape;214;p18"/>
           <p:cNvPicPr preferRelativeResize="0"/>
           <p:nvPr/>
         </p:nvPicPr>
@@ -20577,6 +20946,96 @@
           </a:ln>
         </p:spPr>
       </p:pic>
+      <p:sp>
+        <p:nvSpPr>
+          <p:cNvPr id="215" name="Google Shape;215;p18"/>
+          <p:cNvSpPr txBox="1"/>
+          <p:nvPr/>
+        </p:nvSpPr>
+        <p:spPr>
+          <a:xfrm>
+            <a:off x="2447975" y="1190150"/>
+            <a:ext cx="6372300" cy="722700"/>
+          </a:xfrm>
+          <a:prstGeom prst="rect">
+            <a:avLst/>
+          </a:prstGeom>
+          <a:noFill/>
+          <a:ln>
+            <a:noFill/>
+          </a:ln>
+        </p:spPr>
+        <p:txBody>
+          <a:bodyPr anchorCtr="0" anchor="t" bIns="91425" lIns="91425" spcFirstLastPara="1" rIns="91425" wrap="square" tIns="91425">
+            <a:noAutofit/>
+          </a:bodyPr>
+          <a:lstStyle/>
+          <a:p>
+            <a:pPr indent="0" lvl="0" marL="0" rtl="0" algn="l">
+              <a:spcBef>
+                <a:spcPts val="0"/>
+              </a:spcBef>
+              <a:spcAft>
+                <a:spcPts val="0"/>
+              </a:spcAft>
+              <a:buNone/>
+            </a:pPr>
+            <a:r>
+              <a:rPr lang="en-US" sz="1700">
+                <a:solidFill>
+                  <a:schemeClr val="dk1"/>
+                </a:solidFill>
+                <a:latin typeface="Helvetica Neue"/>
+                <a:ea typeface="Helvetica Neue"/>
+                <a:cs typeface="Helvetica Neue"/>
+                <a:sym typeface="Helvetica Neue"/>
+              </a:rPr>
+              <a:t>TS = Time scale for system coordination, communication, overhead</a:t>
+            </a:r>
+            <a:endParaRPr sz="1700">
+              <a:solidFill>
+                <a:schemeClr val="dk1"/>
+              </a:solidFill>
+              <a:latin typeface="Helvetica Neue"/>
+              <a:ea typeface="Helvetica Neue"/>
+              <a:cs typeface="Helvetica Neue"/>
+              <a:sym typeface="Helvetica Neue"/>
+            </a:endParaRPr>
+          </a:p>
+          <a:p>
+            <a:pPr indent="0" lvl="0" marL="0" rtl="0" algn="l">
+              <a:spcBef>
+                <a:spcPts val="0"/>
+              </a:spcBef>
+              <a:spcAft>
+                <a:spcPts val="0"/>
+              </a:spcAft>
+              <a:buNone/>
+            </a:pPr>
+            <a:r>
+              <a:rPr lang="en-US" sz="1700">
+                <a:solidFill>
+                  <a:schemeClr val="dk1"/>
+                </a:solidFill>
+                <a:latin typeface="Helvetica Neue"/>
+                <a:ea typeface="Helvetica Neue"/>
+                <a:cs typeface="Helvetica Neue"/>
+                <a:sym typeface="Helvetica Neue"/>
+              </a:rPr>
+              <a:t>TL = Time scale for local computation or problem solving</a:t>
+            </a:r>
+            <a:endParaRPr sz="1700">
+              <a:solidFill>
+                <a:schemeClr val="dk1"/>
+              </a:solidFill>
+              <a:latin typeface="Helvetica Neue"/>
+              <a:ea typeface="Helvetica Neue"/>
+              <a:cs typeface="Helvetica Neue"/>
+              <a:sym typeface="Helvetica Neue"/>
+            </a:endParaRPr>
+          </a:p>
+        </p:txBody>
+      </p:sp>
     </p:spTree>
   </p:cSld>
   <p:clrMapOvr>
@@ -20851,7 +21310,7 @@
   <p:cSld>
     <p:spTree>
       <p:nvGrpSpPr>
-        <p:cNvPr id="218" name="Shape 218"/>
+        <p:cNvPr id="220" name="Shape 220"/>
         <p:cNvGrpSpPr/>
         <p:nvPr/>
       </p:nvGrpSpPr>
@@ -20865,7 +21324,7 @@
       </p:grpSpPr>
       <p:sp>
         <p:nvSpPr>
-          <p:cNvPr id="219" name="Google Shape;219;p19"/>
+          <p:cNvPr id="221" name="Google Shape;221;p19"/>
           <p:cNvSpPr txBox="1"/>
           <p:nvPr>
             <p:ph type="title"/>
@@ -20914,7 +21373,7 @@
       </p:sp>
       <p:sp>
         <p:nvSpPr>
-          <p:cNvPr id="220" name="Google Shape;220;p19"/>
+          <p:cNvPr id="222" name="Google Shape;222;p19"/>
           <p:cNvSpPr txBox="1"/>
           <p:nvPr>
             <p:ph idx="1" type="body"/>
@@ -21235,7 +21694,7 @@
   <p:cSld>
     <p:spTree>
       <p:nvGrpSpPr>
-        <p:cNvPr id="225" name="Shape 225"/>
+        <p:cNvPr id="227" name="Shape 227"/>
         <p:cNvGrpSpPr/>
         <p:nvPr/>
       </p:nvGrpSpPr>
@@ -21249,7 +21708,7 @@
       </p:grpSpPr>
       <p:sp>
         <p:nvSpPr>
-          <p:cNvPr id="226" name="Google Shape;226;p20"/>
+          <p:cNvPr id="228" name="Google Shape;228;p20"/>
           <p:cNvSpPr txBox="1"/>
           <p:nvPr>
             <p:ph type="title"/>
@@ -21298,7 +21757,7 @@
       </p:sp>
       <p:sp>
         <p:nvSpPr>
-          <p:cNvPr id="227" name="Google Shape;227;p20"/>
+          <p:cNvPr id="229" name="Google Shape;229;p20"/>
           <p:cNvSpPr txBox="1"/>
           <p:nvPr>
             <p:ph idx="1" type="body"/>
@@ -21375,9 +21834,26 @@
                 <a:cs typeface="Helvetica Neue"/>
                 <a:sym typeface="Helvetica Neue"/>
               </a:rPr>
-              <a:t>: Cost of starting up multiple processes, and sequential computation before/after parallel computation</a:t>
-            </a:r>
-            <a:endParaRPr/>
+              <a:t>: Cost of s</a:t>
+            </a:r>
+            <a:r>
+              <a:rPr b="1" lang="en-US"/>
+              <a:t>tarting up multiple processes</a:t>
+            </a:r>
+            <a:r>
+              <a:rPr lang="en-US">
+                <a:latin typeface="Helvetica Neue"/>
+                <a:ea typeface="Helvetica Neue"/>
+                <a:cs typeface="Helvetica Neue"/>
+                <a:sym typeface="Helvetica Neue"/>
+              </a:rPr>
+              <a:t>, and </a:t>
+            </a:r>
+            <a:r>
+              <a:rPr b="1" lang="en-US"/>
+              <a:t>sequential computation before/after parallel computation</a:t>
+            </a:r>
+            <a:endParaRPr b="1"/>
           </a:p>
           <a:p>
             <a:pPr indent="-285750" lvl="1" marL="742950" rtl="0" algn="l">
@@ -21397,7 +21873,33 @@
                 <a:cs typeface="Helvetica Neue"/>
                 <a:sym typeface="Helvetica Neue"/>
               </a:rPr>
-              <a:t>May dominate computation time, if the degree of parallelism is high</a:t>
+              <a:t>May dominate </a:t>
+            </a:r>
+            <a:r>
+              <a:rPr b="1" lang="en-US"/>
+              <a:t>computation time</a:t>
+            </a:r>
+            <a:r>
+              <a:rPr lang="en-US">
+                <a:latin typeface="Helvetica Neue"/>
+                <a:ea typeface="Helvetica Neue"/>
+                <a:cs typeface="Helvetica Neue"/>
+                <a:sym typeface="Helvetica Neue"/>
+              </a:rPr>
+              <a:t>, if the </a:t>
+            </a:r>
+            <a:r>
+              <a:rPr b="1" lang="en-US"/>
+              <a:t>degree of parallelism</a:t>
+            </a:r>
+            <a:r>
+              <a:rPr lang="en-US">
+                <a:latin typeface="Helvetica Neue"/>
+                <a:ea typeface="Helvetica Neue"/>
+                <a:cs typeface="Helvetica Neue"/>
+                <a:sym typeface="Helvetica Neue"/>
+              </a:rPr>
+              <a:t> is high</a:t>
             </a:r>
             <a:endParaRPr/>
           </a:p>
@@ -21437,7 +21939,28 @@
                 <a:cs typeface="Helvetica Neue"/>
                 <a:sym typeface="Helvetica Neue"/>
               </a:rPr>
-              <a:t>fraction of computation is sequential</a:t>
+              <a:t>fraction of computation </a:t>
+            </a:r>
+            <a:r>
+              <a:rPr lang="en-US"/>
+              <a:t>can be </a:t>
+            </a:r>
+            <a:r>
+              <a:rPr lang="en-US"/>
+              <a:t>parallelized</a:t>
+            </a:r>
+            <a:r>
+              <a:rPr lang="en-US">
+                <a:latin typeface="Helvetica Neue"/>
+                <a:ea typeface="Helvetica Neue"/>
+                <a:cs typeface="Helvetica Neue"/>
+                <a:sym typeface="Helvetica Neue"/>
+              </a:rPr>
+              <a:t>. So, (1-</a:t>
+            </a:r>
+            <a:r>
+              <a:rPr lang="en-US"/>
+              <a:t>p) fraction of the computation must be run sequentially.  </a:t>
             </a:r>
             <a:endParaRPr/>
           </a:p>
@@ -21541,61 +22064,11 @@
                 <a:cs typeface="Helvetica Neue"/>
                 <a:sym typeface="Helvetica Neue"/>
               </a:rPr>
-              <a:t>: scaleup limited to: 1 / [</a:t>
-            </a:r>
-            <a:r>
-              <a:rPr i="1" lang="en-US">
-                <a:latin typeface="Helvetica Neue"/>
-                <a:ea typeface="Helvetica Neue"/>
-                <a:cs typeface="Helvetica Neue"/>
-                <a:sym typeface="Helvetica Neue"/>
-              </a:rPr>
-              <a:t>n</a:t>
-            </a:r>
-            <a:r>
-              <a:rPr lang="en-US">
-                <a:latin typeface="Helvetica Neue"/>
-                <a:ea typeface="Helvetica Neue"/>
-                <a:cs typeface="Helvetica Neue"/>
-                <a:sym typeface="Helvetica Neue"/>
-              </a:rPr>
-              <a:t>(1</a:t>
-            </a:r>
-            <a:r>
-              <a:rPr i="1" lang="en-US">
-                <a:latin typeface="Helvetica Neue"/>
-                <a:ea typeface="Helvetica Neue"/>
-                <a:cs typeface="Helvetica Neue"/>
-                <a:sym typeface="Helvetica Neue"/>
-              </a:rPr>
-              <a:t>-p</a:t>
-            </a:r>
-            <a:r>
-              <a:rPr lang="en-US">
-                <a:latin typeface="Helvetica Neue"/>
-                <a:ea typeface="Helvetica Neue"/>
-                <a:cs typeface="Helvetica Neue"/>
-                <a:sym typeface="Helvetica Neue"/>
-              </a:rPr>
-              <a:t>)+</a:t>
-            </a:r>
-            <a:r>
-              <a:rPr i="1" lang="en-US">
-                <a:latin typeface="Helvetica Neue"/>
-                <a:ea typeface="Helvetica Neue"/>
-                <a:cs typeface="Helvetica Neue"/>
-                <a:sym typeface="Helvetica Neue"/>
-              </a:rPr>
-              <a:t>p</a:t>
-            </a:r>
-            <a:r>
-              <a:rPr lang="en-US">
-                <a:latin typeface="Helvetica Neue"/>
-                <a:ea typeface="Helvetica Neue"/>
-                <a:cs typeface="Helvetica Neue"/>
-                <a:sym typeface="Helvetica Neue"/>
-              </a:rPr>
-              <a:t>] </a:t>
+              <a:t>: scaleup limited to: </a:t>
+            </a:r>
+            <a:r>
+              <a:rPr lang="en-US"/>
+              <a:t>(1-p) + np </a:t>
             </a:r>
             <a:endParaRPr/>
           </a:p>
@@ -21629,7 +22102,33 @@
                 <a:cs typeface="Helvetica Neue"/>
                 <a:sym typeface="Helvetica Neue"/>
               </a:rPr>
-              <a:t>:  Processes accessing shared resources (e.g.,system bus, disks, or locks) compete with each other, thus spending time waiting on other processes, rather than performing useful work.</a:t>
+              <a:t>:  Processes accessing shared resources (e.g.,system bus, disks, or locks) </a:t>
+            </a:r>
+            <a:r>
+              <a:rPr b="1" lang="en-US"/>
+              <a:t>compete with each other</a:t>
+            </a:r>
+            <a:r>
+              <a:rPr lang="en-US">
+                <a:latin typeface="Helvetica Neue"/>
+                <a:ea typeface="Helvetica Neue"/>
+                <a:cs typeface="Helvetica Neue"/>
+                <a:sym typeface="Helvetica Neue"/>
+              </a:rPr>
+              <a:t>, thus spending time </a:t>
+            </a:r>
+            <a:r>
+              <a:rPr b="1" lang="en-US"/>
+              <a:t>waiting</a:t>
+            </a:r>
+            <a:r>
+              <a:rPr lang="en-US">
+                <a:latin typeface="Helvetica Neue"/>
+                <a:ea typeface="Helvetica Neue"/>
+                <a:cs typeface="Helvetica Neue"/>
+                <a:sym typeface="Helvetica Neue"/>
+              </a:rPr>
+              <a:t> on other processes, rather than performing useful work.</a:t>
             </a:r>
             <a:endParaRPr/>
           </a:p>
@@ -21663,7 +22162,28 @@
                 <a:cs typeface="Helvetica Neue"/>
                 <a:sym typeface="Helvetica Neue"/>
               </a:rPr>
-              <a:t>: Increasing the degree of parallelism increases the variance in service times of parallely executing tasks.  Overall execution time determined by </a:t>
+              <a:t>: I</a:t>
+            </a:r>
+            <a:r>
+              <a:rPr lang="en-US">
+                <a:solidFill>
+                  <a:schemeClr val="dk2"/>
+                </a:solidFill>
+                <a:latin typeface="Helvetica Neue"/>
+                <a:ea typeface="Helvetica Neue"/>
+                <a:cs typeface="Helvetica Neue"/>
+                <a:sym typeface="Helvetica Neue"/>
+              </a:rPr>
+              <a:t>ncreasing the degree of parallelism increases the variance in service times of parallely executing tasks</a:t>
+            </a:r>
+            <a:r>
+              <a:rPr lang="en-US">
+                <a:latin typeface="Helvetica Neue"/>
+                <a:ea typeface="Helvetica Neue"/>
+                <a:cs typeface="Helvetica Neue"/>
+                <a:sym typeface="Helvetica Neue"/>
+              </a:rPr>
+              <a:t>.  Overall execution time determined by </a:t>
             </a:r>
             <a:r>
               <a:rPr b="1" lang="en-US">
@@ -21689,7 +22209,7 @@
       </p:sp>
       <p:sp>
         <p:nvSpPr>
-          <p:cNvPr id="228" name="Google Shape;228;p20"/>
+          <p:cNvPr id="230" name="Google Shape;230;p20"/>
           <p:cNvSpPr/>
           <p:nvPr/>
         </p:nvSpPr>
@@ -21765,7 +22285,7 @@
   <p:cSld>
     <p:spTree>
       <p:nvGrpSpPr>
-        <p:cNvPr id="233" name="Shape 233"/>
+        <p:cNvPr id="235" name="Shape 235"/>
         <p:cNvGrpSpPr/>
         <p:nvPr/>
       </p:nvGrpSpPr>
@@ -21779,7 +22299,1151 @@
       </p:grpSpPr>
       <p:sp>
         <p:nvSpPr>
-          <p:cNvPr id="234" name="Google Shape;234;p21"/>
+          <p:cNvPr id="236" name="Google Shape;236;g36bf5fe6ea5_0_0"/>
+          <p:cNvSpPr txBox="1"/>
+          <p:nvPr>
+            <p:ph type="title"/>
+          </p:nvPr>
+        </p:nvSpPr>
+        <p:spPr>
+          <a:xfrm>
+            <a:off x="768350" y="117475"/>
+            <a:ext cx="7689900" cy="609600"/>
+          </a:xfrm>
+          <a:prstGeom prst="rect">
+            <a:avLst/>
+          </a:prstGeom>
+        </p:spPr>
+        <p:txBody>
+          <a:bodyPr anchorCtr="0" anchor="b" bIns="45700" lIns="91425" spcFirstLastPara="1" rIns="91425" wrap="square" tIns="45700">
+            <a:noAutofit/>
+          </a:bodyPr>
+          <a:lstStyle/>
+          <a:p>
+            <a:pPr indent="0" lvl="0" marL="742950" rtl="0" algn="l">
+              <a:spcBef>
+                <a:spcPts val="595"/>
+              </a:spcBef>
+              <a:spcAft>
+                <a:spcPts val="0"/>
+              </a:spcAft>
+              <a:buNone/>
+            </a:pPr>
+            <a:r>
+              <a:rPr lang="en-US" sz="1700">
+                <a:solidFill>
+                  <a:srgbClr val="002060"/>
+                </a:solidFill>
+              </a:rPr>
+              <a:t>Amdahl’s law</a:t>
+            </a:r>
+            <a:r>
+              <a:rPr b="0" lang="en-US" sz="1700">
+                <a:solidFill>
+                  <a:schemeClr val="dk1"/>
+                </a:solidFill>
+              </a:rPr>
+              <a:t>:    speedup limited to:  1 / [(1</a:t>
+            </a:r>
+            <a:r>
+              <a:rPr b="0" i="1" lang="en-US" sz="1700">
+                <a:solidFill>
+                  <a:schemeClr val="dk1"/>
+                </a:solidFill>
+              </a:rPr>
+              <a:t>-p</a:t>
+            </a:r>
+            <a:r>
+              <a:rPr b="0" lang="en-US" sz="1700">
+                <a:solidFill>
+                  <a:schemeClr val="dk1"/>
+                </a:solidFill>
+              </a:rPr>
+              <a:t>)+(</a:t>
+            </a:r>
+            <a:r>
+              <a:rPr b="0" i="1" lang="en-US" sz="1700">
+                <a:solidFill>
+                  <a:schemeClr val="dk1"/>
+                </a:solidFill>
+              </a:rPr>
+              <a:t>p/n</a:t>
+            </a:r>
+            <a:r>
+              <a:rPr b="0" lang="en-US" sz="1700">
+                <a:solidFill>
+                  <a:schemeClr val="dk1"/>
+                </a:solidFill>
+              </a:rPr>
+              <a:t>)] </a:t>
+            </a:r>
+            <a:endParaRPr b="0" sz="1700">
+              <a:solidFill>
+                <a:schemeClr val="dk1"/>
+              </a:solidFill>
+            </a:endParaRPr>
+          </a:p>
+          <a:p>
+            <a:pPr indent="0" lvl="0" marL="0" rtl="0" algn="ctr">
+              <a:spcBef>
+                <a:spcPts val="0"/>
+              </a:spcBef>
+              <a:spcAft>
+                <a:spcPts val="0"/>
+              </a:spcAft>
+              <a:buNone/>
+            </a:pPr>
+            <a:r>
+              <a:t/>
+            </a:r>
+            <a:endParaRPr sz="1700"/>
+          </a:p>
+        </p:txBody>
+      </p:sp>
+      <p:sp>
+        <p:nvSpPr>
+          <p:cNvPr id="237" name="Google Shape;237;g36bf5fe6ea5_0_0"/>
+          <p:cNvSpPr txBox="1"/>
+          <p:nvPr>
+            <p:ph idx="1" type="body"/>
+          </p:nvPr>
+        </p:nvSpPr>
+        <p:spPr>
+          <a:xfrm>
+            <a:off x="331725" y="1093800"/>
+            <a:ext cx="8638200" cy="5399700"/>
+          </a:xfrm>
+          <a:prstGeom prst="rect">
+            <a:avLst/>
+          </a:prstGeom>
+        </p:spPr>
+        <p:txBody>
+          <a:bodyPr anchorCtr="0" anchor="t" bIns="45700" lIns="91425" spcFirstLastPara="1" rIns="91425" wrap="square" tIns="45700">
+            <a:noAutofit/>
+          </a:bodyPr>
+          <a:lstStyle/>
+          <a:p>
+            <a:pPr indent="0" lvl="0" marL="0" rtl="0" algn="l">
+              <a:spcBef>
+                <a:spcPts val="595"/>
+              </a:spcBef>
+              <a:spcAft>
+                <a:spcPts val="0"/>
+              </a:spcAft>
+              <a:buNone/>
+            </a:pPr>
+            <a:r>
+              <a:rPr lang="en-US"/>
+              <a:t>Purpose: Amdahl's Law calculates the </a:t>
+            </a:r>
+            <a:r>
+              <a:rPr b="1" lang="en-US"/>
+              <a:t>maximum theoretical speedup</a:t>
+            </a:r>
+            <a:r>
+              <a:rPr lang="en-US"/>
+              <a:t> of a program </a:t>
+            </a:r>
+            <a:r>
+              <a:rPr b="1" lang="en-US"/>
+              <a:t>when increasing the number of processors for a fixed problem size</a:t>
+            </a:r>
+            <a:r>
+              <a:rPr lang="en-US"/>
+              <a:t>. It assumes that</a:t>
+            </a:r>
+            <a:r>
+              <a:rPr b="1" lang="en-US"/>
+              <a:t> the total amount of work remains constant regardless of the number of processors</a:t>
+            </a:r>
+            <a:r>
+              <a:rPr lang="en-US"/>
+              <a:t>.</a:t>
+            </a:r>
+            <a:endParaRPr/>
+          </a:p>
+          <a:p>
+            <a:pPr indent="0" lvl="0" marL="0" rtl="0" algn="l">
+              <a:lnSpc>
+                <a:spcPct val="115000"/>
+              </a:lnSpc>
+              <a:spcBef>
+                <a:spcPts val="1200"/>
+              </a:spcBef>
+              <a:spcAft>
+                <a:spcPts val="0"/>
+              </a:spcAft>
+              <a:buClr>
+                <a:schemeClr val="dk1"/>
+              </a:buClr>
+              <a:buSzPts val="1100"/>
+              <a:buFont typeface="Arial"/>
+              <a:buNone/>
+            </a:pPr>
+            <a:r>
+              <a:rPr b="1" lang="en-US"/>
+              <a:t>Total Time with Parallelism:</a:t>
+            </a:r>
+            <a:endParaRPr b="1"/>
+          </a:p>
+          <a:p>
+            <a:pPr indent="-336550" lvl="0" marL="457200" rtl="0" algn="l">
+              <a:lnSpc>
+                <a:spcPct val="115000"/>
+              </a:lnSpc>
+              <a:spcBef>
+                <a:spcPts val="1200"/>
+              </a:spcBef>
+              <a:spcAft>
+                <a:spcPts val="0"/>
+              </a:spcAft>
+              <a:buClr>
+                <a:schemeClr val="dk1"/>
+              </a:buClr>
+              <a:buSzPts val="1700"/>
+              <a:buFont typeface="Helvetica Neue"/>
+              <a:buChar char="●"/>
+            </a:pPr>
+            <a:r>
+              <a:rPr lang="en-US"/>
+              <a:t>New execution time = (Time for serial part) + (Time for parallel part on n processors)</a:t>
+            </a:r>
+            <a:endParaRPr/>
+          </a:p>
+          <a:p>
+            <a:pPr indent="-336550" lvl="0" marL="457200" rtl="0" algn="l">
+              <a:lnSpc>
+                <a:spcPct val="115000"/>
+              </a:lnSpc>
+              <a:spcBef>
+                <a:spcPts val="0"/>
+              </a:spcBef>
+              <a:spcAft>
+                <a:spcPts val="0"/>
+              </a:spcAft>
+              <a:buClr>
+                <a:schemeClr val="dk1"/>
+              </a:buClr>
+              <a:buSzPts val="1700"/>
+              <a:buFont typeface="Helvetica Neue"/>
+              <a:buChar char="●"/>
+            </a:pPr>
+            <a:r>
+              <a:rPr lang="en-US"/>
+              <a:t>New execution time = (1−p)×1+(p)×(1/n)</a:t>
+            </a:r>
+            <a:endParaRPr/>
+          </a:p>
+          <a:p>
+            <a:pPr indent="-336550" lvl="0" marL="457200" rtl="0" algn="l">
+              <a:lnSpc>
+                <a:spcPct val="115000"/>
+              </a:lnSpc>
+              <a:spcBef>
+                <a:spcPts val="0"/>
+              </a:spcBef>
+              <a:spcAft>
+                <a:spcPts val="0"/>
+              </a:spcAft>
+              <a:buClr>
+                <a:schemeClr val="dk1"/>
+              </a:buClr>
+              <a:buSzPts val="1700"/>
+              <a:buFont typeface="Helvetica Neue"/>
+              <a:buChar char="●"/>
+            </a:pPr>
+            <a:r>
+              <a:rPr lang="en-US"/>
+              <a:t>New execution time = (1−p)+(p/n)</a:t>
+            </a:r>
+            <a:endParaRPr/>
+          </a:p>
+          <a:p>
+            <a:pPr indent="0" lvl="0" marL="0" rtl="0" algn="l">
+              <a:lnSpc>
+                <a:spcPct val="115000"/>
+              </a:lnSpc>
+              <a:spcBef>
+                <a:spcPts val="1200"/>
+              </a:spcBef>
+              <a:spcAft>
+                <a:spcPts val="0"/>
+              </a:spcAft>
+              <a:buNone/>
+            </a:pPr>
+            <a:r>
+              <a:rPr b="1" lang="en-US"/>
+              <a:t>Speedup Calculation:</a:t>
+            </a:r>
+            <a:r>
+              <a:rPr lang="en-US"/>
+              <a:t> Speedup is defined as:</a:t>
+            </a:r>
+            <a:endParaRPr/>
+          </a:p>
+          <a:p>
+            <a:pPr indent="-336550" lvl="0" marL="457200" rtl="0" algn="l">
+              <a:lnSpc>
+                <a:spcPct val="115000"/>
+              </a:lnSpc>
+              <a:spcBef>
+                <a:spcPts val="1200"/>
+              </a:spcBef>
+              <a:spcAft>
+                <a:spcPts val="0"/>
+              </a:spcAft>
+              <a:buClr>
+                <a:schemeClr val="dk1"/>
+              </a:buClr>
+              <a:buSzPts val="1700"/>
+              <a:buFont typeface="Helvetica Neue"/>
+              <a:buChar char="●"/>
+            </a:pPr>
+            <a:r>
+              <a:rPr lang="en-US"/>
+              <a:t>S=Original Execution Time/New Execution Time</a:t>
+            </a:r>
+            <a:endParaRPr/>
+          </a:p>
+          <a:p>
+            <a:pPr indent="-336550" lvl="0" marL="457200" rtl="0" algn="l">
+              <a:lnSpc>
+                <a:spcPct val="115000"/>
+              </a:lnSpc>
+              <a:spcBef>
+                <a:spcPts val="0"/>
+              </a:spcBef>
+              <a:spcAft>
+                <a:spcPts val="0"/>
+              </a:spcAft>
+              <a:buClr>
+                <a:schemeClr val="dk1"/>
+              </a:buClr>
+              <a:buSzPts val="1700"/>
+              <a:buFont typeface="Helvetica Neue"/>
+              <a:buChar char="●"/>
+            </a:pPr>
+            <a:r>
+              <a:rPr lang="en-US"/>
+              <a:t>Since we normalized original time to 1,</a:t>
+            </a:r>
+            <a:endParaRPr/>
+          </a:p>
+          <a:p>
+            <a:pPr indent="-336550" lvl="0" marL="457200" rtl="0" algn="l">
+              <a:lnSpc>
+                <a:spcPct val="115000"/>
+              </a:lnSpc>
+              <a:spcBef>
+                <a:spcPts val="0"/>
+              </a:spcBef>
+              <a:spcAft>
+                <a:spcPts val="0"/>
+              </a:spcAft>
+              <a:buClr>
+                <a:schemeClr val="dk1"/>
+              </a:buClr>
+              <a:buSzPts val="1700"/>
+              <a:buFont typeface="Helvetica Neue"/>
+              <a:buChar char="●"/>
+            </a:pPr>
+            <a:r>
+              <a:rPr lang="en-US"/>
+              <a:t>S=1/[(1−p)+(p/n)]</a:t>
+            </a:r>
+            <a:endParaRPr/>
+          </a:p>
+          <a:p>
+            <a:pPr indent="0" lvl="0" marL="0" rtl="0" algn="l">
+              <a:lnSpc>
+                <a:spcPct val="115000"/>
+              </a:lnSpc>
+              <a:spcBef>
+                <a:spcPts val="1200"/>
+              </a:spcBef>
+              <a:spcAft>
+                <a:spcPts val="0"/>
+              </a:spcAft>
+              <a:buNone/>
+            </a:pPr>
+            <a:r>
+              <a:t/>
+            </a:r>
+            <a:endParaRPr/>
+          </a:p>
+          <a:p>
+            <a:pPr indent="0" lvl="0" marL="0" rtl="0" algn="l">
+              <a:spcBef>
+                <a:spcPts val="1200"/>
+              </a:spcBef>
+              <a:spcAft>
+                <a:spcPts val="0"/>
+              </a:spcAft>
+              <a:buNone/>
+            </a:pPr>
+            <a:r>
+              <a:t/>
+            </a:r>
+            <a:endParaRPr/>
+          </a:p>
+        </p:txBody>
+      </p:sp>
+    </p:spTree>
+  </p:cSld>
+  <p:clrMapOvr>
+    <a:masterClrMapping/>
+  </p:clrMapOvr>
+</p:sld>
+</file>
+
+<file path=ppt/slides/slide23.xml><?xml version="1.0" encoding="utf-8"?>
+<p:sld xmlns:a="http://schemas.openxmlformats.org/drawingml/2006/main" xmlns:r="http://schemas.openxmlformats.org/officeDocument/2006/relationships" xmlns:mc="http://schemas.openxmlformats.org/markup-compatibility/2006" xmlns:mv="urn:schemas-microsoft-com:mac:vml" xmlns:p="http://schemas.openxmlformats.org/presentationml/2006/main" xmlns:c="http://schemas.openxmlformats.org/drawingml/2006/chart" xmlns:dgm="http://schemas.openxmlformats.org/drawingml/2006/diagram" xmlns:o="urn:schemas-microsoft-com:office:office" xmlns:v="urn:schemas-microsoft-com:vml" xmlns:pvml="urn:schemas-microsoft-com:office:powerpoint" xmlns:com="http://schemas.openxmlformats.org/drawingml/2006/compatibility" xmlns:p14="http://schemas.microsoft.com/office/powerpoint/2010/main" xmlns:p15="http://schemas.microsoft.com/office/powerpoint/2012/main" xmlns:ahyp="http://schemas.microsoft.com/office/drawing/2018/hyperlinkcolor">
+  <p:cSld>
+    <p:spTree>
+      <p:nvGrpSpPr>
+        <p:cNvPr id="242" name="Shape 242"/>
+        <p:cNvGrpSpPr/>
+        <p:nvPr/>
+      </p:nvGrpSpPr>
+      <p:grpSpPr>
+        <a:xfrm>
+          <a:off x="0" y="0"/>
+          <a:ext cx="0" cy="0"/>
+          <a:chOff x="0" y="0"/>
+          <a:chExt cx="0" cy="0"/>
+        </a:xfrm>
+      </p:grpSpPr>
+      <p:sp>
+        <p:nvSpPr>
+          <p:cNvPr id="243" name="Google Shape;243;g36bf5fe6ea5_0_11"/>
+          <p:cNvSpPr txBox="1"/>
+          <p:nvPr>
+            <p:ph type="title"/>
+          </p:nvPr>
+        </p:nvSpPr>
+        <p:spPr>
+          <a:xfrm>
+            <a:off x="768350" y="117475"/>
+            <a:ext cx="7689900" cy="609600"/>
+          </a:xfrm>
+          <a:prstGeom prst="rect">
+            <a:avLst/>
+          </a:prstGeom>
+        </p:spPr>
+        <p:txBody>
+          <a:bodyPr anchorCtr="0" anchor="b" bIns="45700" lIns="91425" spcFirstLastPara="1" rIns="91425" wrap="square" tIns="45700">
+            <a:noAutofit/>
+          </a:bodyPr>
+          <a:lstStyle/>
+          <a:p>
+            <a:pPr indent="0" lvl="0" marL="742950" rtl="0" algn="l">
+              <a:spcBef>
+                <a:spcPts val="595"/>
+              </a:spcBef>
+              <a:spcAft>
+                <a:spcPts val="0"/>
+              </a:spcAft>
+              <a:buNone/>
+            </a:pPr>
+            <a:r>
+              <a:rPr lang="en-US" sz="1700">
+                <a:solidFill>
+                  <a:srgbClr val="002060"/>
+                </a:solidFill>
+              </a:rPr>
+              <a:t>Gustafson’s law</a:t>
+            </a:r>
+            <a:r>
+              <a:rPr b="0" lang="en-US" sz="1700">
+                <a:solidFill>
+                  <a:schemeClr val="dk1"/>
+                </a:solidFill>
+              </a:rPr>
+              <a:t>: scaleup limited to: (1-p) + np </a:t>
+            </a:r>
+            <a:endParaRPr b="0" sz="1700">
+              <a:solidFill>
+                <a:schemeClr val="dk1"/>
+              </a:solidFill>
+            </a:endParaRPr>
+          </a:p>
+          <a:p>
+            <a:pPr indent="0" lvl="0" marL="0" rtl="0" algn="ctr">
+              <a:spcBef>
+                <a:spcPts val="0"/>
+              </a:spcBef>
+              <a:spcAft>
+                <a:spcPts val="0"/>
+              </a:spcAft>
+              <a:buNone/>
+            </a:pPr>
+            <a:r>
+              <a:t/>
+            </a:r>
+            <a:endParaRPr sz="1700"/>
+          </a:p>
+        </p:txBody>
+      </p:sp>
+      <p:sp>
+        <p:nvSpPr>
+          <p:cNvPr id="244" name="Google Shape;244;g36bf5fe6ea5_0_11"/>
+          <p:cNvSpPr txBox="1"/>
+          <p:nvPr>
+            <p:ph idx="1" type="body"/>
+          </p:nvPr>
+        </p:nvSpPr>
+        <p:spPr>
+          <a:xfrm>
+            <a:off x="167500" y="1093800"/>
+            <a:ext cx="8769600" cy="5337300"/>
+          </a:xfrm>
+          <a:prstGeom prst="rect">
+            <a:avLst/>
+          </a:prstGeom>
+        </p:spPr>
+        <p:txBody>
+          <a:bodyPr anchorCtr="0" anchor="t" bIns="45700" lIns="91425" spcFirstLastPara="1" rIns="91425" wrap="square" tIns="45700">
+            <a:noAutofit/>
+          </a:bodyPr>
+          <a:lstStyle/>
+          <a:p>
+            <a:pPr indent="0" lvl="0" marL="0" rtl="0" algn="l">
+              <a:spcBef>
+                <a:spcPts val="595"/>
+              </a:spcBef>
+              <a:spcAft>
+                <a:spcPts val="0"/>
+              </a:spcAft>
+              <a:buNone/>
+            </a:pPr>
+            <a:r>
+              <a:rPr b="1" lang="en-US" sz="1300">
+                <a:latin typeface="Arial"/>
+                <a:ea typeface="Arial"/>
+                <a:cs typeface="Arial"/>
+                <a:sym typeface="Arial"/>
+              </a:rPr>
+              <a:t>Purpose:</a:t>
+            </a:r>
+            <a:r>
+              <a:rPr lang="en-US" sz="1300">
+                <a:latin typeface="Arial"/>
+                <a:ea typeface="Arial"/>
+                <a:cs typeface="Arial"/>
+                <a:sym typeface="Arial"/>
+              </a:rPr>
+              <a:t> Gustafson's Law calculates the </a:t>
+            </a:r>
+            <a:r>
+              <a:rPr b="1" lang="en-US" sz="1300">
+                <a:latin typeface="Arial"/>
+                <a:ea typeface="Arial"/>
+                <a:cs typeface="Arial"/>
+                <a:sym typeface="Arial"/>
+              </a:rPr>
+              <a:t>scaled speedup</a:t>
+            </a:r>
+            <a:r>
+              <a:rPr lang="en-US" sz="1300">
+                <a:latin typeface="Arial"/>
+                <a:ea typeface="Arial"/>
+                <a:cs typeface="Arial"/>
+                <a:sym typeface="Arial"/>
+              </a:rPr>
+              <a:t> for a parallel system where the </a:t>
+            </a:r>
+            <a:r>
+              <a:rPr b="1" lang="en-US" sz="1300">
+                <a:latin typeface="Arial"/>
+                <a:ea typeface="Arial"/>
+                <a:cs typeface="Arial"/>
+                <a:sym typeface="Arial"/>
+              </a:rPr>
+              <a:t>problem size scales with the number of processors</a:t>
+            </a:r>
+            <a:r>
+              <a:rPr lang="en-US" sz="1300">
+                <a:latin typeface="Arial"/>
+                <a:ea typeface="Arial"/>
+                <a:cs typeface="Arial"/>
+                <a:sym typeface="Arial"/>
+              </a:rPr>
+              <a:t>. It addresses the limitation of Amdahl's Law by assuming that as </a:t>
+            </a:r>
+            <a:r>
+              <a:rPr b="1" lang="en-US" sz="1300">
+                <a:latin typeface="Arial"/>
+                <a:ea typeface="Arial"/>
+                <a:cs typeface="Arial"/>
+                <a:sym typeface="Arial"/>
+              </a:rPr>
+              <a:t>you add more processors, you also solve a </a:t>
+            </a:r>
+            <a:r>
+              <a:rPr b="1" i="1" lang="en-US" sz="1300">
+                <a:latin typeface="Arial"/>
+                <a:ea typeface="Arial"/>
+                <a:cs typeface="Arial"/>
+                <a:sym typeface="Arial"/>
+              </a:rPr>
+              <a:t>larger</a:t>
+            </a:r>
+            <a:r>
+              <a:rPr b="1" lang="en-US" sz="1300">
+                <a:latin typeface="Arial"/>
+                <a:ea typeface="Arial"/>
+                <a:cs typeface="Arial"/>
+                <a:sym typeface="Arial"/>
+              </a:rPr>
+              <a:t> problem in roughly the same amount of time.</a:t>
+            </a:r>
+            <a:endParaRPr b="1" sz="1300">
+              <a:latin typeface="Arial"/>
+              <a:ea typeface="Arial"/>
+              <a:cs typeface="Arial"/>
+              <a:sym typeface="Arial"/>
+            </a:endParaRPr>
+          </a:p>
+          <a:p>
+            <a:pPr indent="0" lvl="0" marL="0" rtl="0" algn="l">
+              <a:spcBef>
+                <a:spcPts val="595"/>
+              </a:spcBef>
+              <a:spcAft>
+                <a:spcPts val="0"/>
+              </a:spcAft>
+              <a:buNone/>
+            </a:pPr>
+            <a:r>
+              <a:t/>
+            </a:r>
+            <a:endParaRPr b="1" sz="1300">
+              <a:latin typeface="Arial"/>
+              <a:ea typeface="Arial"/>
+              <a:cs typeface="Arial"/>
+              <a:sym typeface="Arial"/>
+            </a:endParaRPr>
+          </a:p>
+          <a:p>
+            <a:pPr indent="0" lvl="0" marL="0" rtl="0" algn="l">
+              <a:spcBef>
+                <a:spcPts val="595"/>
+              </a:spcBef>
+              <a:spcAft>
+                <a:spcPts val="0"/>
+              </a:spcAft>
+              <a:buClr>
+                <a:schemeClr val="dk1"/>
+              </a:buClr>
+              <a:buSzPts val="1100"/>
+              <a:buFont typeface="Arial"/>
+              <a:buNone/>
+            </a:pPr>
+            <a:r>
+              <a:rPr b="1" lang="en-US" sz="1300">
+                <a:latin typeface="Arial"/>
+                <a:ea typeface="Arial"/>
+                <a:cs typeface="Arial"/>
+                <a:sym typeface="Arial"/>
+              </a:rPr>
+              <a:t>Workload Scales with Processors:</a:t>
+            </a:r>
+            <a:r>
+              <a:rPr lang="en-US" sz="1300">
+                <a:latin typeface="Arial"/>
+                <a:ea typeface="Arial"/>
+                <a:cs typeface="Arial"/>
+                <a:sym typeface="Arial"/>
+              </a:rPr>
+              <a:t> The core idea here is that if you have more processors, you'll tackle a proportionally larger problem.</a:t>
+            </a:r>
+            <a:endParaRPr sz="1300">
+              <a:latin typeface="Arial"/>
+              <a:ea typeface="Arial"/>
+              <a:cs typeface="Arial"/>
+              <a:sym typeface="Arial"/>
+            </a:endParaRPr>
+          </a:p>
+          <a:p>
+            <a:pPr indent="-311150" lvl="0" marL="457200" rtl="0" algn="l">
+              <a:lnSpc>
+                <a:spcPct val="115000"/>
+              </a:lnSpc>
+              <a:spcBef>
+                <a:spcPts val="1200"/>
+              </a:spcBef>
+              <a:spcAft>
+                <a:spcPts val="0"/>
+              </a:spcAft>
+              <a:buClr>
+                <a:schemeClr val="dk1"/>
+              </a:buClr>
+              <a:buSzPts val="1300"/>
+              <a:buFont typeface="Arial"/>
+              <a:buChar char="●"/>
+            </a:pPr>
+            <a:r>
+              <a:rPr lang="en-US" sz="1300">
+                <a:latin typeface="Arial"/>
+                <a:ea typeface="Arial"/>
+                <a:cs typeface="Arial"/>
+                <a:sym typeface="Arial"/>
+              </a:rPr>
+              <a:t>Assume that the </a:t>
+            </a:r>
+            <a:r>
+              <a:rPr b="1" lang="en-US" sz="1300">
+                <a:latin typeface="Arial"/>
+                <a:ea typeface="Arial"/>
+                <a:cs typeface="Arial"/>
+                <a:sym typeface="Arial"/>
+              </a:rPr>
+              <a:t>parallel part of the program scales linearly with n processors</a:t>
+            </a:r>
+            <a:r>
+              <a:rPr lang="en-US" sz="1300">
+                <a:latin typeface="Arial"/>
+                <a:ea typeface="Arial"/>
+                <a:cs typeface="Arial"/>
+                <a:sym typeface="Arial"/>
+              </a:rPr>
+              <a:t>.</a:t>
+            </a:r>
+            <a:endParaRPr sz="1300">
+              <a:latin typeface="Arial"/>
+              <a:ea typeface="Arial"/>
+              <a:cs typeface="Arial"/>
+              <a:sym typeface="Arial"/>
+            </a:endParaRPr>
+          </a:p>
+          <a:p>
+            <a:pPr indent="-311150" lvl="0" marL="457200" rtl="0" algn="l">
+              <a:lnSpc>
+                <a:spcPct val="115000"/>
+              </a:lnSpc>
+              <a:spcBef>
+                <a:spcPts val="0"/>
+              </a:spcBef>
+              <a:spcAft>
+                <a:spcPts val="0"/>
+              </a:spcAft>
+              <a:buClr>
+                <a:schemeClr val="dk1"/>
+              </a:buClr>
+              <a:buSzPts val="1300"/>
+              <a:buFont typeface="Arial"/>
+              <a:buChar char="●"/>
+            </a:pPr>
+            <a:r>
+              <a:rPr lang="en-US" sz="1300">
+                <a:latin typeface="Arial"/>
+                <a:ea typeface="Arial"/>
+                <a:cs typeface="Arial"/>
+                <a:sym typeface="Arial"/>
+              </a:rPr>
+              <a:t>Let the time taken by the </a:t>
+            </a:r>
+            <a:r>
+              <a:rPr b="1" lang="en-US" sz="1300">
+                <a:latin typeface="Arial"/>
+                <a:ea typeface="Arial"/>
+                <a:cs typeface="Arial"/>
+                <a:sym typeface="Arial"/>
+              </a:rPr>
+              <a:t>parallel portion on a single processor</a:t>
+            </a:r>
+            <a:r>
+              <a:rPr lang="en-US" sz="1300">
+                <a:latin typeface="Arial"/>
+                <a:ea typeface="Arial"/>
+                <a:cs typeface="Arial"/>
+                <a:sym typeface="Arial"/>
+              </a:rPr>
+              <a:t> be p.</a:t>
+            </a:r>
+            <a:endParaRPr sz="1300">
+              <a:latin typeface="Arial"/>
+              <a:ea typeface="Arial"/>
+              <a:cs typeface="Arial"/>
+              <a:sym typeface="Arial"/>
+            </a:endParaRPr>
+          </a:p>
+          <a:p>
+            <a:pPr indent="-311150" lvl="0" marL="457200" rtl="0" algn="l">
+              <a:lnSpc>
+                <a:spcPct val="115000"/>
+              </a:lnSpc>
+              <a:spcBef>
+                <a:spcPts val="0"/>
+              </a:spcBef>
+              <a:spcAft>
+                <a:spcPts val="0"/>
+              </a:spcAft>
+              <a:buClr>
+                <a:schemeClr val="dk1"/>
+              </a:buClr>
+              <a:buSzPts val="1300"/>
+              <a:buFont typeface="Arial"/>
+              <a:buChar char="●"/>
+            </a:pPr>
+            <a:r>
+              <a:rPr lang="en-US" sz="1300">
+                <a:latin typeface="Arial"/>
+                <a:ea typeface="Arial"/>
+                <a:cs typeface="Arial"/>
+                <a:sym typeface="Arial"/>
+              </a:rPr>
+              <a:t>Let the time taken by the </a:t>
+            </a:r>
+            <a:r>
+              <a:rPr b="1" lang="en-US" sz="1300">
+                <a:latin typeface="Arial"/>
+                <a:ea typeface="Arial"/>
+                <a:cs typeface="Arial"/>
+                <a:sym typeface="Arial"/>
+              </a:rPr>
+              <a:t>serial portion on a single processor</a:t>
+            </a:r>
+            <a:r>
+              <a:rPr lang="en-US" sz="1300">
+                <a:latin typeface="Arial"/>
+                <a:ea typeface="Arial"/>
+                <a:cs typeface="Arial"/>
+                <a:sym typeface="Arial"/>
+              </a:rPr>
+              <a:t> be (1−p).</a:t>
+            </a:r>
+            <a:endParaRPr sz="1300">
+              <a:latin typeface="Arial"/>
+              <a:ea typeface="Arial"/>
+              <a:cs typeface="Arial"/>
+              <a:sym typeface="Arial"/>
+            </a:endParaRPr>
+          </a:p>
+          <a:p>
+            <a:pPr indent="-311150" lvl="0" marL="457200" rtl="0" algn="l">
+              <a:lnSpc>
+                <a:spcPct val="115000"/>
+              </a:lnSpc>
+              <a:spcBef>
+                <a:spcPts val="0"/>
+              </a:spcBef>
+              <a:spcAft>
+                <a:spcPts val="0"/>
+              </a:spcAft>
+              <a:buClr>
+                <a:schemeClr val="dk1"/>
+              </a:buClr>
+              <a:buSzPts val="1300"/>
+              <a:buFont typeface="Arial"/>
+              <a:buChar char="●"/>
+            </a:pPr>
+            <a:r>
+              <a:rPr lang="en-US" sz="1300">
+                <a:latin typeface="Arial"/>
+                <a:ea typeface="Arial"/>
+                <a:cs typeface="Arial"/>
+                <a:sym typeface="Arial"/>
+              </a:rPr>
+              <a:t>The total time on a single processor for the </a:t>
+            </a:r>
+            <a:r>
+              <a:rPr i="1" lang="en-US" sz="1300">
+                <a:latin typeface="Arial"/>
+                <a:ea typeface="Arial"/>
+                <a:cs typeface="Arial"/>
+                <a:sym typeface="Arial"/>
+              </a:rPr>
+              <a:t>scaled problem</a:t>
+            </a:r>
+            <a:r>
+              <a:rPr lang="en-US" sz="1300">
+                <a:latin typeface="Arial"/>
+                <a:ea typeface="Arial"/>
+                <a:cs typeface="Arial"/>
+                <a:sym typeface="Arial"/>
+              </a:rPr>
+              <a:t> would be (1−p)+n×p (because the parallel part is now n times larger for the n processors).</a:t>
+            </a:r>
+            <a:endParaRPr sz="1300">
+              <a:latin typeface="Arial"/>
+              <a:ea typeface="Arial"/>
+              <a:cs typeface="Arial"/>
+              <a:sym typeface="Arial"/>
+            </a:endParaRPr>
+          </a:p>
+          <a:p>
+            <a:pPr indent="0" lvl="0" marL="0" rtl="0" algn="l">
+              <a:lnSpc>
+                <a:spcPct val="115000"/>
+              </a:lnSpc>
+              <a:spcBef>
+                <a:spcPts val="1200"/>
+              </a:spcBef>
+              <a:spcAft>
+                <a:spcPts val="0"/>
+              </a:spcAft>
+              <a:buClr>
+                <a:schemeClr val="dk1"/>
+              </a:buClr>
+              <a:buSzPts val="1100"/>
+              <a:buFont typeface="Arial"/>
+              <a:buNone/>
+            </a:pPr>
+            <a:r>
+              <a:rPr b="1" lang="en-US" sz="1300">
+                <a:latin typeface="Arial"/>
+                <a:ea typeface="Arial"/>
+                <a:cs typeface="Arial"/>
+                <a:sym typeface="Arial"/>
+              </a:rPr>
+              <a:t>Time on n Processors:</a:t>
+            </a:r>
+            <a:r>
+              <a:rPr lang="en-US" sz="1300">
+                <a:latin typeface="Arial"/>
+                <a:ea typeface="Arial"/>
+                <a:cs typeface="Arial"/>
+                <a:sym typeface="Arial"/>
+              </a:rPr>
+              <a:t> On n processors, the serial part still takes (1−p) time. The scaled parallel part, which took n×p on a single processor, now takes just p time on n processors (since it's distributed among them).</a:t>
+            </a:r>
+            <a:endParaRPr sz="1300">
+              <a:latin typeface="Arial"/>
+              <a:ea typeface="Arial"/>
+              <a:cs typeface="Arial"/>
+              <a:sym typeface="Arial"/>
+            </a:endParaRPr>
+          </a:p>
+          <a:p>
+            <a:pPr indent="-311150" lvl="0" marL="457200" rtl="0" algn="l">
+              <a:lnSpc>
+                <a:spcPct val="115000"/>
+              </a:lnSpc>
+              <a:spcBef>
+                <a:spcPts val="1200"/>
+              </a:spcBef>
+              <a:spcAft>
+                <a:spcPts val="0"/>
+              </a:spcAft>
+              <a:buClr>
+                <a:schemeClr val="dk1"/>
+              </a:buClr>
+              <a:buSzPts val="1300"/>
+              <a:buFont typeface="Arial"/>
+              <a:buChar char="●"/>
+            </a:pPr>
+            <a:r>
+              <a:rPr lang="en-US" sz="1300">
+                <a:latin typeface="Arial"/>
+                <a:ea typeface="Arial"/>
+                <a:cs typeface="Arial"/>
+                <a:sym typeface="Arial"/>
+              </a:rPr>
+              <a:t>Total time on n processors = (1−p)+p=1. (This is the key assumption of Gustafson's Law: you scale the problem size such that the execution time on n processors is approximately the same as the original problem on 1 processor).</a:t>
+            </a:r>
+            <a:endParaRPr sz="1300">
+              <a:latin typeface="Arial"/>
+              <a:ea typeface="Arial"/>
+              <a:cs typeface="Arial"/>
+              <a:sym typeface="Arial"/>
+            </a:endParaRPr>
+          </a:p>
+          <a:p>
+            <a:pPr indent="0" lvl="0" marL="0" rtl="0" algn="l">
+              <a:lnSpc>
+                <a:spcPct val="115000"/>
+              </a:lnSpc>
+              <a:spcBef>
+                <a:spcPts val="1200"/>
+              </a:spcBef>
+              <a:spcAft>
+                <a:spcPts val="0"/>
+              </a:spcAft>
+              <a:buClr>
+                <a:schemeClr val="dk1"/>
+              </a:buClr>
+              <a:buSzPts val="1100"/>
+              <a:buFont typeface="Arial"/>
+              <a:buNone/>
+            </a:pPr>
+            <a:r>
+              <a:rPr b="1" lang="en-US" sz="1300">
+                <a:latin typeface="Arial"/>
+                <a:ea typeface="Arial"/>
+                <a:cs typeface="Arial"/>
+                <a:sym typeface="Arial"/>
+              </a:rPr>
+              <a:t>Speedup Calculation:</a:t>
+            </a:r>
+            <a:r>
+              <a:rPr lang="en-US" sz="1300">
+                <a:latin typeface="Arial"/>
+                <a:ea typeface="Arial"/>
+                <a:cs typeface="Arial"/>
+                <a:sym typeface="Arial"/>
+              </a:rPr>
+              <a:t> Speedup is defined as:</a:t>
+            </a:r>
+            <a:endParaRPr sz="1300">
+              <a:latin typeface="Arial"/>
+              <a:ea typeface="Arial"/>
+              <a:cs typeface="Arial"/>
+              <a:sym typeface="Arial"/>
+            </a:endParaRPr>
+          </a:p>
+          <a:p>
+            <a:pPr indent="-311150" lvl="0" marL="457200" rtl="0" algn="l">
+              <a:lnSpc>
+                <a:spcPct val="115000"/>
+              </a:lnSpc>
+              <a:spcBef>
+                <a:spcPts val="1200"/>
+              </a:spcBef>
+              <a:spcAft>
+                <a:spcPts val="0"/>
+              </a:spcAft>
+              <a:buClr>
+                <a:schemeClr val="dk1"/>
+              </a:buClr>
+              <a:buSzPts val="1300"/>
+              <a:buFont typeface="Arial"/>
+              <a:buChar char="●"/>
+            </a:pPr>
+            <a:r>
+              <a:rPr lang="en-US" sz="1300">
+                <a:latin typeface="Arial"/>
+                <a:ea typeface="Arial"/>
+                <a:cs typeface="Arial"/>
+                <a:sym typeface="Arial"/>
+              </a:rPr>
+              <a:t>S=Original Execution Time (scaled problem on 1 processor)/New Execution Time (scaled problem on n processors)</a:t>
+            </a:r>
+            <a:endParaRPr sz="1300">
+              <a:latin typeface="Arial"/>
+              <a:ea typeface="Arial"/>
+              <a:cs typeface="Arial"/>
+              <a:sym typeface="Arial"/>
+            </a:endParaRPr>
+          </a:p>
+          <a:p>
+            <a:pPr indent="-311150" lvl="0" marL="457200" rtl="0" algn="l">
+              <a:lnSpc>
+                <a:spcPct val="115000"/>
+              </a:lnSpc>
+              <a:spcBef>
+                <a:spcPts val="0"/>
+              </a:spcBef>
+              <a:spcAft>
+                <a:spcPts val="0"/>
+              </a:spcAft>
+              <a:buClr>
+                <a:schemeClr val="dk1"/>
+              </a:buClr>
+              <a:buSzPts val="1300"/>
+              <a:buFont typeface="Arial"/>
+              <a:buChar char="●"/>
+            </a:pPr>
+            <a:r>
+              <a:rPr lang="en-US" sz="1300">
+                <a:latin typeface="Arial"/>
+                <a:ea typeface="Arial"/>
+                <a:cs typeface="Arial"/>
+                <a:sym typeface="Arial"/>
+              </a:rPr>
+              <a:t>S=[(1−p)+np]/1</a:t>
+            </a:r>
+            <a:endParaRPr sz="1300">
+              <a:latin typeface="Arial"/>
+              <a:ea typeface="Arial"/>
+              <a:cs typeface="Arial"/>
+              <a:sym typeface="Arial"/>
+            </a:endParaRPr>
+          </a:p>
+          <a:p>
+            <a:pPr indent="-311150" lvl="0" marL="457200" rtl="0" algn="l">
+              <a:lnSpc>
+                <a:spcPct val="115000"/>
+              </a:lnSpc>
+              <a:spcBef>
+                <a:spcPts val="0"/>
+              </a:spcBef>
+              <a:spcAft>
+                <a:spcPts val="0"/>
+              </a:spcAft>
+              <a:buClr>
+                <a:schemeClr val="dk1"/>
+              </a:buClr>
+              <a:buSzPts val="1300"/>
+              <a:buFont typeface="Arial"/>
+              <a:buChar char="●"/>
+            </a:pPr>
+            <a:r>
+              <a:rPr lang="en-US" sz="1300">
+                <a:latin typeface="Arial"/>
+                <a:ea typeface="Arial"/>
+                <a:cs typeface="Arial"/>
+                <a:sym typeface="Arial"/>
+              </a:rPr>
+              <a:t>S=(1−p)+np</a:t>
+            </a:r>
+            <a:endParaRPr sz="1300">
+              <a:latin typeface="Arial"/>
+              <a:ea typeface="Arial"/>
+              <a:cs typeface="Arial"/>
+              <a:sym typeface="Arial"/>
+            </a:endParaRPr>
+          </a:p>
+          <a:p>
+            <a:pPr indent="0" lvl="0" marL="0" rtl="0" algn="l">
+              <a:spcBef>
+                <a:spcPts val="1200"/>
+              </a:spcBef>
+              <a:spcAft>
+                <a:spcPts val="0"/>
+              </a:spcAft>
+              <a:buNone/>
+            </a:pPr>
+            <a:r>
+              <a:t/>
+            </a:r>
+            <a:endParaRPr b="1" sz="1300">
+              <a:latin typeface="Arial"/>
+              <a:ea typeface="Arial"/>
+              <a:cs typeface="Arial"/>
+              <a:sym typeface="Arial"/>
+            </a:endParaRPr>
+          </a:p>
+        </p:txBody>
+      </p:sp>
+    </p:spTree>
+  </p:cSld>
+  <p:clrMapOvr>
+    <a:masterClrMapping/>
+  </p:clrMapOvr>
+</p:sld>
+</file>
+
+<file path=ppt/slides/slide24.xml><?xml version="1.0" encoding="utf-8"?>
+<p:sld xmlns:a="http://schemas.openxmlformats.org/drawingml/2006/main" xmlns:r="http://schemas.openxmlformats.org/officeDocument/2006/relationships" xmlns:mc="http://schemas.openxmlformats.org/markup-compatibility/2006" xmlns:mv="urn:schemas-microsoft-com:mac:vml" xmlns:p="http://schemas.openxmlformats.org/presentationml/2006/main" xmlns:c="http://schemas.openxmlformats.org/drawingml/2006/chart" xmlns:dgm="http://schemas.openxmlformats.org/drawingml/2006/diagram" xmlns:o="urn:schemas-microsoft-com:office:office" xmlns:v="urn:schemas-microsoft-com:vml" xmlns:pvml="urn:schemas-microsoft-com:office:powerpoint" xmlns:com="http://schemas.openxmlformats.org/drawingml/2006/compatibility" xmlns:p14="http://schemas.microsoft.com/office/powerpoint/2010/main" xmlns:p15="http://schemas.microsoft.com/office/powerpoint/2012/main" xmlns:ahyp="http://schemas.microsoft.com/office/drawing/2018/hyperlinkcolor">
+  <p:cSld>
+    <p:spTree>
+      <p:nvGrpSpPr>
+        <p:cNvPr id="249" name="Shape 249"/>
+        <p:cNvGrpSpPr/>
+        <p:nvPr/>
+      </p:nvGrpSpPr>
+      <p:grpSpPr>
+        <a:xfrm>
+          <a:off x="0" y="0"/>
+          <a:ext cx="0" cy="0"/>
+          <a:chOff x="0" y="0"/>
+          <a:chExt cx="0" cy="0"/>
+        </a:xfrm>
+      </p:grpSpPr>
+      <p:sp>
+        <p:nvSpPr>
+          <p:cNvPr id="250" name="Google Shape;250;p21"/>
           <p:cNvSpPr txBox="1"/>
           <p:nvPr>
             <p:ph type="title"/>
@@ -21828,7 +23492,7 @@
       </p:sp>
       <p:sp>
         <p:nvSpPr>
-          <p:cNvPr id="235" name="Google Shape;235;p21"/>
+          <p:cNvPr id="251" name="Google Shape;251;p21"/>
           <p:cNvSpPr txBox="1"/>
           <p:nvPr>
             <p:ph idx="1" type="body"/>
@@ -22247,12 +23911,12 @@
 </p:sld>
 </file>
 
-<file path=ppt/slides/slide23.xml><?xml version="1.0" encoding="utf-8"?>
+<file path=ppt/slides/slide25.xml><?xml version="1.0" encoding="utf-8"?>
 <p:sld xmlns:a="http://schemas.openxmlformats.org/drawingml/2006/main" xmlns:r="http://schemas.openxmlformats.org/officeDocument/2006/relationships" xmlns:mc="http://schemas.openxmlformats.org/markup-compatibility/2006" xmlns:mv="urn:schemas-microsoft-com:mac:vml" xmlns:p="http://schemas.openxmlformats.org/presentationml/2006/main" xmlns:c="http://schemas.openxmlformats.org/drawingml/2006/chart" xmlns:dgm="http://schemas.openxmlformats.org/drawingml/2006/diagram" xmlns:o="urn:schemas-microsoft-com:office:office" xmlns:v="urn:schemas-microsoft-com:vml" xmlns:pvml="urn:schemas-microsoft-com:office:powerpoint" xmlns:com="http://schemas.openxmlformats.org/drawingml/2006/compatibility" xmlns:p14="http://schemas.microsoft.com/office/powerpoint/2010/main" xmlns:p15="http://schemas.microsoft.com/office/powerpoint/2012/main" xmlns:ahyp="http://schemas.microsoft.com/office/drawing/2018/hyperlinkcolor">
   <p:cSld>
     <p:spTree>
       <p:nvGrpSpPr>
-        <p:cNvPr id="240" name="Shape 240"/>
+        <p:cNvPr id="256" name="Shape 256"/>
         <p:cNvGrpSpPr/>
         <p:nvPr/>
       </p:nvGrpSpPr>
@@ -22266,7 +23930,7 @@
       </p:grpSpPr>
       <p:sp>
         <p:nvSpPr>
-          <p:cNvPr id="241" name="Google Shape;241;p22"/>
+          <p:cNvPr id="257" name="Google Shape;257;p22"/>
           <p:cNvSpPr txBox="1"/>
           <p:nvPr>
             <p:ph type="title"/>
@@ -22315,7 +23979,7 @@
       </p:sp>
       <p:pic>
         <p:nvPicPr>
-          <p:cNvPr descr="20_04.pdf" id="242" name="Google Shape;242;p22"/>
+          <p:cNvPr descr="20_04.pdf" id="258" name="Google Shape;258;p22"/>
           <p:cNvPicPr preferRelativeResize="0"/>
           <p:nvPr/>
         </p:nvPicPr>
@@ -22348,12 +24012,12 @@
 </p:sld>
 </file>
 
-<file path=ppt/slides/slide24.xml><?xml version="1.0" encoding="utf-8"?>
+<file path=ppt/slides/slide26.xml><?xml version="1.0" encoding="utf-8"?>
 <p:sld xmlns:a="http://schemas.openxmlformats.org/drawingml/2006/main" xmlns:r="http://schemas.openxmlformats.org/officeDocument/2006/relationships" xmlns:mc="http://schemas.openxmlformats.org/markup-compatibility/2006" xmlns:mv="urn:schemas-microsoft-com:mac:vml" xmlns:p="http://schemas.openxmlformats.org/presentationml/2006/main" xmlns:c="http://schemas.openxmlformats.org/drawingml/2006/chart" xmlns:dgm="http://schemas.openxmlformats.org/drawingml/2006/diagram" xmlns:o="urn:schemas-microsoft-com:office:office" xmlns:v="urn:schemas-microsoft-com:vml" xmlns:pvml="urn:schemas-microsoft-com:office:powerpoint" xmlns:com="http://schemas.openxmlformats.org/drawingml/2006/compatibility" xmlns:p14="http://schemas.microsoft.com/office/powerpoint/2010/main" xmlns:p15="http://schemas.microsoft.com/office/powerpoint/2012/main" xmlns:ahyp="http://schemas.microsoft.com/office/drawing/2018/hyperlinkcolor">
   <p:cSld>
     <p:spTree>
       <p:nvGrpSpPr>
-        <p:cNvPr id="247" name="Shape 247"/>
+        <p:cNvPr id="263" name="Shape 263"/>
         <p:cNvGrpSpPr/>
         <p:nvPr/>
       </p:nvGrpSpPr>
@@ -22367,7 +24031,7 @@
       </p:grpSpPr>
       <p:sp>
         <p:nvSpPr>
-          <p:cNvPr id="248" name="Google Shape;248;p23"/>
+          <p:cNvPr id="264" name="Google Shape;264;p23"/>
           <p:cNvSpPr txBox="1"/>
           <p:nvPr>
             <p:ph type="title"/>
@@ -22416,7 +24080,7 @@
       </p:sp>
       <p:sp>
         <p:nvSpPr>
-          <p:cNvPr id="249" name="Google Shape;249;p23"/>
+          <p:cNvPr id="265" name="Google Shape;265;p23"/>
           <p:cNvSpPr txBox="1"/>
           <p:nvPr>
             <p:ph idx="1" type="body"/>
@@ -22617,7 +24281,7 @@
       </p:sp>
       <p:pic>
         <p:nvPicPr>
-          <p:cNvPr id="250" name="Google Shape;250;p23"/>
+          <p:cNvPr id="266" name="Google Shape;266;p23"/>
           <p:cNvPicPr preferRelativeResize="0"/>
           <p:nvPr/>
         </p:nvPicPr>
@@ -22650,12 +24314,12 @@
 </p:sld>
 </file>
 
-<file path=ppt/slides/slide25.xml><?xml version="1.0" encoding="utf-8"?>
+<file path=ppt/slides/slide27.xml><?xml version="1.0" encoding="utf-8"?>
 <p:sld xmlns:a="http://schemas.openxmlformats.org/drawingml/2006/main" xmlns:r="http://schemas.openxmlformats.org/officeDocument/2006/relationships" xmlns:mc="http://schemas.openxmlformats.org/markup-compatibility/2006" xmlns:mv="urn:schemas-microsoft-com:mac:vml" xmlns:p="http://schemas.openxmlformats.org/presentationml/2006/main" xmlns:c="http://schemas.openxmlformats.org/drawingml/2006/chart" xmlns:dgm="http://schemas.openxmlformats.org/drawingml/2006/diagram" xmlns:o="urn:schemas-microsoft-com:office:office" xmlns:v="urn:schemas-microsoft-com:vml" xmlns:pvml="urn:schemas-microsoft-com:office:powerpoint" xmlns:com="http://schemas.openxmlformats.org/drawingml/2006/compatibility" xmlns:p14="http://schemas.microsoft.com/office/powerpoint/2010/main" xmlns:p15="http://schemas.microsoft.com/office/powerpoint/2012/main" xmlns:ahyp="http://schemas.microsoft.com/office/drawing/2018/hyperlinkcolor">
   <p:cSld>
     <p:spTree>
       <p:nvGrpSpPr>
-        <p:cNvPr id="254" name="Shape 254"/>
+        <p:cNvPr id="270" name="Shape 270"/>
         <p:cNvGrpSpPr/>
         <p:nvPr/>
       </p:nvGrpSpPr>
@@ -22669,7 +24333,7 @@
       </p:grpSpPr>
       <p:sp>
         <p:nvSpPr>
-          <p:cNvPr id="255" name="Google Shape;255;p24"/>
+          <p:cNvPr id="271" name="Google Shape;271;p24"/>
           <p:cNvSpPr txBox="1"/>
           <p:nvPr>
             <p:ph type="title"/>
@@ -22713,7 +24377,7 @@
       </p:sp>
       <p:sp>
         <p:nvSpPr>
-          <p:cNvPr id="256" name="Google Shape;256;p24"/>
+          <p:cNvPr id="272" name="Google Shape;272;p24"/>
           <p:cNvSpPr txBox="1"/>
           <p:nvPr>
             <p:ph idx="1" type="body"/>
@@ -22911,12 +24575,12 @@
 </p:sld>
 </file>
 
-<file path=ppt/slides/slide26.xml><?xml version="1.0" encoding="utf-8"?>
+<file path=ppt/slides/slide28.xml><?xml version="1.0" encoding="utf-8"?>
 <p:sld xmlns:a="http://schemas.openxmlformats.org/drawingml/2006/main" xmlns:r="http://schemas.openxmlformats.org/officeDocument/2006/relationships" xmlns:mc="http://schemas.openxmlformats.org/markup-compatibility/2006" xmlns:mv="urn:schemas-microsoft-com:mac:vml" xmlns:p="http://schemas.openxmlformats.org/presentationml/2006/main" xmlns:c="http://schemas.openxmlformats.org/drawingml/2006/chart" xmlns:dgm="http://schemas.openxmlformats.org/drawingml/2006/diagram" xmlns:o="urn:schemas-microsoft-com:office:office" xmlns:v="urn:schemas-microsoft-com:vml" xmlns:pvml="urn:schemas-microsoft-com:office:powerpoint" xmlns:com="http://schemas.openxmlformats.org/drawingml/2006/compatibility" xmlns:p14="http://schemas.microsoft.com/office/powerpoint/2010/main" xmlns:p15="http://schemas.microsoft.com/office/powerpoint/2012/main" xmlns:ahyp="http://schemas.microsoft.com/office/drawing/2018/hyperlinkcolor">
   <p:cSld>
     <p:spTree>
       <p:nvGrpSpPr>
-        <p:cNvPr id="261" name="Shape 261"/>
+        <p:cNvPr id="277" name="Shape 277"/>
         <p:cNvGrpSpPr/>
         <p:nvPr/>
       </p:nvGrpSpPr>
@@ -22930,7 +24594,7 @@
       </p:grpSpPr>
       <p:sp>
         <p:nvSpPr>
-          <p:cNvPr id="262" name="Google Shape;262;p25"/>
+          <p:cNvPr id="278" name="Google Shape;278;p25"/>
           <p:cNvSpPr txBox="1"/>
           <p:nvPr>
             <p:ph type="title"/>
@@ -22979,7 +24643,7 @@
       </p:sp>
       <p:pic>
         <p:nvPicPr>
-          <p:cNvPr id="263" name="Google Shape;263;p25"/>
+          <p:cNvPr id="279" name="Google Shape;279;p25"/>
           <p:cNvPicPr preferRelativeResize="0"/>
           <p:nvPr/>
         </p:nvPicPr>
@@ -23012,12 +24676,12 @@
 </p:sld>
 </file>
 
-<file path=ppt/slides/slide27.xml><?xml version="1.0" encoding="utf-8"?>
+<file path=ppt/slides/slide29.xml><?xml version="1.0" encoding="utf-8"?>
 <p:sld xmlns:a="http://schemas.openxmlformats.org/drawingml/2006/main" xmlns:r="http://schemas.openxmlformats.org/officeDocument/2006/relationships" xmlns:mc="http://schemas.openxmlformats.org/markup-compatibility/2006" xmlns:mv="urn:schemas-microsoft-com:mac:vml" xmlns:p="http://schemas.openxmlformats.org/presentationml/2006/main" xmlns:c="http://schemas.openxmlformats.org/drawingml/2006/chart" xmlns:dgm="http://schemas.openxmlformats.org/drawingml/2006/diagram" xmlns:o="urn:schemas-microsoft-com:office:office" xmlns:v="urn:schemas-microsoft-com:vml" xmlns:pvml="urn:schemas-microsoft-com:office:powerpoint" xmlns:com="http://schemas.openxmlformats.org/drawingml/2006/compatibility" xmlns:p14="http://schemas.microsoft.com/office/powerpoint/2010/main" xmlns:p15="http://schemas.microsoft.com/office/powerpoint/2012/main" xmlns:ahyp="http://schemas.microsoft.com/office/drawing/2018/hyperlinkcolor">
   <p:cSld>
     <p:spTree>
       <p:nvGrpSpPr>
-        <p:cNvPr id="268" name="Shape 268"/>
+        <p:cNvPr id="284" name="Shape 284"/>
         <p:cNvGrpSpPr/>
         <p:nvPr/>
       </p:nvGrpSpPr>
@@ -23031,7 +24695,7 @@
       </p:grpSpPr>
       <p:sp>
         <p:nvSpPr>
-          <p:cNvPr id="269" name="Google Shape;269;p26"/>
+          <p:cNvPr id="285" name="Google Shape;285;p26"/>
           <p:cNvSpPr txBox="1"/>
           <p:nvPr>
             <p:ph type="title"/>
@@ -23080,7 +24744,7 @@
       </p:sp>
       <p:sp>
         <p:nvSpPr>
-          <p:cNvPr id="270" name="Google Shape;270;p26"/>
+          <p:cNvPr id="286" name="Google Shape;286;p26"/>
           <p:cNvSpPr txBox="1"/>
           <p:nvPr>
             <p:ph idx="1" type="body"/>
@@ -23160,13 +24824,17 @@
               <a:buChar char="▪"/>
             </a:pPr>
             <a:r>
+              <a:rPr b="1" lang="en-US"/>
+              <a:t>Extremely efficient communication between processors</a:t>
+            </a:r>
+            <a:r>
               <a:rPr lang="en-US">
                 <a:latin typeface="Helvetica Neue"/>
                 <a:ea typeface="Helvetica Neue"/>
                 <a:cs typeface="Helvetica Neue"/>
                 <a:sym typeface="Helvetica Neue"/>
               </a:rPr>
-              <a:t>Extremely efficient communication between processors </a:t>
+              <a:t> </a:t>
             </a:r>
             <a:endParaRPr/>
           </a:p>
@@ -23188,7 +24856,20 @@
                 <a:cs typeface="Helvetica Neue"/>
                 <a:sym typeface="Helvetica Neue"/>
               </a:rPr>
-              <a:t>Downside: shared-memory architecture is not scalable beyond 64 to 128 processor cores</a:t>
+              <a:t>Downside: </a:t>
+            </a:r>
+            <a:r>
+              <a:rPr b="1" lang="en-US"/>
+              <a:t>shared-memory architecture is not scalable</a:t>
+            </a:r>
+            <a:r>
+              <a:rPr lang="en-US">
+                <a:latin typeface="Helvetica Neue"/>
+                <a:ea typeface="Helvetica Neue"/>
+                <a:cs typeface="Helvetica Neue"/>
+                <a:sym typeface="Helvetica Neue"/>
+              </a:rPr>
+              <a:t> beyond 64 to 128 processor cores</a:t>
             </a:r>
             <a:endParaRPr/>
           </a:p>
@@ -23240,7 +24921,7 @@
       </p:sp>
       <p:pic>
         <p:nvPicPr>
-          <p:cNvPr id="271" name="Google Shape;271;p26"/>
+          <p:cNvPr id="287" name="Google Shape;287;p26"/>
           <p:cNvPicPr preferRelativeResize="0"/>
           <p:nvPr/>
         </p:nvPicPr>
@@ -23265,378 +24946,6 @@
           </a:ln>
         </p:spPr>
       </p:pic>
-    </p:spTree>
-  </p:cSld>
-  <p:clrMapOvr>
-    <a:masterClrMapping/>
-  </p:clrMapOvr>
-</p:sld>
-</file>
-
-<file path=ppt/slides/slide28.xml><?xml version="1.0" encoding="utf-8"?>
-<p:sld xmlns:a="http://schemas.openxmlformats.org/drawingml/2006/main" xmlns:r="http://schemas.openxmlformats.org/officeDocument/2006/relationships" xmlns:mc="http://schemas.openxmlformats.org/markup-compatibility/2006" xmlns:mv="urn:schemas-microsoft-com:mac:vml" xmlns:p="http://schemas.openxmlformats.org/presentationml/2006/main" xmlns:c="http://schemas.openxmlformats.org/drawingml/2006/chart" xmlns:dgm="http://schemas.openxmlformats.org/drawingml/2006/diagram" xmlns:o="urn:schemas-microsoft-com:office:office" xmlns:v="urn:schemas-microsoft-com:vml" xmlns:pvml="urn:schemas-microsoft-com:office:powerpoint" xmlns:com="http://schemas.openxmlformats.org/drawingml/2006/compatibility" xmlns:p14="http://schemas.microsoft.com/office/powerpoint/2010/main" xmlns:p15="http://schemas.microsoft.com/office/powerpoint/2012/main" xmlns:ahyp="http://schemas.microsoft.com/office/drawing/2018/hyperlinkcolor">
-  <p:cSld>
-    <p:spTree>
-      <p:nvGrpSpPr>
-        <p:cNvPr id="275" name="Shape 275"/>
-        <p:cNvGrpSpPr/>
-        <p:nvPr/>
-      </p:nvGrpSpPr>
-      <p:grpSpPr>
-        <a:xfrm>
-          <a:off x="0" y="0"/>
-          <a:ext cx="0" cy="0"/>
-          <a:chOff x="0" y="0"/>
-          <a:chExt cx="0" cy="0"/>
-        </a:xfrm>
-      </p:grpSpPr>
-      <p:sp>
-        <p:nvSpPr>
-          <p:cNvPr id="276" name="Google Shape;276;p27"/>
-          <p:cNvSpPr txBox="1"/>
-          <p:nvPr>
-            <p:ph type="title"/>
-          </p:nvPr>
-        </p:nvSpPr>
-        <p:spPr>
-          <a:xfrm>
-            <a:off x="768350" y="117475"/>
-            <a:ext cx="7780846" cy="609600"/>
-          </a:xfrm>
-          <a:prstGeom prst="rect">
-            <a:avLst/>
-          </a:prstGeom>
-          <a:noFill/>
-          <a:ln>
-            <a:noFill/>
-          </a:ln>
-        </p:spPr>
-        <p:txBody>
-          <a:bodyPr anchorCtr="0" anchor="b" bIns="45700" lIns="91425" spcFirstLastPara="1" rIns="91425" wrap="square" tIns="45700">
-            <a:noAutofit/>
-          </a:bodyPr>
-          <a:lstStyle/>
-          <a:p>
-            <a:pPr indent="0" lvl="0" marL="0" rtl="0" algn="ctr">
-              <a:spcBef>
-                <a:spcPts val="0"/>
-              </a:spcBef>
-              <a:spcAft>
-                <a:spcPts val="0"/>
-              </a:spcAft>
-              <a:buNone/>
-            </a:pPr>
-            <a:r>
-              <a:rPr lang="en-US"/>
-              <a:t>Modern Shared Memory Architecture</a:t>
-            </a:r>
-            <a:endParaRPr/>
-          </a:p>
-        </p:txBody>
-      </p:sp>
-      <p:pic>
-        <p:nvPicPr>
-          <p:cNvPr id="277" name="Google Shape;277;p27"/>
-          <p:cNvPicPr preferRelativeResize="0"/>
-          <p:nvPr/>
-        </p:nvPicPr>
-        <p:blipFill rotWithShape="1">
-          <a:blip r:embed="rId3">
-            <a:alphaModFix/>
-          </a:blip>
-          <a:srcRect b="0" l="0" r="0" t="0"/>
-          <a:stretch/>
-        </p:blipFill>
-        <p:spPr>
-          <a:xfrm>
-            <a:off x="424551" y="1262270"/>
-            <a:ext cx="8294898" cy="4600868"/>
-          </a:xfrm>
-          <a:prstGeom prst="rect">
-            <a:avLst/>
-          </a:prstGeom>
-          <a:noFill/>
-          <a:ln>
-            <a:noFill/>
-          </a:ln>
-        </p:spPr>
-      </p:pic>
-    </p:spTree>
-  </p:cSld>
-  <p:clrMapOvr>
-    <a:masterClrMapping/>
-  </p:clrMapOvr>
-</p:sld>
-</file>
-
-<file path=ppt/slides/slide29.xml><?xml version="1.0" encoding="utf-8"?>
-<p:sld xmlns:a="http://schemas.openxmlformats.org/drawingml/2006/main" xmlns:r="http://schemas.openxmlformats.org/officeDocument/2006/relationships" xmlns:mc="http://schemas.openxmlformats.org/markup-compatibility/2006" xmlns:mv="urn:schemas-microsoft-com:mac:vml" xmlns:p="http://schemas.openxmlformats.org/presentationml/2006/main" xmlns:c="http://schemas.openxmlformats.org/drawingml/2006/chart" xmlns:dgm="http://schemas.openxmlformats.org/drawingml/2006/diagram" xmlns:o="urn:schemas-microsoft-com:office:office" xmlns:v="urn:schemas-microsoft-com:vml" xmlns:pvml="urn:schemas-microsoft-com:office:powerpoint" xmlns:com="http://schemas.openxmlformats.org/drawingml/2006/compatibility" xmlns:p14="http://schemas.microsoft.com/office/powerpoint/2010/main" xmlns:p15="http://schemas.microsoft.com/office/powerpoint/2012/main" xmlns:ahyp="http://schemas.microsoft.com/office/drawing/2018/hyperlinkcolor">
-  <p:cSld>
-    <p:spTree>
-      <p:nvGrpSpPr>
-        <p:cNvPr id="281" name="Shape 281"/>
-        <p:cNvGrpSpPr/>
-        <p:nvPr/>
-      </p:nvGrpSpPr>
-      <p:grpSpPr>
-        <a:xfrm>
-          <a:off x="0" y="0"/>
-          <a:ext cx="0" cy="0"/>
-          <a:chOff x="0" y="0"/>
-          <a:chExt cx="0" cy="0"/>
-        </a:xfrm>
-      </p:grpSpPr>
-      <p:sp>
-        <p:nvSpPr>
-          <p:cNvPr id="282" name="Google Shape;282;p28"/>
-          <p:cNvSpPr txBox="1"/>
-          <p:nvPr>
-            <p:ph type="title"/>
-          </p:nvPr>
-        </p:nvSpPr>
-        <p:spPr>
-          <a:xfrm>
-            <a:off x="768350" y="117475"/>
-            <a:ext cx="7689850" cy="609600"/>
-          </a:xfrm>
-          <a:prstGeom prst="rect">
-            <a:avLst/>
-          </a:prstGeom>
-          <a:noFill/>
-          <a:ln>
-            <a:noFill/>
-          </a:ln>
-        </p:spPr>
-        <p:txBody>
-          <a:bodyPr anchorCtr="0" anchor="b" bIns="45700" lIns="91425" spcFirstLastPara="1" rIns="91425" wrap="square" tIns="45700">
-            <a:noAutofit/>
-          </a:bodyPr>
-          <a:lstStyle/>
-          <a:p>
-            <a:pPr indent="0" lvl="0" marL="0" rtl="0" algn="ctr">
-              <a:spcBef>
-                <a:spcPts val="0"/>
-              </a:spcBef>
-              <a:spcAft>
-                <a:spcPts val="0"/>
-              </a:spcAft>
-              <a:buNone/>
-            </a:pPr>
-            <a:r>
-              <a:rPr lang="en-US"/>
-              <a:t>Cache Levels</a:t>
-            </a:r>
-            <a:endParaRPr/>
-          </a:p>
-        </p:txBody>
-      </p:sp>
-      <p:sp>
-        <p:nvSpPr>
-          <p:cNvPr id="283" name="Google Shape;283;p28"/>
-          <p:cNvSpPr txBox="1"/>
-          <p:nvPr>
-            <p:ph idx="1" type="body"/>
-          </p:nvPr>
-        </p:nvSpPr>
-        <p:spPr>
-          <a:xfrm>
-            <a:off x="665824" y="1102497"/>
-            <a:ext cx="8179725" cy="1130564"/>
-          </a:xfrm>
-          <a:prstGeom prst="rect">
-            <a:avLst/>
-          </a:prstGeom>
-          <a:noFill/>
-          <a:ln>
-            <a:noFill/>
-          </a:ln>
-        </p:spPr>
-        <p:txBody>
-          <a:bodyPr anchorCtr="0" anchor="t" bIns="45700" lIns="91425" spcFirstLastPara="1" rIns="91425" wrap="square" tIns="45700">
-            <a:noAutofit/>
-          </a:bodyPr>
-          <a:lstStyle/>
-          <a:p>
-            <a:pPr indent="-342900" lvl="0" marL="342900" rtl="0" algn="l">
-              <a:spcBef>
-                <a:spcPts val="0"/>
-              </a:spcBef>
-              <a:spcAft>
-                <a:spcPts val="0"/>
-              </a:spcAft>
-              <a:buSzPts val="1700"/>
-              <a:buChar char="▪"/>
-            </a:pPr>
-            <a:r>
-              <a:rPr lang="en-US">
-                <a:latin typeface="Helvetica Neue"/>
-                <a:ea typeface="Helvetica Neue"/>
-                <a:cs typeface="Helvetica Neue"/>
-                <a:sym typeface="Helvetica Neue"/>
-              </a:rPr>
-              <a:t>Cache line: typically 64 bytes in today’s processors</a:t>
-            </a:r>
-            <a:endParaRPr/>
-          </a:p>
-          <a:p>
-            <a:pPr indent="-342900" lvl="0" marL="342900" rtl="0" algn="l">
-              <a:spcBef>
-                <a:spcPts val="595"/>
-              </a:spcBef>
-              <a:spcAft>
-                <a:spcPts val="0"/>
-              </a:spcAft>
-              <a:buSzPts val="1700"/>
-              <a:buChar char="▪"/>
-            </a:pPr>
-            <a:r>
-              <a:rPr lang="en-US">
-                <a:latin typeface="Helvetica Neue"/>
-                <a:ea typeface="Helvetica Neue"/>
-                <a:cs typeface="Helvetica Neue"/>
-                <a:sym typeface="Helvetica Neue"/>
-              </a:rPr>
-              <a:t>Cache levels within a single multi-core processor </a:t>
-            </a:r>
-            <a:endParaRPr/>
-          </a:p>
-          <a:p>
-            <a:pPr indent="-224155" lvl="0" marL="342900" rtl="0" algn="l">
-              <a:spcBef>
-                <a:spcPts val="595"/>
-              </a:spcBef>
-              <a:spcAft>
-                <a:spcPts val="0"/>
-              </a:spcAft>
-              <a:buSzPts val="1870"/>
-              <a:buFont typeface="Noto Sans Symbols"/>
-              <a:buNone/>
-            </a:pPr>
-            <a:r>
-              <a:t/>
-            </a:r>
-            <a:endParaRPr b="1">
-              <a:solidFill>
-                <a:srgbClr val="000090"/>
-              </a:solidFill>
-              <a:latin typeface="Helvetica Neue"/>
-              <a:ea typeface="Helvetica Neue"/>
-              <a:cs typeface="Helvetica Neue"/>
-              <a:sym typeface="Helvetica Neue"/>
-            </a:endParaRPr>
-          </a:p>
-        </p:txBody>
-      </p:sp>
-      <p:pic>
-        <p:nvPicPr>
-          <p:cNvPr id="284" name="Google Shape;284;p28"/>
-          <p:cNvPicPr preferRelativeResize="0"/>
-          <p:nvPr/>
-        </p:nvPicPr>
-        <p:blipFill rotWithShape="1">
-          <a:blip r:embed="rId3">
-            <a:alphaModFix/>
-          </a:blip>
-          <a:srcRect b="0" l="0" r="0" t="0"/>
-          <a:stretch/>
-        </p:blipFill>
-        <p:spPr>
-          <a:xfrm>
-            <a:off x="2522164" y="1885770"/>
-            <a:ext cx="4099671" cy="2200689"/>
-          </a:xfrm>
-          <a:prstGeom prst="rect">
-            <a:avLst/>
-          </a:prstGeom>
-          <a:noFill/>
-          <a:ln>
-            <a:noFill/>
-          </a:ln>
-        </p:spPr>
-      </p:pic>
-      <p:sp>
-        <p:nvSpPr>
-          <p:cNvPr id="285" name="Google Shape;285;p28"/>
-          <p:cNvSpPr txBox="1"/>
-          <p:nvPr/>
-        </p:nvSpPr>
-        <p:spPr>
-          <a:xfrm>
-            <a:off x="639190" y="4175564"/>
-            <a:ext cx="7883373" cy="898751"/>
-          </a:xfrm>
-          <a:prstGeom prst="rect">
-            <a:avLst/>
-          </a:prstGeom>
-          <a:noFill/>
-          <a:ln>
-            <a:noFill/>
-          </a:ln>
-        </p:spPr>
-        <p:txBody>
-          <a:bodyPr anchorCtr="0" anchor="t" bIns="45700" lIns="91425" spcFirstLastPara="1" rIns="91425" wrap="square" tIns="45700">
-            <a:noAutofit/>
-          </a:bodyPr>
-          <a:lstStyle/>
-          <a:p>
-            <a:pPr indent="-342900" lvl="0" marL="342900" marR="0" rtl="0" algn="l">
-              <a:spcBef>
-                <a:spcPts val="0"/>
-              </a:spcBef>
-              <a:spcAft>
-                <a:spcPts val="0"/>
-              </a:spcAft>
-              <a:buClr>
-                <a:srgbClr val="002060"/>
-              </a:buClr>
-              <a:buSzPts val="1700"/>
-              <a:buFont typeface="Noto Sans Symbols"/>
-              <a:buChar char="▪"/>
-            </a:pPr>
-            <a:r>
-              <a:rPr lang="en-US" sz="1700">
-                <a:solidFill>
-                  <a:schemeClr val="dk1"/>
-                </a:solidFill>
-                <a:latin typeface="Helvetica Neue"/>
-                <a:ea typeface="Helvetica Neue"/>
-                <a:cs typeface="Helvetica Neue"/>
-                <a:sym typeface="Helvetica Neue"/>
-              </a:rPr>
-              <a:t>Shared memory system can have multiple processors, each with its own cache levels</a:t>
-            </a:r>
-            <a:endParaRPr/>
-          </a:p>
-          <a:p>
-            <a:pPr indent="-224155" lvl="0" marL="342900" marR="0" rtl="0" algn="l">
-              <a:spcBef>
-                <a:spcPts val="595"/>
-              </a:spcBef>
-              <a:spcAft>
-                <a:spcPts val="0"/>
-              </a:spcAft>
-              <a:buClr>
-                <a:srgbClr val="002060"/>
-              </a:buClr>
-              <a:buSzPts val="1870"/>
-              <a:buFont typeface="Noto Sans Symbols"/>
-              <a:buNone/>
-            </a:pPr>
-            <a:r>
-              <a:t/>
-            </a:r>
-            <a:endParaRPr b="1" sz="1700">
-              <a:solidFill>
-                <a:srgbClr val="000090"/>
-              </a:solidFill>
-              <a:latin typeface="Helvetica Neue"/>
-              <a:ea typeface="Helvetica Neue"/>
-              <a:cs typeface="Helvetica Neue"/>
-              <a:sym typeface="Helvetica Neue"/>
-            </a:endParaRPr>
-          </a:p>
-        </p:txBody>
-      </p:sp>
     </p:spTree>
   </p:cSld>
   <p:clrMapOvr>
@@ -24029,7 +25338,7 @@
             <a:tbl>
               <a:tblPr>
                 <a:noFill/>
-                <a:tableStyleId>{A5D2CE7A-2A93-4DE8-8A17-3023A040CCB9}</a:tableStyleId>
+                <a:tableStyleId>{BD476FE4-6D62-4051-835A-60A6AF85B0F3}</a:tableStyleId>
               </a:tblPr>
               <a:tblGrid>
                 <a:gridCol w="3203850"/>
@@ -24418,7 +25727,7 @@
   <p:cSld>
     <p:spTree>
       <p:nvGrpSpPr>
-        <p:cNvPr id="289" name="Shape 289"/>
+        <p:cNvPr id="291" name="Shape 291"/>
         <p:cNvGrpSpPr/>
         <p:nvPr/>
       </p:nvGrpSpPr>
@@ -24432,7 +25741,276 @@
       </p:grpSpPr>
       <p:sp>
         <p:nvSpPr>
-          <p:cNvPr id="290" name="Google Shape;290;p29"/>
+          <p:cNvPr id="292" name="Google Shape;292;p27"/>
+          <p:cNvSpPr txBox="1"/>
+          <p:nvPr>
+            <p:ph type="title"/>
+          </p:nvPr>
+        </p:nvSpPr>
+        <p:spPr>
+          <a:xfrm>
+            <a:off x="768350" y="117475"/>
+            <a:ext cx="7780846" cy="609600"/>
+          </a:xfrm>
+          <a:prstGeom prst="rect">
+            <a:avLst/>
+          </a:prstGeom>
+          <a:noFill/>
+          <a:ln>
+            <a:noFill/>
+          </a:ln>
+        </p:spPr>
+        <p:txBody>
+          <a:bodyPr anchorCtr="0" anchor="b" bIns="45700" lIns="91425" spcFirstLastPara="1" rIns="91425" wrap="square" tIns="45700">
+            <a:noAutofit/>
+          </a:bodyPr>
+          <a:lstStyle/>
+          <a:p>
+            <a:pPr indent="0" lvl="0" marL="0" rtl="0" algn="ctr">
+              <a:spcBef>
+                <a:spcPts val="0"/>
+              </a:spcBef>
+              <a:spcAft>
+                <a:spcPts val="0"/>
+              </a:spcAft>
+              <a:buNone/>
+            </a:pPr>
+            <a:r>
+              <a:rPr lang="en-US"/>
+              <a:t>Modern Shared Memory Architecture</a:t>
+            </a:r>
+            <a:endParaRPr/>
+          </a:p>
+        </p:txBody>
+      </p:sp>
+      <p:pic>
+        <p:nvPicPr>
+          <p:cNvPr id="293" name="Google Shape;293;p27"/>
+          <p:cNvPicPr preferRelativeResize="0"/>
+          <p:nvPr/>
+        </p:nvPicPr>
+        <p:blipFill rotWithShape="1">
+          <a:blip r:embed="rId3">
+            <a:alphaModFix/>
+          </a:blip>
+          <a:srcRect b="0" l="0" r="0" t="0"/>
+          <a:stretch/>
+        </p:blipFill>
+        <p:spPr>
+          <a:xfrm>
+            <a:off x="424551" y="1262270"/>
+            <a:ext cx="8294898" cy="4600868"/>
+          </a:xfrm>
+          <a:prstGeom prst="rect">
+            <a:avLst/>
+          </a:prstGeom>
+          <a:noFill/>
+          <a:ln>
+            <a:noFill/>
+          </a:ln>
+        </p:spPr>
+      </p:pic>
+      <p:sp>
+        <p:nvSpPr>
+          <p:cNvPr id="294" name="Google Shape;294;p27"/>
+          <p:cNvSpPr/>
+          <p:nvPr/>
+        </p:nvSpPr>
+        <p:spPr>
+          <a:xfrm>
+            <a:off x="118250" y="2125050"/>
+            <a:ext cx="4204200" cy="1593000"/>
+          </a:xfrm>
+          <a:prstGeom prst="roundRect">
+            <a:avLst>
+              <a:gd fmla="val 16667" name="adj"/>
+            </a:avLst>
+          </a:prstGeom>
+          <a:noFill/>
+          <a:ln cap="flat" cmpd="sng" w="9525">
+            <a:solidFill>
+              <a:schemeClr val="dk2"/>
+            </a:solidFill>
+            <a:prstDash val="solid"/>
+            <a:round/>
+            <a:headEnd len="sm" w="sm" type="none"/>
+            <a:tailEnd len="sm" w="sm" type="none"/>
+          </a:ln>
+        </p:spPr>
+        <p:txBody>
+          <a:bodyPr anchorCtr="0" anchor="ctr" bIns="91425" lIns="91425" spcFirstLastPara="1" rIns="91425" wrap="square" tIns="91425">
+            <a:noAutofit/>
+          </a:bodyPr>
+          <a:lstStyle/>
+          <a:p>
+            <a:pPr indent="0" lvl="0" marL="0" rtl="0" algn="ctr">
+              <a:spcBef>
+                <a:spcPts val="0"/>
+              </a:spcBef>
+              <a:spcAft>
+                <a:spcPts val="0"/>
+              </a:spcAft>
+              <a:buNone/>
+            </a:pPr>
+            <a:r>
+              <a:t/>
+            </a:r>
+            <a:endParaRPr>
+              <a:solidFill>
+                <a:srgbClr val="FFFFFF"/>
+              </a:solidFill>
+              <a:latin typeface="Helvetica Neue"/>
+              <a:ea typeface="Helvetica Neue"/>
+              <a:cs typeface="Helvetica Neue"/>
+              <a:sym typeface="Helvetica Neue"/>
+            </a:endParaRPr>
+          </a:p>
+        </p:txBody>
+      </p:sp>
+      <p:sp>
+        <p:nvSpPr>
+          <p:cNvPr id="295" name="Google Shape;295;p27"/>
+          <p:cNvSpPr txBox="1"/>
+          <p:nvPr/>
+        </p:nvSpPr>
+        <p:spPr>
+          <a:xfrm>
+            <a:off x="446700" y="1517425"/>
+            <a:ext cx="2906700" cy="459900"/>
+          </a:xfrm>
+          <a:prstGeom prst="rect">
+            <a:avLst/>
+          </a:prstGeom>
+          <a:noFill/>
+          <a:ln>
+            <a:noFill/>
+          </a:ln>
+        </p:spPr>
+        <p:txBody>
+          <a:bodyPr anchorCtr="0" anchor="t" bIns="91425" lIns="91425" spcFirstLastPara="1" rIns="91425" wrap="square" tIns="91425">
+            <a:noAutofit/>
+          </a:bodyPr>
+          <a:lstStyle/>
+          <a:p>
+            <a:pPr indent="0" lvl="0" marL="0" rtl="0" algn="l">
+              <a:spcBef>
+                <a:spcPts val="0"/>
+              </a:spcBef>
+              <a:spcAft>
+                <a:spcPts val="0"/>
+              </a:spcAft>
+              <a:buNone/>
+            </a:pPr>
+            <a:r>
+              <a:rPr lang="en-US" sz="1700">
+                <a:solidFill>
+                  <a:schemeClr val="dk1"/>
+                </a:solidFill>
+                <a:latin typeface="Helvetica Neue"/>
+                <a:ea typeface="Helvetica Neue"/>
+                <a:cs typeface="Helvetica Neue"/>
+                <a:sym typeface="Helvetica Neue"/>
+              </a:rPr>
+              <a:t>Own local memory</a:t>
+            </a:r>
+            <a:endParaRPr sz="1700">
+              <a:solidFill>
+                <a:schemeClr val="dk1"/>
+              </a:solidFill>
+              <a:latin typeface="Helvetica Neue"/>
+              <a:ea typeface="Helvetica Neue"/>
+              <a:cs typeface="Helvetica Neue"/>
+              <a:sym typeface="Helvetica Neue"/>
+            </a:endParaRPr>
+          </a:p>
+        </p:txBody>
+      </p:sp>
+      <p:sp>
+        <p:nvSpPr>
+          <p:cNvPr id="296" name="Google Shape;296;p27"/>
+          <p:cNvSpPr txBox="1"/>
+          <p:nvPr/>
+        </p:nvSpPr>
+        <p:spPr>
+          <a:xfrm>
+            <a:off x="118250" y="4987150"/>
+            <a:ext cx="3547200" cy="459900"/>
+          </a:xfrm>
+          <a:prstGeom prst="rect">
+            <a:avLst/>
+          </a:prstGeom>
+          <a:noFill/>
+          <a:ln>
+            <a:noFill/>
+          </a:ln>
+        </p:spPr>
+        <p:txBody>
+          <a:bodyPr anchorCtr="0" anchor="t" bIns="91425" lIns="91425" spcFirstLastPara="1" rIns="91425" wrap="square" tIns="91425">
+            <a:noAutofit/>
+          </a:bodyPr>
+          <a:lstStyle/>
+          <a:p>
+            <a:pPr indent="0" lvl="0" marL="0" rtl="0" algn="l">
+              <a:spcBef>
+                <a:spcPts val="0"/>
+              </a:spcBef>
+              <a:spcAft>
+                <a:spcPts val="0"/>
+              </a:spcAft>
+              <a:buNone/>
+            </a:pPr>
+            <a:r>
+              <a:rPr lang="en-US" sz="1700">
+                <a:solidFill>
+                  <a:schemeClr val="dk1"/>
+                </a:solidFill>
+                <a:latin typeface="Helvetica Neue"/>
+                <a:ea typeface="Helvetica Neue"/>
+                <a:cs typeface="Helvetica Neue"/>
+                <a:sym typeface="Helvetica Neue"/>
+              </a:rPr>
+              <a:t>However, through X or interconnection any processor can share other’s memory</a:t>
+            </a:r>
+            <a:endParaRPr sz="1700">
+              <a:solidFill>
+                <a:schemeClr val="dk1"/>
+              </a:solidFill>
+              <a:latin typeface="Helvetica Neue"/>
+              <a:ea typeface="Helvetica Neue"/>
+              <a:cs typeface="Helvetica Neue"/>
+              <a:sym typeface="Helvetica Neue"/>
+            </a:endParaRPr>
+          </a:p>
+        </p:txBody>
+      </p:sp>
+    </p:spTree>
+  </p:cSld>
+  <p:clrMapOvr>
+    <a:masterClrMapping/>
+  </p:clrMapOvr>
+</p:sld>
+</file>
+
+<file path=ppt/slides/slide31.xml><?xml version="1.0" encoding="utf-8"?>
+<p:sld xmlns:a="http://schemas.openxmlformats.org/drawingml/2006/main" xmlns:r="http://schemas.openxmlformats.org/officeDocument/2006/relationships" xmlns:mc="http://schemas.openxmlformats.org/markup-compatibility/2006" xmlns:mv="urn:schemas-microsoft-com:mac:vml" xmlns:p="http://schemas.openxmlformats.org/presentationml/2006/main" xmlns:c="http://schemas.openxmlformats.org/drawingml/2006/chart" xmlns:dgm="http://schemas.openxmlformats.org/drawingml/2006/diagram" xmlns:o="urn:schemas-microsoft-com:office:office" xmlns:v="urn:schemas-microsoft-com:vml" xmlns:pvml="urn:schemas-microsoft-com:office:powerpoint" xmlns:com="http://schemas.openxmlformats.org/drawingml/2006/compatibility" xmlns:p14="http://schemas.microsoft.com/office/powerpoint/2010/main" xmlns:p15="http://schemas.microsoft.com/office/powerpoint/2012/main" xmlns:ahyp="http://schemas.microsoft.com/office/drawing/2018/hyperlinkcolor">
+  <p:cSld>
+    <p:spTree>
+      <p:nvGrpSpPr>
+        <p:cNvPr id="300" name="Shape 300"/>
+        <p:cNvGrpSpPr/>
+        <p:nvPr/>
+      </p:nvGrpSpPr>
+      <p:grpSpPr>
+        <a:xfrm>
+          <a:off x="0" y="0"/>
+          <a:ext cx="0" cy="0"/>
+          <a:chOff x="0" y="0"/>
+          <a:chExt cx="0" cy="0"/>
+        </a:xfrm>
+      </p:grpSpPr>
+      <p:sp>
+        <p:nvSpPr>
+          <p:cNvPr id="301" name="Google Shape;301;p28"/>
           <p:cNvSpPr txBox="1"/>
           <p:nvPr>
             <p:ph type="title"/>
@@ -24468,7 +26046,7 @@
             </a:pPr>
             <a:r>
               <a:rPr lang="en-US"/>
-              <a:t>Cache Coherency</a:t>
+              <a:t>Cache Levels</a:t>
             </a:r>
             <a:endParaRPr/>
           </a:p>
@@ -24476,7 +26054,287 @@
       </p:sp>
       <p:sp>
         <p:nvSpPr>
-          <p:cNvPr id="291" name="Google Shape;291;p29"/>
+          <p:cNvPr id="302" name="Google Shape;302;p28"/>
+          <p:cNvSpPr txBox="1"/>
+          <p:nvPr>
+            <p:ph idx="1" type="body"/>
+          </p:nvPr>
+        </p:nvSpPr>
+        <p:spPr>
+          <a:xfrm>
+            <a:off x="665824" y="1102497"/>
+            <a:ext cx="8179725" cy="1130564"/>
+          </a:xfrm>
+          <a:prstGeom prst="rect">
+            <a:avLst/>
+          </a:prstGeom>
+          <a:noFill/>
+          <a:ln>
+            <a:noFill/>
+          </a:ln>
+        </p:spPr>
+        <p:txBody>
+          <a:bodyPr anchorCtr="0" anchor="t" bIns="45700" lIns="91425" spcFirstLastPara="1" rIns="91425" wrap="square" tIns="45700">
+            <a:noAutofit/>
+          </a:bodyPr>
+          <a:lstStyle/>
+          <a:p>
+            <a:pPr indent="-342900" lvl="0" marL="342900" rtl="0" algn="l">
+              <a:spcBef>
+                <a:spcPts val="0"/>
+              </a:spcBef>
+              <a:spcAft>
+                <a:spcPts val="0"/>
+              </a:spcAft>
+              <a:buSzPts val="1700"/>
+              <a:buChar char="▪"/>
+            </a:pPr>
+            <a:r>
+              <a:rPr lang="en-US">
+                <a:latin typeface="Helvetica Neue"/>
+                <a:ea typeface="Helvetica Neue"/>
+                <a:cs typeface="Helvetica Neue"/>
+                <a:sym typeface="Helvetica Neue"/>
+              </a:rPr>
+              <a:t>Cache line: typically 64 bytes in today’s processors, the smallest unit </a:t>
+            </a:r>
+            <a:r>
+              <a:rPr lang="en-US"/>
+              <a:t>of data which i s transferred between RAM (main memory) and CPU caches</a:t>
+            </a:r>
+            <a:endParaRPr/>
+          </a:p>
+          <a:p>
+            <a:pPr indent="-342900" lvl="0" marL="342900" rtl="0" algn="l">
+              <a:spcBef>
+                <a:spcPts val="595"/>
+              </a:spcBef>
+              <a:spcAft>
+                <a:spcPts val="0"/>
+              </a:spcAft>
+              <a:buSzPts val="1700"/>
+              <a:buChar char="▪"/>
+            </a:pPr>
+            <a:r>
+              <a:rPr lang="en-US">
+                <a:latin typeface="Helvetica Neue"/>
+                <a:ea typeface="Helvetica Neue"/>
+                <a:cs typeface="Helvetica Neue"/>
+                <a:sym typeface="Helvetica Neue"/>
+              </a:rPr>
+              <a:t>Cache levels within a single multi-core processor </a:t>
+            </a:r>
+            <a:endParaRPr/>
+          </a:p>
+          <a:p>
+            <a:pPr indent="-224155" lvl="0" marL="342900" rtl="0" algn="l">
+              <a:spcBef>
+                <a:spcPts val="595"/>
+              </a:spcBef>
+              <a:spcAft>
+                <a:spcPts val="0"/>
+              </a:spcAft>
+              <a:buSzPts val="1870"/>
+              <a:buFont typeface="Noto Sans Symbols"/>
+              <a:buNone/>
+            </a:pPr>
+            <a:r>
+              <a:t/>
+            </a:r>
+            <a:endParaRPr b="1">
+              <a:solidFill>
+                <a:srgbClr val="000090"/>
+              </a:solidFill>
+              <a:latin typeface="Helvetica Neue"/>
+              <a:ea typeface="Helvetica Neue"/>
+              <a:cs typeface="Helvetica Neue"/>
+              <a:sym typeface="Helvetica Neue"/>
+            </a:endParaRPr>
+          </a:p>
+        </p:txBody>
+      </p:sp>
+      <p:pic>
+        <p:nvPicPr>
+          <p:cNvPr id="303" name="Google Shape;303;p28"/>
+          <p:cNvPicPr preferRelativeResize="0"/>
+          <p:nvPr/>
+        </p:nvPicPr>
+        <p:blipFill rotWithShape="1">
+          <a:blip r:embed="rId3">
+            <a:alphaModFix/>
+          </a:blip>
+          <a:srcRect b="0" l="0" r="0" t="0"/>
+          <a:stretch/>
+        </p:blipFill>
+        <p:spPr>
+          <a:xfrm>
+            <a:off x="2522164" y="2233045"/>
+            <a:ext cx="4099670" cy="2200689"/>
+          </a:xfrm>
+          <a:prstGeom prst="rect">
+            <a:avLst/>
+          </a:prstGeom>
+          <a:noFill/>
+          <a:ln>
+            <a:noFill/>
+          </a:ln>
+        </p:spPr>
+      </p:pic>
+      <p:sp>
+        <p:nvSpPr>
+          <p:cNvPr id="304" name="Google Shape;304;p28"/>
+          <p:cNvSpPr txBox="1"/>
+          <p:nvPr/>
+        </p:nvSpPr>
+        <p:spPr>
+          <a:xfrm>
+            <a:off x="639190" y="4785164"/>
+            <a:ext cx="7883400" cy="898800"/>
+          </a:xfrm>
+          <a:prstGeom prst="rect">
+            <a:avLst/>
+          </a:prstGeom>
+          <a:noFill/>
+          <a:ln>
+            <a:noFill/>
+          </a:ln>
+        </p:spPr>
+        <p:txBody>
+          <a:bodyPr anchorCtr="0" anchor="t" bIns="45700" lIns="91425" spcFirstLastPara="1" rIns="91425" wrap="square" tIns="45700">
+            <a:noAutofit/>
+          </a:bodyPr>
+          <a:lstStyle/>
+          <a:p>
+            <a:pPr indent="-342900" lvl="0" marL="342900" marR="0" rtl="0" algn="l">
+              <a:spcBef>
+                <a:spcPts val="0"/>
+              </a:spcBef>
+              <a:spcAft>
+                <a:spcPts val="0"/>
+              </a:spcAft>
+              <a:buClr>
+                <a:srgbClr val="002060"/>
+              </a:buClr>
+              <a:buSzPts val="1700"/>
+              <a:buFont typeface="Noto Sans Symbols"/>
+              <a:buChar char="▪"/>
+            </a:pPr>
+            <a:r>
+              <a:rPr lang="en-US" sz="1700">
+                <a:solidFill>
+                  <a:schemeClr val="dk1"/>
+                </a:solidFill>
+                <a:latin typeface="Helvetica Neue"/>
+                <a:ea typeface="Helvetica Neue"/>
+                <a:cs typeface="Helvetica Neue"/>
+                <a:sym typeface="Helvetica Neue"/>
+              </a:rPr>
+              <a:t>Shared memory system can have multiple processors, each with its own cache levels</a:t>
+            </a:r>
+            <a:endParaRPr/>
+          </a:p>
+          <a:p>
+            <a:pPr indent="-224155" lvl="0" marL="342900" marR="0" rtl="0" algn="l">
+              <a:spcBef>
+                <a:spcPts val="595"/>
+              </a:spcBef>
+              <a:spcAft>
+                <a:spcPts val="0"/>
+              </a:spcAft>
+              <a:buClr>
+                <a:srgbClr val="002060"/>
+              </a:buClr>
+              <a:buSzPts val="1870"/>
+              <a:buFont typeface="Noto Sans Symbols"/>
+              <a:buNone/>
+            </a:pPr>
+            <a:r>
+              <a:t/>
+            </a:r>
+            <a:endParaRPr b="1" sz="1700">
+              <a:solidFill>
+                <a:srgbClr val="000090"/>
+              </a:solidFill>
+              <a:latin typeface="Helvetica Neue"/>
+              <a:ea typeface="Helvetica Neue"/>
+              <a:cs typeface="Helvetica Neue"/>
+              <a:sym typeface="Helvetica Neue"/>
+            </a:endParaRPr>
+          </a:p>
+        </p:txBody>
+      </p:sp>
+    </p:spTree>
+  </p:cSld>
+  <p:clrMapOvr>
+    <a:masterClrMapping/>
+  </p:clrMapOvr>
+</p:sld>
+</file>
+
+<file path=ppt/slides/slide32.xml><?xml version="1.0" encoding="utf-8"?>
+<p:sld xmlns:a="http://schemas.openxmlformats.org/drawingml/2006/main" xmlns:r="http://schemas.openxmlformats.org/officeDocument/2006/relationships" xmlns:mc="http://schemas.openxmlformats.org/markup-compatibility/2006" xmlns:mv="urn:schemas-microsoft-com:mac:vml" xmlns:p="http://schemas.openxmlformats.org/presentationml/2006/main" xmlns:c="http://schemas.openxmlformats.org/drawingml/2006/chart" xmlns:dgm="http://schemas.openxmlformats.org/drawingml/2006/diagram" xmlns:o="urn:schemas-microsoft-com:office:office" xmlns:v="urn:schemas-microsoft-com:vml" xmlns:pvml="urn:schemas-microsoft-com:office:powerpoint" xmlns:com="http://schemas.openxmlformats.org/drawingml/2006/compatibility" xmlns:p14="http://schemas.microsoft.com/office/powerpoint/2010/main" xmlns:p15="http://schemas.microsoft.com/office/powerpoint/2012/main" xmlns:ahyp="http://schemas.microsoft.com/office/drawing/2018/hyperlinkcolor">
+  <p:cSld>
+    <p:spTree>
+      <p:nvGrpSpPr>
+        <p:cNvPr id="308" name="Shape 308"/>
+        <p:cNvGrpSpPr/>
+        <p:nvPr/>
+      </p:nvGrpSpPr>
+      <p:grpSpPr>
+        <a:xfrm>
+          <a:off x="0" y="0"/>
+          <a:ext cx="0" cy="0"/>
+          <a:chOff x="0" y="0"/>
+          <a:chExt cx="0" cy="0"/>
+        </a:xfrm>
+      </p:grpSpPr>
+      <p:sp>
+        <p:nvSpPr>
+          <p:cNvPr id="309" name="Google Shape;309;p29"/>
+          <p:cNvSpPr txBox="1"/>
+          <p:nvPr>
+            <p:ph type="title"/>
+          </p:nvPr>
+        </p:nvSpPr>
+        <p:spPr>
+          <a:xfrm>
+            <a:off x="768350" y="117475"/>
+            <a:ext cx="7689850" cy="609600"/>
+          </a:xfrm>
+          <a:prstGeom prst="rect">
+            <a:avLst/>
+          </a:prstGeom>
+          <a:noFill/>
+          <a:ln>
+            <a:noFill/>
+          </a:ln>
+        </p:spPr>
+        <p:txBody>
+          <a:bodyPr anchorCtr="0" anchor="b" bIns="45700" lIns="91425" spcFirstLastPara="1" rIns="91425" wrap="square" tIns="45700">
+            <a:noAutofit/>
+          </a:bodyPr>
+          <a:lstStyle/>
+          <a:p>
+            <a:pPr indent="0" lvl="0" marL="0" rtl="0" algn="ctr">
+              <a:spcBef>
+                <a:spcPts val="0"/>
+              </a:spcBef>
+              <a:spcAft>
+                <a:spcPts val="0"/>
+              </a:spcAft>
+              <a:buNone/>
+            </a:pPr>
+            <a:r>
+              <a:rPr lang="en-US"/>
+              <a:t>Cache Coherency</a:t>
+            </a:r>
+            <a:endParaRPr/>
+          </a:p>
+        </p:txBody>
+      </p:sp>
+      <p:sp>
+        <p:nvSpPr>
+          <p:cNvPr id="310" name="Google Shape;310;p29"/>
           <p:cNvSpPr txBox="1"/>
           <p:nvPr>
             <p:ph idx="1" type="body"/>
@@ -24540,9 +26398,13 @@
                 <a:cs typeface="Helvetica Neue"/>
                 <a:sym typeface="Helvetica Neue"/>
               </a:rPr>
-              <a:t>Local cache may have out of date value</a:t>
-            </a:r>
-            <a:endParaRPr/>
+              <a:t>Local cache </a:t>
+            </a:r>
+            <a:r>
+              <a:rPr b="1" lang="en-US"/>
+              <a:t>may have out of date value</a:t>
+            </a:r>
+            <a:endParaRPr b="1"/>
           </a:p>
           <a:p>
             <a:pPr indent="-285750" lvl="1" marL="742950" rtl="0" algn="l">
@@ -24556,13 +26418,30 @@
               <a:buChar char="•"/>
             </a:pPr>
             <a:r>
+              <a:rPr b="1" lang="en-US"/>
+              <a:t>Strong </a:t>
+            </a:r>
+            <a:r>
               <a:rPr lang="en-US">
                 <a:latin typeface="Helvetica Neue"/>
                 <a:ea typeface="Helvetica Neue"/>
                 <a:cs typeface="Helvetica Neue"/>
                 <a:sym typeface="Helvetica Neue"/>
               </a:rPr>
-              <a:t>Strong vs weak consistency models</a:t>
+              <a:t>vs </a:t>
+            </a:r>
+            <a:r>
+              <a:rPr b="1" lang="en-US"/>
+              <a:t>weak </a:t>
+            </a:r>
+            <a:r>
+              <a:rPr lang="en-US">
+                <a:latin typeface="Helvetica Neue"/>
+                <a:ea typeface="Helvetica Neue"/>
+                <a:cs typeface="Helvetica Neue"/>
+                <a:sym typeface="Helvetica Neue"/>
+              </a:rPr>
+              <a:t>consistency models</a:t>
             </a:r>
             <a:endParaRPr/>
           </a:p>
@@ -24654,9 +26533,101 @@
                 <a:cs typeface="Helvetica Neue"/>
                 <a:sym typeface="Helvetica Neue"/>
               </a:rPr>
-              <a:t>Instruction returns after forcing cached data to be written to memory and invalidations sent to all caches</a:t>
-            </a:r>
-            <a:endParaRPr/>
+              <a:t>Instruction returns after forcing cached data to be written to memory and invalidations sent to all caches. </a:t>
+            </a:r>
+            <a:r>
+              <a:rPr lang="en-US" sz="1100">
+                <a:latin typeface="Courier New"/>
+                <a:ea typeface="Courier New"/>
+                <a:cs typeface="Courier New"/>
+                <a:sym typeface="Courier New"/>
+              </a:rPr>
+              <a:t>An </a:t>
+            </a:r>
+            <a:r>
+              <a:rPr lang="en-US" sz="1100">
+                <a:solidFill>
+                  <a:srgbClr val="188038"/>
+                </a:solidFill>
+                <a:latin typeface="Courier New"/>
+                <a:ea typeface="Courier New"/>
+                <a:cs typeface="Courier New"/>
+                <a:sym typeface="Courier New"/>
+              </a:rPr>
+              <a:t>sfence</a:t>
+            </a:r>
+            <a:r>
+              <a:rPr lang="en-US" sz="1100">
+                <a:latin typeface="Courier New"/>
+                <a:ea typeface="Courier New"/>
+                <a:cs typeface="Courier New"/>
+                <a:sym typeface="Courier New"/>
+              </a:rPr>
+              <a:t> instruction ensures that all </a:t>
+            </a:r>
+            <a:r>
+              <a:rPr b="1" lang="en-US" sz="1100">
+                <a:latin typeface="Courier New"/>
+                <a:ea typeface="Courier New"/>
+                <a:cs typeface="Courier New"/>
+                <a:sym typeface="Courier New"/>
+              </a:rPr>
+              <a:t>write (store)</a:t>
+            </a:r>
+            <a:r>
+              <a:rPr lang="en-US" sz="1100">
+                <a:latin typeface="Courier New"/>
+                <a:ea typeface="Courier New"/>
+                <a:cs typeface="Courier New"/>
+                <a:sym typeface="Courier New"/>
+              </a:rPr>
+              <a:t> operations initiated </a:t>
+            </a:r>
+            <a:r>
+              <a:rPr i="1" lang="en-US" sz="1100">
+                <a:latin typeface="Courier New"/>
+                <a:ea typeface="Courier New"/>
+                <a:cs typeface="Courier New"/>
+                <a:sym typeface="Courier New"/>
+              </a:rPr>
+              <a:t>before</a:t>
+            </a:r>
+            <a:r>
+              <a:rPr lang="en-US" sz="1100">
+                <a:latin typeface="Courier New"/>
+                <a:ea typeface="Courier New"/>
+                <a:cs typeface="Courier New"/>
+                <a:sym typeface="Courier New"/>
+              </a:rPr>
+              <a:t> the </a:t>
+            </a:r>
+            <a:r>
+              <a:rPr lang="en-US" sz="1100">
+                <a:solidFill>
+                  <a:srgbClr val="188038"/>
+                </a:solidFill>
+                <a:latin typeface="Courier New"/>
+                <a:ea typeface="Courier New"/>
+                <a:cs typeface="Courier New"/>
+                <a:sym typeface="Courier New"/>
+              </a:rPr>
+              <a:t>sfence</a:t>
+            </a:r>
+            <a:r>
+              <a:rPr lang="en-US" sz="1100">
+                <a:latin typeface="Courier New"/>
+                <a:ea typeface="Courier New"/>
+                <a:cs typeface="Courier New"/>
+                <a:sym typeface="Courier New"/>
+              </a:rPr>
+              <a:t> instruction are completed and made globally visible </a:t>
+            </a:r>
+            <a:endParaRPr sz="1100">
+              <a:latin typeface="Courier New"/>
+              <a:ea typeface="Courier New"/>
+              <a:cs typeface="Courier New"/>
+              <a:sym typeface="Courier New"/>
+            </a:endParaRPr>
           </a:p>
           <a:p>
             <a:pPr indent="-285750" lvl="1" marL="742950" rtl="0" algn="l">
@@ -24701,7 +26672,151 @@
                 <a:cs typeface="Helvetica Neue"/>
                 <a:sym typeface="Helvetica Neue"/>
               </a:rPr>
-              <a:t>Returns after ensuring all pending cache invalidations are processed</a:t>
+              <a:t>Returns after ensuring all pending cache invalidations are processed. </a:t>
+            </a:r>
+            <a:r>
+              <a:rPr lang="en-US" sz="1100">
+                <a:latin typeface="Arial"/>
+                <a:ea typeface="Arial"/>
+                <a:cs typeface="Arial"/>
+                <a:sym typeface="Arial"/>
+              </a:rPr>
+              <a:t> An </a:t>
+            </a:r>
+            <a:r>
+              <a:rPr lang="en-US" sz="1100">
+                <a:solidFill>
+                  <a:srgbClr val="188038"/>
+                </a:solidFill>
+                <a:latin typeface="Roboto Mono"/>
+                <a:ea typeface="Roboto Mono"/>
+                <a:cs typeface="Roboto Mono"/>
+                <a:sym typeface="Roboto Mono"/>
+              </a:rPr>
+              <a:t>lfence</a:t>
+            </a:r>
+            <a:r>
+              <a:rPr lang="en-US" sz="1100">
+                <a:latin typeface="Arial"/>
+                <a:ea typeface="Arial"/>
+                <a:cs typeface="Arial"/>
+                <a:sym typeface="Arial"/>
+              </a:rPr>
+              <a:t> instruction ensures that all </a:t>
+            </a:r>
+            <a:r>
+              <a:rPr b="1" lang="en-US" sz="1100">
+                <a:latin typeface="Arial"/>
+                <a:ea typeface="Arial"/>
+                <a:cs typeface="Arial"/>
+                <a:sym typeface="Arial"/>
+              </a:rPr>
+              <a:t>read (load)</a:t>
+            </a:r>
+            <a:r>
+              <a:rPr lang="en-US" sz="1100">
+                <a:latin typeface="Arial"/>
+                <a:ea typeface="Arial"/>
+                <a:cs typeface="Arial"/>
+                <a:sym typeface="Arial"/>
+              </a:rPr>
+              <a:t> operations initiated </a:t>
+            </a:r>
+            <a:r>
+              <a:rPr i="1" lang="en-US" sz="1100">
+                <a:latin typeface="Arial"/>
+                <a:ea typeface="Arial"/>
+                <a:cs typeface="Arial"/>
+                <a:sym typeface="Arial"/>
+              </a:rPr>
+              <a:t>before</a:t>
+            </a:r>
+            <a:r>
+              <a:rPr lang="en-US" sz="1100">
+                <a:latin typeface="Arial"/>
+                <a:ea typeface="Arial"/>
+                <a:cs typeface="Arial"/>
+                <a:sym typeface="Arial"/>
+              </a:rPr>
+              <a:t> the </a:t>
+            </a:r>
+            <a:r>
+              <a:rPr lang="en-US" sz="1100">
+                <a:solidFill>
+                  <a:srgbClr val="188038"/>
+                </a:solidFill>
+                <a:latin typeface="Roboto Mono"/>
+                <a:ea typeface="Roboto Mono"/>
+                <a:cs typeface="Roboto Mono"/>
+                <a:sym typeface="Roboto Mono"/>
+              </a:rPr>
+              <a:t>lfence</a:t>
+            </a:r>
+            <a:r>
+              <a:rPr lang="en-US" sz="1100">
+                <a:latin typeface="Arial"/>
+                <a:ea typeface="Arial"/>
+                <a:cs typeface="Arial"/>
+                <a:sym typeface="Arial"/>
+              </a:rPr>
+              <a:t> instruction are completed </a:t>
+            </a:r>
+            <a:r>
+              <a:rPr i="1" lang="en-US" sz="1100">
+                <a:latin typeface="Arial"/>
+                <a:ea typeface="Arial"/>
+                <a:cs typeface="Arial"/>
+                <a:sym typeface="Arial"/>
+              </a:rPr>
+              <a:t>before</a:t>
+            </a:r>
+            <a:r>
+              <a:rPr lang="en-US" sz="1100">
+                <a:latin typeface="Arial"/>
+                <a:ea typeface="Arial"/>
+                <a:cs typeface="Arial"/>
+                <a:sym typeface="Arial"/>
+              </a:rPr>
+              <a:t> any read operations initiated </a:t>
+            </a:r>
+            <a:r>
+              <a:rPr i="1" lang="en-US" sz="1100">
+                <a:latin typeface="Arial"/>
+                <a:ea typeface="Arial"/>
+                <a:cs typeface="Arial"/>
+                <a:sym typeface="Arial"/>
+              </a:rPr>
+              <a:t>after</a:t>
+            </a:r>
+            <a:r>
+              <a:rPr lang="en-US" sz="1100">
+                <a:latin typeface="Arial"/>
+                <a:ea typeface="Arial"/>
+                <a:cs typeface="Arial"/>
+                <a:sym typeface="Arial"/>
+              </a:rPr>
+              <a:t> the </a:t>
+            </a:r>
+            <a:r>
+              <a:rPr lang="en-US" sz="1100">
+                <a:solidFill>
+                  <a:srgbClr val="188038"/>
+                </a:solidFill>
+                <a:latin typeface="Roboto Mono"/>
+                <a:ea typeface="Roboto Mono"/>
+                <a:cs typeface="Roboto Mono"/>
+                <a:sym typeface="Roboto Mono"/>
+              </a:rPr>
+              <a:t>lfence</a:t>
+            </a:r>
+            <a:r>
+              <a:rPr lang="en-US" sz="1100">
+                <a:latin typeface="Arial"/>
+                <a:ea typeface="Arial"/>
+                <a:cs typeface="Arial"/>
+                <a:sym typeface="Arial"/>
+              </a:rPr>
+              <a:t> instruction</a:t>
             </a:r>
             <a:endParaRPr/>
           </a:p>
@@ -24717,13 +26832,21 @@
               <a:buChar char="•"/>
             </a:pPr>
             <a:r>
+              <a:rPr b="1" lang="en-US">
+                <a:solidFill>
+                  <a:srgbClr val="002060"/>
+                </a:solidFill>
+              </a:rPr>
+              <a:t>mfence</a:t>
+            </a:r>
+            <a:r>
               <a:rPr lang="en-US">
                 <a:latin typeface="Helvetica Neue"/>
                 <a:ea typeface="Helvetica Neue"/>
                 <a:cs typeface="Helvetica Neue"/>
                 <a:sym typeface="Helvetica Neue"/>
               </a:rPr>
-              <a:t>mfence instruction does both of above</a:t>
+              <a:t> instruction does both of above</a:t>
             </a:r>
             <a:endParaRPr/>
           </a:p>
@@ -24814,6 +26937,64 @@
             <a:endParaRPr b="1">
               <a:solidFill>
                 <a:srgbClr val="000090"/>
+              </a:solidFill>
+              <a:latin typeface="Helvetica Neue"/>
+              <a:ea typeface="Helvetica Neue"/>
+              <a:cs typeface="Helvetica Neue"/>
+              <a:sym typeface="Helvetica Neue"/>
+            </a:endParaRPr>
+          </a:p>
+        </p:txBody>
+      </p:sp>
+      <p:sp>
+        <p:nvSpPr>
+          <p:cNvPr id="311" name="Google Shape;311;p29"/>
+          <p:cNvSpPr txBox="1"/>
+          <p:nvPr/>
+        </p:nvSpPr>
+        <p:spPr>
+          <a:xfrm>
+            <a:off x="5866075" y="1030675"/>
+            <a:ext cx="2857500" cy="755400"/>
+          </a:xfrm>
+          <a:prstGeom prst="rect">
+            <a:avLst/>
+          </a:prstGeom>
+          <a:noFill/>
+          <a:ln>
+            <a:noFill/>
+          </a:ln>
+        </p:spPr>
+        <p:txBody>
+          <a:bodyPr anchorCtr="0" anchor="t" bIns="91425" lIns="91425" spcFirstLastPara="1" rIns="91425" wrap="square" tIns="91425">
+            <a:noAutofit/>
+          </a:bodyPr>
+          <a:lstStyle/>
+          <a:p>
+            <a:pPr indent="0" lvl="0" marL="0" rtl="0" algn="l">
+              <a:spcBef>
+                <a:spcPts val="0"/>
+              </a:spcBef>
+              <a:spcAft>
+                <a:spcPts val="0"/>
+              </a:spcAft>
+              <a:buNone/>
+            </a:pPr>
+            <a:r>
+              <a:rPr lang="en-US" sz="1700">
+                <a:solidFill>
+                  <a:schemeClr val="dk1"/>
+                </a:solidFill>
+                <a:latin typeface="Helvetica Neue"/>
+                <a:ea typeface="Helvetica Neue"/>
+                <a:cs typeface="Helvetica Neue"/>
+                <a:sym typeface="Helvetica Neue"/>
+              </a:rPr>
+              <a:t>Buffer -&gt; cache -&gt; main memory -&gt; disk</a:t>
+            </a:r>
+            <a:endParaRPr sz="1700">
+              <a:solidFill>
+                <a:schemeClr val="dk1"/>
               </a:solidFill>
               <a:latin typeface="Helvetica Neue"/>
               <a:ea typeface="Helvetica Neue"/>
@@ -24831,12 +27012,12 @@
 </p:sld>
 </file>
 
-<file path=ppt/slides/slide31.xml><?xml version="1.0" encoding="utf-8"?>
+<file path=ppt/slides/slide33.xml><?xml version="1.0" encoding="utf-8"?>
 <p:sld xmlns:a="http://schemas.openxmlformats.org/drawingml/2006/main" xmlns:r="http://schemas.openxmlformats.org/officeDocument/2006/relationships" xmlns:mc="http://schemas.openxmlformats.org/markup-compatibility/2006" xmlns:mv="urn:schemas-microsoft-com:mac:vml" xmlns:p="http://schemas.openxmlformats.org/presentationml/2006/main" xmlns:c="http://schemas.openxmlformats.org/drawingml/2006/chart" xmlns:dgm="http://schemas.openxmlformats.org/drawingml/2006/diagram" xmlns:o="urn:schemas-microsoft-com:office:office" xmlns:v="urn:schemas-microsoft-com:vml" xmlns:pvml="urn:schemas-microsoft-com:office:powerpoint" xmlns:com="http://schemas.openxmlformats.org/drawingml/2006/compatibility" xmlns:p14="http://schemas.microsoft.com/office/powerpoint/2010/main" xmlns:p15="http://schemas.microsoft.com/office/powerpoint/2012/main" xmlns:ahyp="http://schemas.microsoft.com/office/drawing/2018/hyperlinkcolor">
   <p:cSld>
     <p:spTree>
       <p:nvGrpSpPr>
-        <p:cNvPr id="296" name="Shape 296"/>
+        <p:cNvPr id="316" name="Shape 316"/>
         <p:cNvGrpSpPr/>
         <p:nvPr/>
       </p:nvGrpSpPr>
@@ -24850,7 +27031,7 @@
       </p:grpSpPr>
       <p:sp>
         <p:nvSpPr>
-          <p:cNvPr id="297" name="Google Shape;297;p30"/>
+          <p:cNvPr id="317" name="Google Shape;317;p30"/>
           <p:cNvSpPr txBox="1"/>
           <p:nvPr>
             <p:ph type="title"/>
@@ -24899,7 +27080,7 @@
       </p:sp>
       <p:sp>
         <p:nvSpPr>
-          <p:cNvPr id="298" name="Google Shape;298;p30"/>
+          <p:cNvPr id="318" name="Google Shape;318;p30"/>
           <p:cNvSpPr txBox="1"/>
           <p:nvPr>
             <p:ph idx="1" type="body"/>
@@ -25036,7 +27217,7 @@
       </p:sp>
       <p:pic>
         <p:nvPicPr>
-          <p:cNvPr id="299" name="Google Shape;299;p30"/>
+          <p:cNvPr id="319" name="Google Shape;319;p30"/>
           <p:cNvPicPr preferRelativeResize="0"/>
           <p:nvPr/>
         </p:nvPicPr>
@@ -25061,6 +27242,90 @@
           </a:ln>
         </p:spPr>
       </p:pic>
+      <p:cxnSp>
+        <p:nvCxnSpPr>
+          <p:cNvPr id="320" name="Google Shape;320;p30"/>
+          <p:cNvCxnSpPr/>
+          <p:nvPr/>
+        </p:nvCxnSpPr>
+        <p:spPr>
+          <a:xfrm flipH="1" rot="10800000">
+            <a:off x="4125300" y="3668700"/>
+            <a:ext cx="3481500" cy="1412400"/>
+          </a:xfrm>
+          <a:prstGeom prst="straightConnector1">
+            <a:avLst/>
+          </a:prstGeom>
+          <a:noFill/>
+          <a:ln cap="flat" cmpd="sng" w="9525">
+            <a:solidFill>
+              <a:schemeClr val="dk2"/>
+            </a:solidFill>
+            <a:prstDash val="solid"/>
+            <a:round/>
+            <a:headEnd len="med" w="med" type="none"/>
+            <a:tailEnd len="med" w="med" type="triangle"/>
+          </a:ln>
+        </p:spPr>
+      </p:cxnSp>
+      <p:sp>
+        <p:nvSpPr>
+          <p:cNvPr id="321" name="Google Shape;321;p30"/>
+          <p:cNvSpPr txBox="1"/>
+          <p:nvPr/>
+        </p:nvSpPr>
+        <p:spPr>
+          <a:xfrm>
+            <a:off x="4470175" y="5261750"/>
+            <a:ext cx="3859200" cy="609600"/>
+          </a:xfrm>
+          <a:prstGeom prst="rect">
+            <a:avLst/>
+          </a:prstGeom>
+          <a:noFill/>
+          <a:ln>
+            <a:noFill/>
+          </a:ln>
+        </p:spPr>
+        <p:txBody>
+          <a:bodyPr anchorCtr="0" anchor="t" bIns="91425" lIns="91425" spcFirstLastPara="1" rIns="91425" wrap="square" tIns="91425">
+            <a:noAutofit/>
+          </a:bodyPr>
+          <a:lstStyle/>
+          <a:p>
+            <a:pPr indent="0" lvl="0" marL="0" rtl="0" algn="l">
+              <a:spcBef>
+                <a:spcPts val="0"/>
+              </a:spcBef>
+              <a:spcAft>
+                <a:spcPts val="0"/>
+              </a:spcAft>
+              <a:buNone/>
+            </a:pPr>
+            <a:r>
+              <a:rPr lang="en-US" sz="1700">
+                <a:solidFill>
+                  <a:schemeClr val="dk1"/>
+                </a:solidFill>
+                <a:latin typeface="Helvetica Neue"/>
+                <a:ea typeface="Helvetica Neue"/>
+                <a:cs typeface="Helvetica Neue"/>
+                <a:sym typeface="Helvetica Neue"/>
+              </a:rPr>
+              <a:t>Too much processor / too much disk connectivity</a:t>
+            </a:r>
+            <a:endParaRPr sz="1700">
+              <a:solidFill>
+                <a:schemeClr val="dk1"/>
+              </a:solidFill>
+              <a:latin typeface="Helvetica Neue"/>
+              <a:ea typeface="Helvetica Neue"/>
+              <a:cs typeface="Helvetica Neue"/>
+              <a:sym typeface="Helvetica Neue"/>
+            </a:endParaRPr>
+          </a:p>
+        </p:txBody>
+      </p:sp>
     </p:spTree>
   </p:cSld>
   <p:clrMapOvr>
@@ -25069,12 +27334,12 @@
 </p:sld>
 </file>
 
-<file path=ppt/slides/slide32.xml><?xml version="1.0" encoding="utf-8"?>
+<file path=ppt/slides/slide34.xml><?xml version="1.0" encoding="utf-8"?>
 <p:sld xmlns:a="http://schemas.openxmlformats.org/drawingml/2006/main" xmlns:r="http://schemas.openxmlformats.org/officeDocument/2006/relationships" xmlns:mc="http://schemas.openxmlformats.org/markup-compatibility/2006" xmlns:mv="urn:schemas-microsoft-com:mac:vml" xmlns:p="http://schemas.openxmlformats.org/presentationml/2006/main" xmlns:c="http://schemas.openxmlformats.org/drawingml/2006/chart" xmlns:dgm="http://schemas.openxmlformats.org/drawingml/2006/diagram" xmlns:o="urn:schemas-microsoft-com:office:office" xmlns:v="urn:schemas-microsoft-com:vml" xmlns:pvml="urn:schemas-microsoft-com:office:powerpoint" xmlns:com="http://schemas.openxmlformats.org/drawingml/2006/compatibility" xmlns:p14="http://schemas.microsoft.com/office/powerpoint/2010/main" xmlns:p15="http://schemas.microsoft.com/office/powerpoint/2012/main" xmlns:ahyp="http://schemas.microsoft.com/office/drawing/2018/hyperlinkcolor">
   <p:cSld>
     <p:spTree>
       <p:nvGrpSpPr>
-        <p:cNvPr id="303" name="Shape 303"/>
+        <p:cNvPr id="325" name="Shape 325"/>
         <p:cNvGrpSpPr/>
         <p:nvPr/>
       </p:nvGrpSpPr>
@@ -25088,7 +27353,7 @@
       </p:grpSpPr>
       <p:sp>
         <p:nvSpPr>
-          <p:cNvPr id="304" name="Google Shape;304;p31"/>
+          <p:cNvPr id="326" name="Google Shape;326;p31"/>
           <p:cNvSpPr txBox="1"/>
           <p:nvPr>
             <p:ph type="title"/>
@@ -25132,7 +27397,7 @@
       </p:sp>
       <p:pic>
         <p:nvPicPr>
-          <p:cNvPr id="305" name="Google Shape;305;p31"/>
+          <p:cNvPr id="327" name="Google Shape;327;p31"/>
           <p:cNvPicPr preferRelativeResize="0"/>
           <p:nvPr/>
         </p:nvPicPr>
@@ -25165,12 +27430,12 @@
 </p:sld>
 </file>
 
-<file path=ppt/slides/slide33.xml><?xml version="1.0" encoding="utf-8"?>
+<file path=ppt/slides/slide35.xml><?xml version="1.0" encoding="utf-8"?>
 <p:sld xmlns:a="http://schemas.openxmlformats.org/drawingml/2006/main" xmlns:r="http://schemas.openxmlformats.org/officeDocument/2006/relationships" xmlns:mc="http://schemas.openxmlformats.org/markup-compatibility/2006" xmlns:mv="urn:schemas-microsoft-com:mac:vml" xmlns:p="http://schemas.openxmlformats.org/presentationml/2006/main" xmlns:c="http://schemas.openxmlformats.org/drawingml/2006/chart" xmlns:dgm="http://schemas.openxmlformats.org/drawingml/2006/diagram" xmlns:o="urn:schemas-microsoft-com:office:office" xmlns:v="urn:schemas-microsoft-com:vml" xmlns:pvml="urn:schemas-microsoft-com:office:powerpoint" xmlns:com="http://schemas.openxmlformats.org/drawingml/2006/compatibility" xmlns:p14="http://schemas.microsoft.com/office/powerpoint/2010/main" xmlns:p15="http://schemas.microsoft.com/office/powerpoint/2012/main" xmlns:ahyp="http://schemas.microsoft.com/office/drawing/2018/hyperlinkcolor">
   <p:cSld>
     <p:spTree>
       <p:nvGrpSpPr>
-        <p:cNvPr id="310" name="Shape 310"/>
+        <p:cNvPr id="332" name="Shape 332"/>
         <p:cNvGrpSpPr/>
         <p:nvPr/>
       </p:nvGrpSpPr>
@@ -25184,7 +27449,7 @@
       </p:grpSpPr>
       <p:sp>
         <p:nvSpPr>
-          <p:cNvPr id="311" name="Google Shape;311;p32"/>
+          <p:cNvPr id="333" name="Google Shape;333;p32"/>
           <p:cNvSpPr txBox="1"/>
           <p:nvPr>
             <p:ph type="title"/>
@@ -25233,7 +27498,7 @@
       </p:sp>
       <p:sp>
         <p:nvSpPr>
-          <p:cNvPr id="312" name="Google Shape;312;p32"/>
+          <p:cNvPr id="334" name="Google Shape;334;p32"/>
           <p:cNvSpPr txBox="1"/>
           <p:nvPr>
             <p:ph idx="1" type="body"/>
@@ -25349,7 +27614,7 @@
       </p:sp>
       <p:pic>
         <p:nvPicPr>
-          <p:cNvPr id="313" name="Google Shape;313;p32"/>
+          <p:cNvPr id="335" name="Google Shape;335;p32"/>
           <p:cNvPicPr preferRelativeResize="0"/>
           <p:nvPr/>
         </p:nvPicPr>
@@ -25382,12 +27647,12 @@
 </p:sld>
 </file>
 
-<file path=ppt/slides/slide34.xml><?xml version="1.0" encoding="utf-8"?>
+<file path=ppt/slides/slide36.xml><?xml version="1.0" encoding="utf-8"?>
 <p:sld xmlns:a="http://schemas.openxmlformats.org/drawingml/2006/main" xmlns:r="http://schemas.openxmlformats.org/officeDocument/2006/relationships" xmlns:mc="http://schemas.openxmlformats.org/markup-compatibility/2006" xmlns:mv="urn:schemas-microsoft-com:mac:vml" xmlns:p="http://schemas.openxmlformats.org/presentationml/2006/main" xmlns:c="http://schemas.openxmlformats.org/drawingml/2006/chart" xmlns:dgm="http://schemas.openxmlformats.org/drawingml/2006/diagram" xmlns:o="urn:schemas-microsoft-com:office:office" xmlns:v="urn:schemas-microsoft-com:vml" xmlns:pvml="urn:schemas-microsoft-com:office:powerpoint" xmlns:com="http://schemas.openxmlformats.org/drawingml/2006/compatibility" xmlns:p14="http://schemas.microsoft.com/office/powerpoint/2010/main" xmlns:p15="http://schemas.microsoft.com/office/powerpoint/2012/main" xmlns:ahyp="http://schemas.microsoft.com/office/drawing/2018/hyperlinkcolor">
   <p:cSld>
     <p:spTree>
       <p:nvGrpSpPr>
-        <p:cNvPr id="318" name="Shape 318"/>
+        <p:cNvPr id="340" name="Shape 340"/>
         <p:cNvGrpSpPr/>
         <p:nvPr/>
       </p:nvGrpSpPr>
@@ -25401,7 +27666,7 @@
       </p:grpSpPr>
       <p:sp>
         <p:nvSpPr>
-          <p:cNvPr id="319" name="Google Shape;319;p33"/>
+          <p:cNvPr id="341" name="Google Shape;341;p33"/>
           <p:cNvSpPr txBox="1"/>
           <p:nvPr>
             <p:ph type="title"/>
@@ -25450,7 +27715,7 @@
       </p:sp>
       <p:sp>
         <p:nvSpPr>
-          <p:cNvPr id="320" name="Google Shape;320;p33"/>
+          <p:cNvPr id="342" name="Google Shape;342;p33"/>
           <p:cNvSpPr txBox="1"/>
           <p:nvPr>
             <p:ph idx="1" type="body"/>
@@ -25610,7 +27875,7 @@
       </p:sp>
       <p:pic>
         <p:nvPicPr>
-          <p:cNvPr id="321" name="Google Shape;321;p33"/>
+          <p:cNvPr id="343" name="Google Shape;343;p33"/>
           <p:cNvPicPr preferRelativeResize="0"/>
           <p:nvPr/>
         </p:nvPicPr>
@@ -25643,12 +27908,12 @@
 </p:sld>
 </file>
 
-<file path=ppt/slides/slide35.xml><?xml version="1.0" encoding="utf-8"?>
+<file path=ppt/slides/slide37.xml><?xml version="1.0" encoding="utf-8"?>
 <p:sld xmlns:a="http://schemas.openxmlformats.org/drawingml/2006/main" xmlns:r="http://schemas.openxmlformats.org/officeDocument/2006/relationships" xmlns:mc="http://schemas.openxmlformats.org/markup-compatibility/2006" xmlns:mv="urn:schemas-microsoft-com:mac:vml" xmlns:p="http://schemas.openxmlformats.org/presentationml/2006/main" xmlns:c="http://schemas.openxmlformats.org/drawingml/2006/chart" xmlns:dgm="http://schemas.openxmlformats.org/drawingml/2006/diagram" xmlns:o="urn:schemas-microsoft-com:office:office" xmlns:v="urn:schemas-microsoft-com:vml" xmlns:pvml="urn:schemas-microsoft-com:office:powerpoint" xmlns:com="http://schemas.openxmlformats.org/drawingml/2006/compatibility" xmlns:p14="http://schemas.microsoft.com/office/powerpoint/2010/main" xmlns:p15="http://schemas.microsoft.com/office/powerpoint/2012/main" xmlns:ahyp="http://schemas.microsoft.com/office/drawing/2018/hyperlinkcolor">
   <p:cSld>
     <p:spTree>
       <p:nvGrpSpPr>
-        <p:cNvPr id="325" name="Shape 325"/>
+        <p:cNvPr id="347" name="Shape 347"/>
         <p:cNvGrpSpPr/>
         <p:nvPr/>
       </p:nvGrpSpPr>
@@ -25662,7 +27927,7 @@
       </p:grpSpPr>
       <p:sp>
         <p:nvSpPr>
-          <p:cNvPr id="326" name="Google Shape;326;p34"/>
+          <p:cNvPr id="348" name="Google Shape;348;p34"/>
           <p:cNvSpPr txBox="1"/>
           <p:nvPr>
             <p:ph type="title"/>
@@ -25706,7 +27971,7 @@
       </p:sp>
       <p:sp>
         <p:nvSpPr>
-          <p:cNvPr id="327" name="Google Shape;327;p34"/>
+          <p:cNvPr id="349" name="Google Shape;349;p34"/>
           <p:cNvSpPr txBox="1"/>
           <p:nvPr>
             <p:ph idx="1" type="body"/>
@@ -25999,12 +28264,12 @@
 </p:sld>
 </file>
 
-<file path=ppt/slides/slide36.xml><?xml version="1.0" encoding="utf-8"?>
+<file path=ppt/slides/slide38.xml><?xml version="1.0" encoding="utf-8"?>
 <p:sld xmlns:a="http://schemas.openxmlformats.org/drawingml/2006/main" xmlns:r="http://schemas.openxmlformats.org/officeDocument/2006/relationships" xmlns:mc="http://schemas.openxmlformats.org/markup-compatibility/2006" xmlns:mv="urn:schemas-microsoft-com:mac:vml" xmlns:p="http://schemas.openxmlformats.org/presentationml/2006/main" xmlns:c="http://schemas.openxmlformats.org/drawingml/2006/chart" xmlns:dgm="http://schemas.openxmlformats.org/drawingml/2006/diagram" xmlns:o="urn:schemas-microsoft-com:office:office" xmlns:v="urn:schemas-microsoft-com:vml" xmlns:pvml="urn:schemas-microsoft-com:office:powerpoint" xmlns:com="http://schemas.openxmlformats.org/drawingml/2006/compatibility" xmlns:p14="http://schemas.microsoft.com/office/powerpoint/2010/main" xmlns:p15="http://schemas.microsoft.com/office/powerpoint/2012/main" xmlns:ahyp="http://schemas.microsoft.com/office/drawing/2018/hyperlinkcolor">
   <p:cSld>
     <p:spTree>
       <p:nvGrpSpPr>
-        <p:cNvPr id="332" name="Shape 332"/>
+        <p:cNvPr id="354" name="Shape 354"/>
         <p:cNvGrpSpPr/>
         <p:nvPr/>
       </p:nvGrpSpPr>
@@ -26018,7 +28283,7 @@
       </p:grpSpPr>
       <p:sp>
         <p:nvSpPr>
-          <p:cNvPr id="333" name="Google Shape;333;p35"/>
+          <p:cNvPr id="355" name="Google Shape;355;p35"/>
           <p:cNvSpPr txBox="1"/>
           <p:nvPr>
             <p:ph type="title"/>
@@ -26067,7 +28332,7 @@
       </p:sp>
       <p:sp>
         <p:nvSpPr>
-          <p:cNvPr id="334" name="Google Shape;334;p35"/>
+          <p:cNvPr id="356" name="Google Shape;356;p35"/>
           <p:cNvSpPr txBox="1"/>
           <p:nvPr>
             <p:ph idx="1" type="body"/>
@@ -26315,7 +28580,7 @@
       </p:sp>
       <p:pic>
         <p:nvPicPr>
-          <p:cNvPr id="335" name="Google Shape;335;p35"/>
+          <p:cNvPr id="357" name="Google Shape;357;p35"/>
           <p:cNvPicPr preferRelativeResize="0"/>
           <p:nvPr/>
         </p:nvPicPr>
@@ -26348,12 +28613,12 @@
 </p:sld>
 </file>
 
-<file path=ppt/slides/slide37.xml><?xml version="1.0" encoding="utf-8"?>
+<file path=ppt/slides/slide39.xml><?xml version="1.0" encoding="utf-8"?>
 <p:sld xmlns:a="http://schemas.openxmlformats.org/drawingml/2006/main" xmlns:r="http://schemas.openxmlformats.org/officeDocument/2006/relationships" xmlns:mc="http://schemas.openxmlformats.org/markup-compatibility/2006" xmlns:mv="urn:schemas-microsoft-com:mac:vml" xmlns:p="http://schemas.openxmlformats.org/presentationml/2006/main" xmlns:c="http://schemas.openxmlformats.org/drawingml/2006/chart" xmlns:dgm="http://schemas.openxmlformats.org/drawingml/2006/diagram" xmlns:o="urn:schemas-microsoft-com:office:office" xmlns:v="urn:schemas-microsoft-com:vml" xmlns:pvml="urn:schemas-microsoft-com:office:powerpoint" xmlns:com="http://schemas.openxmlformats.org/drawingml/2006/compatibility" xmlns:p14="http://schemas.microsoft.com/office/powerpoint/2010/main" xmlns:p15="http://schemas.microsoft.com/office/powerpoint/2012/main" xmlns:ahyp="http://schemas.microsoft.com/office/drawing/2018/hyperlinkcolor">
   <p:cSld>
     <p:spTree>
       <p:nvGrpSpPr>
-        <p:cNvPr id="340" name="Shape 340"/>
+        <p:cNvPr id="362" name="Shape 362"/>
         <p:cNvGrpSpPr/>
         <p:nvPr/>
       </p:nvGrpSpPr>
@@ -26367,7 +28632,7 @@
       </p:grpSpPr>
       <p:sp>
         <p:nvSpPr>
-          <p:cNvPr id="341" name="Google Shape;341;p36"/>
+          <p:cNvPr id="363" name="Google Shape;363;p36"/>
           <p:cNvSpPr txBox="1"/>
           <p:nvPr>
             <p:ph type="title"/>
@@ -26416,7 +28681,7 @@
       </p:sp>
       <p:sp>
         <p:nvSpPr>
-          <p:cNvPr id="342" name="Google Shape;342;p36"/>
+          <p:cNvPr id="364" name="Google Shape;364;p36"/>
           <p:cNvSpPr txBox="1"/>
           <p:nvPr>
             <p:ph idx="1" type="body"/>
@@ -26817,499 +29082,6 @@
               <a:cs typeface="Helvetica Neue"/>
               <a:sym typeface="Helvetica Neue"/>
             </a:endParaRPr>
-          </a:p>
-        </p:txBody>
-      </p:sp>
-    </p:spTree>
-  </p:cSld>
-  <p:clrMapOvr>
-    <a:masterClrMapping/>
-  </p:clrMapOvr>
-</p:sld>
-</file>
-
-<file path=ppt/slides/slide38.xml><?xml version="1.0" encoding="utf-8"?>
-<p:sld xmlns:a="http://schemas.openxmlformats.org/drawingml/2006/main" xmlns:r="http://schemas.openxmlformats.org/officeDocument/2006/relationships" xmlns:mc="http://schemas.openxmlformats.org/markup-compatibility/2006" xmlns:mv="urn:schemas-microsoft-com:mac:vml" xmlns:p="http://schemas.openxmlformats.org/presentationml/2006/main" xmlns:c="http://schemas.openxmlformats.org/drawingml/2006/chart" xmlns:dgm="http://schemas.openxmlformats.org/drawingml/2006/diagram" xmlns:o="urn:schemas-microsoft-com:office:office" xmlns:v="urn:schemas-microsoft-com:vml" xmlns:pvml="urn:schemas-microsoft-com:office:powerpoint" xmlns:com="http://schemas.openxmlformats.org/drawingml/2006/compatibility" xmlns:p14="http://schemas.microsoft.com/office/powerpoint/2010/main" xmlns:p15="http://schemas.microsoft.com/office/powerpoint/2012/main" xmlns:ahyp="http://schemas.microsoft.com/office/drawing/2018/hyperlinkcolor">
-  <p:cSld>
-    <p:spTree>
-      <p:nvGrpSpPr>
-        <p:cNvPr id="347" name="Shape 347"/>
-        <p:cNvGrpSpPr/>
-        <p:nvPr/>
-      </p:nvGrpSpPr>
-      <p:grpSpPr>
-        <a:xfrm>
-          <a:off x="0" y="0"/>
-          <a:ext cx="0" cy="0"/>
-          <a:chOff x="0" y="0"/>
-          <a:chExt cx="0" cy="0"/>
-        </a:xfrm>
-      </p:grpSpPr>
-      <p:sp>
-        <p:nvSpPr>
-          <p:cNvPr id="348" name="Google Shape;348;p37"/>
-          <p:cNvSpPr txBox="1"/>
-          <p:nvPr>
-            <p:ph type="title"/>
-          </p:nvPr>
-        </p:nvSpPr>
-        <p:spPr>
-          <a:xfrm>
-            <a:off x="768350" y="492897"/>
-            <a:ext cx="8077200" cy="217317"/>
-          </a:xfrm>
-          <a:prstGeom prst="rect">
-            <a:avLst/>
-          </a:prstGeom>
-          <a:noFill/>
-          <a:ln>
-            <a:noFill/>
-          </a:ln>
-        </p:spPr>
-        <p:txBody>
-          <a:bodyPr anchorCtr="0" anchor="b" bIns="45700" lIns="91425" spcFirstLastPara="1" rIns="91425" wrap="square" tIns="45700">
-            <a:noAutofit/>
-          </a:bodyPr>
-          <a:lstStyle/>
-          <a:p>
-            <a:pPr indent="0" lvl="0" marL="0" rtl="0" algn="ctr">
-              <a:spcBef>
-                <a:spcPts val="0"/>
-              </a:spcBef>
-              <a:spcAft>
-                <a:spcPts val="0"/>
-              </a:spcAft>
-              <a:buNone/>
-            </a:pPr>
-            <a:r>
-              <a:rPr lang="en-US">
-                <a:latin typeface="Helvetica Neue"/>
-                <a:ea typeface="Helvetica Neue"/>
-                <a:cs typeface="Helvetica Neue"/>
-                <a:sym typeface="Helvetica Neue"/>
-              </a:rPr>
-              <a:t>Data Integration and Distributed Databases</a:t>
-            </a:r>
-            <a:endParaRPr/>
-          </a:p>
-        </p:txBody>
-      </p:sp>
-      <p:sp>
-        <p:nvSpPr>
-          <p:cNvPr id="349" name="Google Shape;349;p37"/>
-          <p:cNvSpPr txBox="1"/>
-          <p:nvPr>
-            <p:ph idx="1" type="body"/>
-          </p:nvPr>
-        </p:nvSpPr>
-        <p:spPr>
-          <a:xfrm>
-            <a:off x="674703" y="1047565"/>
-            <a:ext cx="7759084" cy="5422903"/>
-          </a:xfrm>
-          <a:prstGeom prst="rect">
-            <a:avLst/>
-          </a:prstGeom>
-          <a:noFill/>
-          <a:ln>
-            <a:noFill/>
-          </a:ln>
-        </p:spPr>
-        <p:txBody>
-          <a:bodyPr anchorCtr="0" anchor="t" bIns="45700" lIns="91425" spcFirstLastPara="1" rIns="91425" wrap="square" tIns="45700">
-            <a:noAutofit/>
-          </a:bodyPr>
-          <a:lstStyle/>
-          <a:p>
-            <a:pPr indent="-342900" lvl="0" marL="342900" rtl="0" algn="l">
-              <a:spcBef>
-                <a:spcPts val="0"/>
-              </a:spcBef>
-              <a:spcAft>
-                <a:spcPts val="0"/>
-              </a:spcAft>
-              <a:buSzPts val="1700"/>
-              <a:buChar char="▪"/>
-            </a:pPr>
-            <a:r>
-              <a:rPr lang="en-US">
-                <a:latin typeface="Helvetica Neue"/>
-                <a:ea typeface="Helvetica Neue"/>
-                <a:cs typeface="Helvetica Neue"/>
-                <a:sym typeface="Helvetica Neue"/>
-              </a:rPr>
-              <a:t>Data integration between multiple distributed databases</a:t>
-            </a:r>
-            <a:endParaRPr/>
-          </a:p>
-          <a:p>
-            <a:pPr indent="-342900" lvl="0" marL="342900" rtl="0" algn="l">
-              <a:spcBef>
-                <a:spcPts val="595"/>
-              </a:spcBef>
-              <a:spcAft>
-                <a:spcPts val="0"/>
-              </a:spcAft>
-              <a:buSzPts val="1700"/>
-              <a:buChar char="▪"/>
-            </a:pPr>
-            <a:r>
-              <a:rPr lang="en-US">
-                <a:latin typeface="Helvetica Neue"/>
-                <a:ea typeface="Helvetica Neue"/>
-                <a:cs typeface="Helvetica Neue"/>
-                <a:sym typeface="Helvetica Neue"/>
-              </a:rPr>
-              <a:t>Benefits:</a:t>
-            </a:r>
-            <a:endParaRPr/>
-          </a:p>
-          <a:p>
-            <a:pPr indent="-285750" lvl="1" marL="742950" rtl="0" algn="l">
-              <a:spcBef>
-                <a:spcPts val="595"/>
-              </a:spcBef>
-              <a:spcAft>
-                <a:spcPts val="0"/>
-              </a:spcAft>
-              <a:buSzPts val="1870"/>
-              <a:buChar char="•"/>
-            </a:pPr>
-            <a:r>
-              <a:rPr lang="en-US">
-                <a:latin typeface="Helvetica Neue"/>
-                <a:ea typeface="Helvetica Neue"/>
-                <a:cs typeface="Helvetica Neue"/>
-                <a:sym typeface="Helvetica Neue"/>
-              </a:rPr>
-              <a:t>Sharing data – users at one site able to access the data residing at some other sites.</a:t>
-            </a:r>
-            <a:endParaRPr/>
-          </a:p>
-          <a:p>
-            <a:pPr indent="-285750" lvl="1" marL="742950" rtl="0" algn="l">
-              <a:spcBef>
-                <a:spcPts val="595"/>
-              </a:spcBef>
-              <a:spcAft>
-                <a:spcPts val="0"/>
-              </a:spcAft>
-              <a:buSzPts val="1870"/>
-              <a:buChar char="•"/>
-            </a:pPr>
-            <a:r>
-              <a:rPr lang="en-US">
-                <a:latin typeface="Helvetica Neue"/>
-                <a:ea typeface="Helvetica Neue"/>
-                <a:cs typeface="Helvetica Neue"/>
-                <a:sym typeface="Helvetica Neue"/>
-              </a:rPr>
-              <a:t>Autonomy – each site is able to retain a degree of control over data stored locally.</a:t>
-            </a:r>
-            <a:endParaRPr/>
-          </a:p>
-          <a:p>
-            <a:pPr indent="0" lvl="0" marL="0" rtl="0" algn="l">
-              <a:spcBef>
-                <a:spcPts val="595"/>
-              </a:spcBef>
-              <a:spcAft>
-                <a:spcPts val="0"/>
-              </a:spcAft>
-              <a:buSzPts val="1870"/>
-              <a:buNone/>
-            </a:pPr>
-            <a:r>
-              <a:t/>
-            </a:r>
-            <a:endParaRPr>
-              <a:latin typeface="Helvetica Neue"/>
-              <a:ea typeface="Helvetica Neue"/>
-              <a:cs typeface="Helvetica Neue"/>
-              <a:sym typeface="Helvetica Neue"/>
-            </a:endParaRPr>
-          </a:p>
-          <a:p>
-            <a:pPr indent="-224155" lvl="0" marL="342900" rtl="0" algn="l">
-              <a:spcBef>
-                <a:spcPts val="595"/>
-              </a:spcBef>
-              <a:spcAft>
-                <a:spcPts val="0"/>
-              </a:spcAft>
-              <a:buSzPts val="1870"/>
-              <a:buFont typeface="Noto Sans Symbols"/>
-              <a:buNone/>
-            </a:pPr>
-            <a:r>
-              <a:t/>
-            </a:r>
-            <a:endParaRPr>
-              <a:latin typeface="Helvetica Neue"/>
-              <a:ea typeface="Helvetica Neue"/>
-              <a:cs typeface="Helvetica Neue"/>
-              <a:sym typeface="Helvetica Neue"/>
-            </a:endParaRPr>
-          </a:p>
-        </p:txBody>
-      </p:sp>
-    </p:spTree>
-  </p:cSld>
-  <p:clrMapOvr>
-    <a:masterClrMapping/>
-  </p:clrMapOvr>
-</p:sld>
-</file>
-
-<file path=ppt/slides/slide39.xml><?xml version="1.0" encoding="utf-8"?>
-<p:sld xmlns:a="http://schemas.openxmlformats.org/drawingml/2006/main" xmlns:r="http://schemas.openxmlformats.org/officeDocument/2006/relationships" xmlns:mc="http://schemas.openxmlformats.org/markup-compatibility/2006" xmlns:mv="urn:schemas-microsoft-com:mac:vml" xmlns:p="http://schemas.openxmlformats.org/presentationml/2006/main" xmlns:c="http://schemas.openxmlformats.org/drawingml/2006/chart" xmlns:dgm="http://schemas.openxmlformats.org/drawingml/2006/diagram" xmlns:o="urn:schemas-microsoft-com:office:office" xmlns:v="urn:schemas-microsoft-com:vml" xmlns:pvml="urn:schemas-microsoft-com:office:powerpoint" xmlns:com="http://schemas.openxmlformats.org/drawingml/2006/compatibility" xmlns:p14="http://schemas.microsoft.com/office/powerpoint/2010/main" xmlns:p15="http://schemas.microsoft.com/office/powerpoint/2012/main" xmlns:ahyp="http://schemas.microsoft.com/office/drawing/2018/hyperlinkcolor">
-  <p:cSld>
-    <p:spTree>
-      <p:nvGrpSpPr>
-        <p:cNvPr id="353" name="Shape 353"/>
-        <p:cNvGrpSpPr/>
-        <p:nvPr/>
-      </p:nvGrpSpPr>
-      <p:grpSpPr>
-        <a:xfrm>
-          <a:off x="0" y="0"/>
-          <a:ext cx="0" cy="0"/>
-          <a:chOff x="0" y="0"/>
-          <a:chExt cx="0" cy="0"/>
-        </a:xfrm>
-      </p:grpSpPr>
-      <p:sp>
-        <p:nvSpPr>
-          <p:cNvPr id="354" name="Google Shape;354;p38"/>
-          <p:cNvSpPr txBox="1"/>
-          <p:nvPr>
-            <p:ph type="title"/>
-          </p:nvPr>
-        </p:nvSpPr>
-        <p:spPr>
-          <a:xfrm>
-            <a:off x="768350" y="117475"/>
-            <a:ext cx="7689850" cy="609600"/>
-          </a:xfrm>
-          <a:prstGeom prst="rect">
-            <a:avLst/>
-          </a:prstGeom>
-          <a:noFill/>
-          <a:ln>
-            <a:noFill/>
-          </a:ln>
-        </p:spPr>
-        <p:txBody>
-          <a:bodyPr anchorCtr="0" anchor="b" bIns="45700" lIns="91425" spcFirstLastPara="1" rIns="91425" wrap="square" tIns="45700">
-            <a:noAutofit/>
-          </a:bodyPr>
-          <a:lstStyle/>
-          <a:p>
-            <a:pPr indent="0" lvl="0" marL="0" rtl="0" algn="ctr">
-              <a:spcBef>
-                <a:spcPts val="0"/>
-              </a:spcBef>
-              <a:spcAft>
-                <a:spcPts val="0"/>
-              </a:spcAft>
-              <a:buNone/>
-            </a:pPr>
-            <a:r>
-              <a:rPr lang="en-US"/>
-              <a:t>Availability</a:t>
-            </a:r>
-            <a:endParaRPr/>
-          </a:p>
-        </p:txBody>
-      </p:sp>
-      <p:sp>
-        <p:nvSpPr>
-          <p:cNvPr id="355" name="Google Shape;355;p38"/>
-          <p:cNvSpPr txBox="1"/>
-          <p:nvPr>
-            <p:ph idx="1" type="body"/>
-          </p:nvPr>
-        </p:nvSpPr>
-        <p:spPr>
-          <a:xfrm>
-            <a:off x="665825" y="1102497"/>
-            <a:ext cx="7723573" cy="5367972"/>
-          </a:xfrm>
-          <a:prstGeom prst="rect">
-            <a:avLst/>
-          </a:prstGeom>
-          <a:noFill/>
-          <a:ln>
-            <a:noFill/>
-          </a:ln>
-        </p:spPr>
-        <p:txBody>
-          <a:bodyPr anchorCtr="0" anchor="t" bIns="45700" lIns="91425" spcFirstLastPara="1" rIns="91425" wrap="square" tIns="45700">
-            <a:noAutofit/>
-          </a:bodyPr>
-          <a:lstStyle/>
-          <a:p>
-            <a:pPr indent="-342900" lvl="0" marL="342900" rtl="0" algn="l">
-              <a:spcBef>
-                <a:spcPts val="0"/>
-              </a:spcBef>
-              <a:spcAft>
-                <a:spcPts val="0"/>
-              </a:spcAft>
-              <a:buSzPts val="1700"/>
-              <a:buChar char="▪"/>
-            </a:pPr>
-            <a:r>
-              <a:rPr b="1" lang="en-US">
-                <a:solidFill>
-                  <a:srgbClr val="002060"/>
-                </a:solidFill>
-                <a:latin typeface="Helvetica Neue"/>
-                <a:ea typeface="Helvetica Neue"/>
-                <a:cs typeface="Helvetica Neue"/>
-                <a:sym typeface="Helvetica Neue"/>
-              </a:rPr>
-              <a:t>Network partitioning</a:t>
-            </a:r>
-            <a:endParaRPr/>
-          </a:p>
-          <a:p>
-            <a:pPr indent="-342900" lvl="0" marL="342900" rtl="0" algn="l">
-              <a:spcBef>
-                <a:spcPts val="595"/>
-              </a:spcBef>
-              <a:spcAft>
-                <a:spcPts val="0"/>
-              </a:spcAft>
-              <a:buSzPts val="1700"/>
-              <a:buChar char="▪"/>
-            </a:pPr>
-            <a:r>
-              <a:rPr b="1" lang="en-US">
-                <a:solidFill>
-                  <a:srgbClr val="002060"/>
-                </a:solidFill>
-                <a:latin typeface="Helvetica Neue"/>
-                <a:ea typeface="Helvetica Neue"/>
-                <a:cs typeface="Helvetica Neue"/>
-                <a:sym typeface="Helvetica Neue"/>
-              </a:rPr>
-              <a:t>Availability </a:t>
-            </a:r>
-            <a:r>
-              <a:rPr lang="en-US">
-                <a:latin typeface="Helvetica Neue"/>
-                <a:ea typeface="Helvetica Neue"/>
-                <a:cs typeface="Helvetica Neue"/>
-                <a:sym typeface="Helvetica Neue"/>
-              </a:rPr>
-              <a:t>of system</a:t>
-            </a:r>
-            <a:endParaRPr/>
-          </a:p>
-          <a:p>
-            <a:pPr indent="-285750" lvl="1" marL="742950" rtl="0" algn="l">
-              <a:spcBef>
-                <a:spcPts val="595"/>
-              </a:spcBef>
-              <a:spcAft>
-                <a:spcPts val="0"/>
-              </a:spcAft>
-              <a:buSzPts val="1700"/>
-              <a:buChar char="•"/>
-            </a:pPr>
-            <a:r>
-              <a:rPr lang="en-US">
-                <a:latin typeface="Helvetica Neue"/>
-                <a:ea typeface="Helvetica Neue"/>
-                <a:cs typeface="Helvetica Neue"/>
-                <a:sym typeface="Helvetica Neue"/>
-              </a:rPr>
-              <a:t>If all nodes are required for system to function, failure of even one node stops system functioning.</a:t>
-            </a:r>
-            <a:endParaRPr/>
-          </a:p>
-          <a:p>
-            <a:pPr indent="-285750" lvl="1" marL="742950" rtl="0" algn="l">
-              <a:spcBef>
-                <a:spcPts val="595"/>
-              </a:spcBef>
-              <a:spcAft>
-                <a:spcPts val="0"/>
-              </a:spcAft>
-              <a:buSzPts val="1870"/>
-              <a:buChar char="•"/>
-            </a:pPr>
-            <a:r>
-              <a:rPr lang="en-US">
-                <a:latin typeface="Helvetica Neue"/>
-                <a:ea typeface="Helvetica Neue"/>
-                <a:cs typeface="Helvetica Neue"/>
-                <a:sym typeface="Helvetica Neue"/>
-              </a:rPr>
-              <a:t>Higher system availability through redundancy</a:t>
-            </a:r>
-            <a:endParaRPr/>
-          </a:p>
-          <a:p>
-            <a:pPr indent="-228600" lvl="2" marL="1085850" rtl="0" algn="l">
-              <a:spcBef>
-                <a:spcPts val="595"/>
-              </a:spcBef>
-              <a:spcAft>
-                <a:spcPts val="0"/>
-              </a:spcAft>
-              <a:buSzPts val="1445"/>
-              <a:buChar char="▪"/>
-            </a:pPr>
-            <a:r>
-              <a:rPr lang="en-US">
-                <a:latin typeface="Helvetica Neue"/>
-                <a:ea typeface="Helvetica Neue"/>
-                <a:cs typeface="Helvetica Neue"/>
-                <a:sym typeface="Helvetica Neue"/>
-              </a:rPr>
-              <a:t>data can be replicated at remote sites, and system can function even if a site fails.</a:t>
-            </a:r>
-            <a:endParaRPr/>
-          </a:p>
-          <a:p>
-            <a:pPr indent="-234950" lvl="0" marL="342900" rtl="0" algn="l">
-              <a:spcBef>
-                <a:spcPts val="595"/>
-              </a:spcBef>
-              <a:spcAft>
-                <a:spcPts val="0"/>
-              </a:spcAft>
-              <a:buSzPts val="1700"/>
-              <a:buNone/>
-            </a:pPr>
-            <a:r>
-              <a:t/>
-            </a:r>
-            <a:endParaRPr b="1">
-              <a:latin typeface="Helvetica Neue"/>
-              <a:ea typeface="Helvetica Neue"/>
-              <a:cs typeface="Helvetica Neue"/>
-              <a:sym typeface="Helvetica Neue"/>
-            </a:endParaRPr>
-          </a:p>
-          <a:p>
-            <a:pPr indent="-224155" lvl="0" marL="342900" rtl="0" algn="l">
-              <a:spcBef>
-                <a:spcPts val="595"/>
-              </a:spcBef>
-              <a:spcAft>
-                <a:spcPts val="0"/>
-              </a:spcAft>
-              <a:buSzPts val="1870"/>
-              <a:buFont typeface="Noto Sans Symbols"/>
-              <a:buNone/>
-            </a:pPr>
-            <a:r>
-              <a:t/>
-            </a:r>
-            <a:endParaRPr/>
           </a:p>
         </p:txBody>
       </p:sp>
@@ -27603,7 +29375,7 @@
   <p:cSld>
     <p:spTree>
       <p:nvGrpSpPr>
-        <p:cNvPr id="360" name="Shape 360"/>
+        <p:cNvPr id="369" name="Shape 369"/>
         <p:cNvGrpSpPr/>
         <p:nvPr/>
       </p:nvGrpSpPr>
@@ -27617,7 +29389,847 @@
       </p:grpSpPr>
       <p:sp>
         <p:nvSpPr>
-          <p:cNvPr id="361" name="Google Shape;361;p39"/>
+          <p:cNvPr id="370" name="Google Shape;370;p37"/>
+          <p:cNvSpPr txBox="1"/>
+          <p:nvPr>
+            <p:ph type="title"/>
+          </p:nvPr>
+        </p:nvSpPr>
+        <p:spPr>
+          <a:xfrm>
+            <a:off x="768350" y="492897"/>
+            <a:ext cx="8077200" cy="217317"/>
+          </a:xfrm>
+          <a:prstGeom prst="rect">
+            <a:avLst/>
+          </a:prstGeom>
+          <a:noFill/>
+          <a:ln>
+            <a:noFill/>
+          </a:ln>
+        </p:spPr>
+        <p:txBody>
+          <a:bodyPr anchorCtr="0" anchor="b" bIns="45700" lIns="91425" spcFirstLastPara="1" rIns="91425" wrap="square" tIns="45700">
+            <a:noAutofit/>
+          </a:bodyPr>
+          <a:lstStyle/>
+          <a:p>
+            <a:pPr indent="0" lvl="0" marL="0" rtl="0" algn="ctr">
+              <a:spcBef>
+                <a:spcPts val="0"/>
+              </a:spcBef>
+              <a:spcAft>
+                <a:spcPts val="0"/>
+              </a:spcAft>
+              <a:buNone/>
+            </a:pPr>
+            <a:r>
+              <a:rPr lang="en-US">
+                <a:latin typeface="Helvetica Neue"/>
+                <a:ea typeface="Helvetica Neue"/>
+                <a:cs typeface="Helvetica Neue"/>
+                <a:sym typeface="Helvetica Neue"/>
+              </a:rPr>
+              <a:t>Data Integration and Distributed Databases</a:t>
+            </a:r>
+            <a:endParaRPr/>
+          </a:p>
+        </p:txBody>
+      </p:sp>
+      <p:sp>
+        <p:nvSpPr>
+          <p:cNvPr id="371" name="Google Shape;371;p37"/>
+          <p:cNvSpPr txBox="1"/>
+          <p:nvPr>
+            <p:ph idx="1" type="body"/>
+          </p:nvPr>
+        </p:nvSpPr>
+        <p:spPr>
+          <a:xfrm>
+            <a:off x="674703" y="1047565"/>
+            <a:ext cx="7759084" cy="5422903"/>
+          </a:xfrm>
+          <a:prstGeom prst="rect">
+            <a:avLst/>
+          </a:prstGeom>
+          <a:noFill/>
+          <a:ln>
+            <a:noFill/>
+          </a:ln>
+        </p:spPr>
+        <p:txBody>
+          <a:bodyPr anchorCtr="0" anchor="t" bIns="45700" lIns="91425" spcFirstLastPara="1" rIns="91425" wrap="square" tIns="45700">
+            <a:noAutofit/>
+          </a:bodyPr>
+          <a:lstStyle/>
+          <a:p>
+            <a:pPr indent="-342900" lvl="0" marL="342900" rtl="0" algn="l">
+              <a:spcBef>
+                <a:spcPts val="0"/>
+              </a:spcBef>
+              <a:spcAft>
+                <a:spcPts val="0"/>
+              </a:spcAft>
+              <a:buSzPts val="1700"/>
+              <a:buChar char="▪"/>
+            </a:pPr>
+            <a:r>
+              <a:rPr lang="en-US">
+                <a:latin typeface="Helvetica Neue"/>
+                <a:ea typeface="Helvetica Neue"/>
+                <a:cs typeface="Helvetica Neue"/>
+                <a:sym typeface="Helvetica Neue"/>
+              </a:rPr>
+              <a:t>Data integration between multiple distributed databases</a:t>
+            </a:r>
+            <a:endParaRPr/>
+          </a:p>
+          <a:p>
+            <a:pPr indent="-342900" lvl="0" marL="342900" rtl="0" algn="l">
+              <a:spcBef>
+                <a:spcPts val="595"/>
+              </a:spcBef>
+              <a:spcAft>
+                <a:spcPts val="0"/>
+              </a:spcAft>
+              <a:buSzPts val="1700"/>
+              <a:buChar char="▪"/>
+            </a:pPr>
+            <a:r>
+              <a:rPr lang="en-US">
+                <a:latin typeface="Helvetica Neue"/>
+                <a:ea typeface="Helvetica Neue"/>
+                <a:cs typeface="Helvetica Neue"/>
+                <a:sym typeface="Helvetica Neue"/>
+              </a:rPr>
+              <a:t>Benefits:</a:t>
+            </a:r>
+            <a:endParaRPr/>
+          </a:p>
+          <a:p>
+            <a:pPr indent="-285750" lvl="1" marL="742950" rtl="0" algn="l">
+              <a:spcBef>
+                <a:spcPts val="595"/>
+              </a:spcBef>
+              <a:spcAft>
+                <a:spcPts val="0"/>
+              </a:spcAft>
+              <a:buSzPts val="1870"/>
+              <a:buChar char="•"/>
+            </a:pPr>
+            <a:r>
+              <a:rPr lang="en-US">
+                <a:latin typeface="Helvetica Neue"/>
+                <a:ea typeface="Helvetica Neue"/>
+                <a:cs typeface="Helvetica Neue"/>
+                <a:sym typeface="Helvetica Neue"/>
+              </a:rPr>
+              <a:t>Sharing data – users at one site able to access the data residing at some other sites.</a:t>
+            </a:r>
+            <a:endParaRPr/>
+          </a:p>
+          <a:p>
+            <a:pPr indent="0" lvl="0" marL="457200" rtl="0" algn="l">
+              <a:lnSpc>
+                <a:spcPct val="115000"/>
+              </a:lnSpc>
+              <a:spcBef>
+                <a:spcPts val="1200"/>
+              </a:spcBef>
+              <a:spcAft>
+                <a:spcPts val="0"/>
+              </a:spcAft>
+              <a:buNone/>
+            </a:pPr>
+            <a:r>
+              <a:rPr b="1" lang="en-US" sz="1300">
+                <a:latin typeface="Courier New"/>
+                <a:ea typeface="Courier New"/>
+                <a:cs typeface="Courier New"/>
+                <a:sym typeface="Courier New"/>
+              </a:rPr>
+              <a:t>Example:</a:t>
+            </a:r>
+            <a:endParaRPr b="1" sz="1300">
+              <a:latin typeface="Courier New"/>
+              <a:ea typeface="Courier New"/>
+              <a:cs typeface="Courier New"/>
+              <a:sym typeface="Courier New"/>
+            </a:endParaRPr>
+          </a:p>
+          <a:p>
+            <a:pPr indent="-311150" lvl="0" marL="914400" rtl="0" algn="l">
+              <a:lnSpc>
+                <a:spcPct val="115000"/>
+              </a:lnSpc>
+              <a:spcBef>
+                <a:spcPts val="1200"/>
+              </a:spcBef>
+              <a:spcAft>
+                <a:spcPts val="0"/>
+              </a:spcAft>
+              <a:buClr>
+                <a:schemeClr val="dk1"/>
+              </a:buClr>
+              <a:buSzPts val="1300"/>
+              <a:buFont typeface="Arial"/>
+              <a:buChar char="●"/>
+            </a:pPr>
+            <a:r>
+              <a:rPr lang="en-US" sz="1300">
+                <a:latin typeface="Courier New"/>
+                <a:ea typeface="Courier New"/>
+                <a:cs typeface="Courier New"/>
+                <a:sym typeface="Courier New"/>
+              </a:rPr>
+              <a:t>A </a:t>
+            </a:r>
+            <a:r>
+              <a:rPr b="1" lang="en-US" sz="1300">
+                <a:latin typeface="Courier New"/>
+                <a:ea typeface="Courier New"/>
+                <a:cs typeface="Courier New"/>
+                <a:sym typeface="Courier New"/>
+              </a:rPr>
+              <a:t>university</a:t>
+            </a:r>
+            <a:r>
+              <a:rPr lang="en-US" sz="1300">
+                <a:latin typeface="Courier New"/>
+                <a:ea typeface="Courier New"/>
+                <a:cs typeface="Courier New"/>
+                <a:sym typeface="Courier New"/>
+              </a:rPr>
+              <a:t> has a distributed database: one part stores </a:t>
+            </a:r>
+            <a:r>
+              <a:rPr b="1" lang="en-US" sz="1300">
+                <a:latin typeface="Courier New"/>
+                <a:ea typeface="Courier New"/>
+                <a:cs typeface="Courier New"/>
+                <a:sym typeface="Courier New"/>
+              </a:rPr>
+              <a:t>student records</a:t>
+            </a:r>
+            <a:r>
+              <a:rPr lang="en-US" sz="1300">
+                <a:latin typeface="Courier New"/>
+                <a:ea typeface="Courier New"/>
+                <a:cs typeface="Courier New"/>
+                <a:sym typeface="Courier New"/>
+              </a:rPr>
+              <a:t>, another stores </a:t>
+            </a:r>
+            <a:r>
+              <a:rPr b="1" lang="en-US" sz="1300">
+                <a:latin typeface="Courier New"/>
+                <a:ea typeface="Courier New"/>
+                <a:cs typeface="Courier New"/>
+                <a:sym typeface="Courier New"/>
+              </a:rPr>
+              <a:t>financial information</a:t>
+            </a:r>
+            <a:r>
+              <a:rPr lang="en-US" sz="1300">
+                <a:latin typeface="Courier New"/>
+                <a:ea typeface="Courier New"/>
+                <a:cs typeface="Courier New"/>
+                <a:sym typeface="Courier New"/>
+              </a:rPr>
+              <a:t>, and a third stores </a:t>
+            </a:r>
+            <a:r>
+              <a:rPr b="1" lang="en-US" sz="1300">
+                <a:latin typeface="Courier New"/>
+                <a:ea typeface="Courier New"/>
+                <a:cs typeface="Courier New"/>
+                <a:sym typeface="Courier New"/>
+              </a:rPr>
+              <a:t>library data</a:t>
+            </a:r>
+            <a:r>
+              <a:rPr lang="en-US" sz="1300">
+                <a:latin typeface="Courier New"/>
+                <a:ea typeface="Courier New"/>
+                <a:cs typeface="Courier New"/>
+                <a:sym typeface="Courier New"/>
+              </a:rPr>
+              <a:t>, each on different servers or campuses.</a:t>
+            </a:r>
+            <a:endParaRPr sz="1300">
+              <a:latin typeface="Courier New"/>
+              <a:ea typeface="Courier New"/>
+              <a:cs typeface="Courier New"/>
+              <a:sym typeface="Courier New"/>
+            </a:endParaRPr>
+          </a:p>
+          <a:p>
+            <a:pPr indent="-311150" lvl="0" marL="914400" rtl="0" algn="l">
+              <a:lnSpc>
+                <a:spcPct val="115000"/>
+              </a:lnSpc>
+              <a:spcBef>
+                <a:spcPts val="0"/>
+              </a:spcBef>
+              <a:spcAft>
+                <a:spcPts val="0"/>
+              </a:spcAft>
+              <a:buClr>
+                <a:schemeClr val="dk1"/>
+              </a:buClr>
+              <a:buSzPts val="1300"/>
+              <a:buFont typeface="Arial"/>
+              <a:buChar char="●"/>
+            </a:pPr>
+            <a:r>
+              <a:rPr lang="en-US" sz="1300">
+                <a:latin typeface="Courier New"/>
+                <a:ea typeface="Courier New"/>
+                <a:cs typeface="Courier New"/>
+                <a:sym typeface="Courier New"/>
+              </a:rPr>
+              <a:t>A student advisor can pull data from </a:t>
+            </a:r>
+            <a:r>
+              <a:rPr b="1" lang="en-US" sz="1300">
+                <a:latin typeface="Courier New"/>
+                <a:ea typeface="Courier New"/>
+                <a:cs typeface="Courier New"/>
+                <a:sym typeface="Courier New"/>
+              </a:rPr>
+              <a:t>all three databases</a:t>
+            </a:r>
+            <a:r>
+              <a:rPr lang="en-US" sz="1300">
+                <a:latin typeface="Courier New"/>
+                <a:ea typeface="Courier New"/>
+                <a:cs typeface="Courier New"/>
+                <a:sym typeface="Courier New"/>
+              </a:rPr>
+              <a:t> through a single query interface — even though the data is stored on different systems.</a:t>
+            </a:r>
+            <a:endParaRPr/>
+          </a:p>
+          <a:p>
+            <a:pPr indent="-285750" lvl="1" marL="742950" rtl="0" algn="l">
+              <a:spcBef>
+                <a:spcPts val="595"/>
+              </a:spcBef>
+              <a:spcAft>
+                <a:spcPts val="0"/>
+              </a:spcAft>
+              <a:buSzPts val="1870"/>
+              <a:buChar char="•"/>
+            </a:pPr>
+            <a:r>
+              <a:rPr lang="en-US">
+                <a:latin typeface="Helvetica Neue"/>
+                <a:ea typeface="Helvetica Neue"/>
+                <a:cs typeface="Helvetica Neue"/>
+                <a:sym typeface="Helvetica Neue"/>
+              </a:rPr>
+              <a:t>Autonomy – each site is able to retain a degree of control over data stored locally.</a:t>
+            </a:r>
+            <a:endParaRPr>
+              <a:latin typeface="Helvetica Neue"/>
+              <a:ea typeface="Helvetica Neue"/>
+              <a:cs typeface="Helvetica Neue"/>
+              <a:sym typeface="Helvetica Neue"/>
+            </a:endParaRPr>
+          </a:p>
+          <a:p>
+            <a:pPr indent="-219392" lvl="2" marL="1085850" rtl="0" algn="l">
+              <a:spcBef>
+                <a:spcPts val="595"/>
+              </a:spcBef>
+              <a:spcAft>
+                <a:spcPts val="0"/>
+              </a:spcAft>
+              <a:buSzPts val="1300"/>
+              <a:buChar char="▪"/>
+            </a:pPr>
+            <a:r>
+              <a:rPr lang="en-US" sz="1300">
+                <a:latin typeface="Courier New"/>
+                <a:ea typeface="Courier New"/>
+                <a:cs typeface="Courier New"/>
+                <a:sym typeface="Courier New"/>
+              </a:rPr>
+              <a:t>In a </a:t>
+            </a:r>
+            <a:r>
+              <a:rPr b="1" lang="en-US" sz="1300">
+                <a:latin typeface="Courier New"/>
+                <a:ea typeface="Courier New"/>
+                <a:cs typeface="Courier New"/>
+                <a:sym typeface="Courier New"/>
+              </a:rPr>
+              <a:t>supply chain network</a:t>
+            </a:r>
+            <a:r>
+              <a:rPr lang="en-US" sz="1300">
+                <a:latin typeface="Courier New"/>
+                <a:ea typeface="Courier New"/>
+                <a:cs typeface="Courier New"/>
+                <a:sym typeface="Courier New"/>
+              </a:rPr>
+              <a:t>, each company (manufacturer, distributor, retailer) maintains its own database.</a:t>
+            </a:r>
+            <a:endParaRPr sz="1300">
+              <a:latin typeface="Courier New"/>
+              <a:ea typeface="Courier New"/>
+              <a:cs typeface="Courier New"/>
+              <a:sym typeface="Courier New"/>
+            </a:endParaRPr>
+          </a:p>
+          <a:p>
+            <a:pPr indent="-219392" lvl="2" marL="1085850" rtl="0" algn="l">
+              <a:spcBef>
+                <a:spcPts val="595"/>
+              </a:spcBef>
+              <a:spcAft>
+                <a:spcPts val="0"/>
+              </a:spcAft>
+              <a:buSzPts val="1300"/>
+              <a:buChar char="▪"/>
+            </a:pPr>
+            <a:r>
+              <a:rPr lang="en-US" sz="1300">
+                <a:latin typeface="Courier New"/>
+                <a:ea typeface="Courier New"/>
+                <a:cs typeface="Courier New"/>
+                <a:sym typeface="Courier New"/>
+              </a:rPr>
+              <a:t>They integrate their systems for </a:t>
+            </a:r>
+            <a:r>
+              <a:rPr b="1" lang="en-US" sz="1300">
+                <a:latin typeface="Courier New"/>
+                <a:ea typeface="Courier New"/>
+                <a:cs typeface="Courier New"/>
+                <a:sym typeface="Courier New"/>
+              </a:rPr>
+              <a:t>inventory tracking or order management</a:t>
+            </a:r>
+            <a:r>
+              <a:rPr lang="en-US" sz="1300">
+                <a:latin typeface="Courier New"/>
+                <a:ea typeface="Courier New"/>
+                <a:cs typeface="Courier New"/>
+                <a:sym typeface="Courier New"/>
+              </a:rPr>
+              <a:t>, but each company still decides how its database is structured, who can access it, and how updates are made.</a:t>
+            </a:r>
+            <a:endParaRPr sz="1300">
+              <a:latin typeface="Courier New"/>
+              <a:ea typeface="Courier New"/>
+              <a:cs typeface="Courier New"/>
+              <a:sym typeface="Courier New"/>
+            </a:endParaRPr>
+          </a:p>
+          <a:p>
+            <a:pPr indent="0" lvl="0" marL="0" rtl="0" algn="l">
+              <a:spcBef>
+                <a:spcPts val="595"/>
+              </a:spcBef>
+              <a:spcAft>
+                <a:spcPts val="0"/>
+              </a:spcAft>
+              <a:buSzPts val="1870"/>
+              <a:buNone/>
+            </a:pPr>
+            <a:r>
+              <a:t/>
+            </a:r>
+            <a:endParaRPr>
+              <a:latin typeface="Helvetica Neue"/>
+              <a:ea typeface="Helvetica Neue"/>
+              <a:cs typeface="Helvetica Neue"/>
+              <a:sym typeface="Helvetica Neue"/>
+            </a:endParaRPr>
+          </a:p>
+          <a:p>
+            <a:pPr indent="-224155" lvl="0" marL="342900" rtl="0" algn="l">
+              <a:spcBef>
+                <a:spcPts val="595"/>
+              </a:spcBef>
+              <a:spcAft>
+                <a:spcPts val="0"/>
+              </a:spcAft>
+              <a:buSzPts val="1870"/>
+              <a:buFont typeface="Noto Sans Symbols"/>
+              <a:buNone/>
+            </a:pPr>
+            <a:r>
+              <a:t/>
+            </a:r>
+            <a:endParaRPr>
+              <a:latin typeface="Helvetica Neue"/>
+              <a:ea typeface="Helvetica Neue"/>
+              <a:cs typeface="Helvetica Neue"/>
+              <a:sym typeface="Helvetica Neue"/>
+            </a:endParaRPr>
+          </a:p>
+        </p:txBody>
+      </p:sp>
+    </p:spTree>
+  </p:cSld>
+  <p:clrMapOvr>
+    <a:masterClrMapping/>
+  </p:clrMapOvr>
+</p:sld>
+</file>
+
+<file path=ppt/slides/slide41.xml><?xml version="1.0" encoding="utf-8"?>
+<p:sld xmlns:a="http://schemas.openxmlformats.org/drawingml/2006/main" xmlns:r="http://schemas.openxmlformats.org/officeDocument/2006/relationships" xmlns:mc="http://schemas.openxmlformats.org/markup-compatibility/2006" xmlns:mv="urn:schemas-microsoft-com:mac:vml" xmlns:p="http://schemas.openxmlformats.org/presentationml/2006/main" xmlns:c="http://schemas.openxmlformats.org/drawingml/2006/chart" xmlns:dgm="http://schemas.openxmlformats.org/drawingml/2006/diagram" xmlns:o="urn:schemas-microsoft-com:office:office" xmlns:v="urn:schemas-microsoft-com:vml" xmlns:pvml="urn:schemas-microsoft-com:office:powerpoint" xmlns:com="http://schemas.openxmlformats.org/drawingml/2006/compatibility" xmlns:p14="http://schemas.microsoft.com/office/powerpoint/2010/main" xmlns:p15="http://schemas.microsoft.com/office/powerpoint/2012/main" xmlns:ahyp="http://schemas.microsoft.com/office/drawing/2018/hyperlinkcolor">
+  <p:cSld>
+    <p:spTree>
+      <p:nvGrpSpPr>
+        <p:cNvPr id="375" name="Shape 375"/>
+        <p:cNvGrpSpPr/>
+        <p:nvPr/>
+      </p:nvGrpSpPr>
+      <p:grpSpPr>
+        <a:xfrm>
+          <a:off x="0" y="0"/>
+          <a:ext cx="0" cy="0"/>
+          <a:chOff x="0" y="0"/>
+          <a:chExt cx="0" cy="0"/>
+        </a:xfrm>
+      </p:grpSpPr>
+      <p:sp>
+        <p:nvSpPr>
+          <p:cNvPr id="376" name="Google Shape;376;p38"/>
+          <p:cNvSpPr txBox="1"/>
+          <p:nvPr>
+            <p:ph type="title"/>
+          </p:nvPr>
+        </p:nvSpPr>
+        <p:spPr>
+          <a:xfrm>
+            <a:off x="768350" y="117475"/>
+            <a:ext cx="7689850" cy="609600"/>
+          </a:xfrm>
+          <a:prstGeom prst="rect">
+            <a:avLst/>
+          </a:prstGeom>
+          <a:noFill/>
+          <a:ln>
+            <a:noFill/>
+          </a:ln>
+        </p:spPr>
+        <p:txBody>
+          <a:bodyPr anchorCtr="0" anchor="b" bIns="45700" lIns="91425" spcFirstLastPara="1" rIns="91425" wrap="square" tIns="45700">
+            <a:noAutofit/>
+          </a:bodyPr>
+          <a:lstStyle/>
+          <a:p>
+            <a:pPr indent="0" lvl="0" marL="0" rtl="0" algn="ctr">
+              <a:spcBef>
+                <a:spcPts val="0"/>
+              </a:spcBef>
+              <a:spcAft>
+                <a:spcPts val="0"/>
+              </a:spcAft>
+              <a:buNone/>
+            </a:pPr>
+            <a:r>
+              <a:rPr lang="en-US"/>
+              <a:t>Availability</a:t>
+            </a:r>
+            <a:endParaRPr/>
+          </a:p>
+        </p:txBody>
+      </p:sp>
+      <p:sp>
+        <p:nvSpPr>
+          <p:cNvPr id="377" name="Google Shape;377;p38"/>
+          <p:cNvSpPr txBox="1"/>
+          <p:nvPr>
+            <p:ph idx="1" type="body"/>
+          </p:nvPr>
+        </p:nvSpPr>
+        <p:spPr>
+          <a:xfrm>
+            <a:off x="665825" y="1102497"/>
+            <a:ext cx="7723573" cy="5367972"/>
+          </a:xfrm>
+          <a:prstGeom prst="rect">
+            <a:avLst/>
+          </a:prstGeom>
+          <a:noFill/>
+          <a:ln>
+            <a:noFill/>
+          </a:ln>
+        </p:spPr>
+        <p:txBody>
+          <a:bodyPr anchorCtr="0" anchor="t" bIns="45700" lIns="91425" spcFirstLastPara="1" rIns="91425" wrap="square" tIns="45700">
+            <a:noAutofit/>
+          </a:bodyPr>
+          <a:lstStyle/>
+          <a:p>
+            <a:pPr indent="-342900" lvl="0" marL="342900" rtl="0" algn="l">
+              <a:spcBef>
+                <a:spcPts val="0"/>
+              </a:spcBef>
+              <a:spcAft>
+                <a:spcPts val="0"/>
+              </a:spcAft>
+              <a:buSzPts val="1700"/>
+              <a:buChar char="▪"/>
+            </a:pPr>
+            <a:r>
+              <a:rPr b="1" lang="en-US">
+                <a:solidFill>
+                  <a:srgbClr val="002060"/>
+                </a:solidFill>
+                <a:latin typeface="Helvetica Neue"/>
+                <a:ea typeface="Helvetica Neue"/>
+                <a:cs typeface="Helvetica Neue"/>
+                <a:sym typeface="Helvetica Neue"/>
+              </a:rPr>
+              <a:t>Network </a:t>
+            </a:r>
+            <a:r>
+              <a:rPr b="1" lang="en-US">
+                <a:solidFill>
+                  <a:srgbClr val="002060"/>
+                </a:solidFill>
+              </a:rPr>
+              <a:t>P</a:t>
+            </a:r>
+            <a:r>
+              <a:rPr b="1" lang="en-US">
+                <a:solidFill>
+                  <a:srgbClr val="002060"/>
+                </a:solidFill>
+                <a:latin typeface="Helvetica Neue"/>
+                <a:ea typeface="Helvetica Neue"/>
+                <a:cs typeface="Helvetica Neue"/>
+                <a:sym typeface="Helvetica Neue"/>
+              </a:rPr>
+              <a:t>artitioning: </a:t>
+            </a:r>
+            <a:r>
+              <a:rPr lang="en-US" sz="1300">
+                <a:latin typeface="Courier New"/>
+                <a:ea typeface="Courier New"/>
+                <a:cs typeface="Courier New"/>
+                <a:sym typeface="Courier New"/>
+              </a:rPr>
+              <a:t>A </a:t>
+            </a:r>
+            <a:r>
+              <a:rPr b="1" lang="en-US" sz="1300">
+                <a:latin typeface="Courier New"/>
+                <a:ea typeface="Courier New"/>
+                <a:cs typeface="Courier New"/>
+                <a:sym typeface="Courier New"/>
+              </a:rPr>
+              <a:t>network partition</a:t>
+            </a:r>
+            <a:r>
+              <a:rPr lang="en-US" sz="1300">
+                <a:latin typeface="Courier New"/>
+                <a:ea typeface="Courier New"/>
+                <a:cs typeface="Courier New"/>
+                <a:sym typeface="Courier New"/>
+              </a:rPr>
+              <a:t> occurs when </a:t>
+            </a:r>
+            <a:r>
+              <a:rPr b="1" lang="en-US" sz="1300">
+                <a:latin typeface="Courier New"/>
+                <a:ea typeface="Courier New"/>
+                <a:cs typeface="Courier New"/>
+                <a:sym typeface="Courier New"/>
+              </a:rPr>
+              <a:t>communication between parts of a distributed system is disrupted</a:t>
+            </a:r>
+            <a:r>
+              <a:rPr lang="en-US" sz="1300">
+                <a:latin typeface="Courier New"/>
+                <a:ea typeface="Courier New"/>
+                <a:cs typeface="Courier New"/>
+                <a:sym typeface="Courier New"/>
+              </a:rPr>
+              <a:t> — nodes are split into isolated "partitions" that can't talk to each other, even though they may still be running.</a:t>
+            </a:r>
+            <a:endParaRPr sz="1300">
+              <a:latin typeface="Courier New"/>
+              <a:ea typeface="Courier New"/>
+              <a:cs typeface="Courier New"/>
+              <a:sym typeface="Courier New"/>
+            </a:endParaRPr>
+          </a:p>
+          <a:p>
+            <a:pPr indent="-342900" lvl="0" marL="342900" rtl="0" algn="l">
+              <a:spcBef>
+                <a:spcPts val="595"/>
+              </a:spcBef>
+              <a:spcAft>
+                <a:spcPts val="0"/>
+              </a:spcAft>
+              <a:buSzPts val="1700"/>
+              <a:buChar char="▪"/>
+            </a:pPr>
+            <a:r>
+              <a:rPr b="1" lang="en-US">
+                <a:solidFill>
+                  <a:srgbClr val="002060"/>
+                </a:solidFill>
+                <a:latin typeface="Helvetica Neue"/>
+                <a:ea typeface="Helvetica Neue"/>
+                <a:cs typeface="Helvetica Neue"/>
+                <a:sym typeface="Helvetica Neue"/>
+              </a:rPr>
+              <a:t>Availability </a:t>
+            </a:r>
+            <a:r>
+              <a:rPr lang="en-US">
+                <a:latin typeface="Helvetica Neue"/>
+                <a:ea typeface="Helvetica Neue"/>
+                <a:cs typeface="Helvetica Neue"/>
+                <a:sym typeface="Helvetica Neue"/>
+              </a:rPr>
+              <a:t>of system</a:t>
+            </a:r>
+            <a:endParaRPr/>
+          </a:p>
+          <a:p>
+            <a:pPr indent="-285750" lvl="1" marL="742950" rtl="0" algn="l">
+              <a:spcBef>
+                <a:spcPts val="595"/>
+              </a:spcBef>
+              <a:spcAft>
+                <a:spcPts val="0"/>
+              </a:spcAft>
+              <a:buSzPts val="1700"/>
+              <a:buChar char="•"/>
+            </a:pPr>
+            <a:r>
+              <a:rPr lang="en-US">
+                <a:latin typeface="Helvetica Neue"/>
+                <a:ea typeface="Helvetica Neue"/>
+                <a:cs typeface="Helvetica Neue"/>
+                <a:sym typeface="Helvetica Neue"/>
+              </a:rPr>
+              <a:t>If all nodes are required for system to function, failure of even one node stops system functioning.</a:t>
+            </a:r>
+            <a:endParaRPr/>
+          </a:p>
+          <a:p>
+            <a:pPr indent="-285750" lvl="1" marL="742950" rtl="0" algn="l">
+              <a:spcBef>
+                <a:spcPts val="595"/>
+              </a:spcBef>
+              <a:spcAft>
+                <a:spcPts val="0"/>
+              </a:spcAft>
+              <a:buSzPts val="1870"/>
+              <a:buChar char="•"/>
+            </a:pPr>
+            <a:r>
+              <a:rPr lang="en-US">
+                <a:latin typeface="Helvetica Neue"/>
+                <a:ea typeface="Helvetica Neue"/>
+                <a:cs typeface="Helvetica Neue"/>
+                <a:sym typeface="Helvetica Neue"/>
+              </a:rPr>
+              <a:t>Higher system availability through redundancy</a:t>
+            </a:r>
+            <a:endParaRPr/>
+          </a:p>
+          <a:p>
+            <a:pPr indent="-228600" lvl="2" marL="1085850" rtl="0" algn="l">
+              <a:spcBef>
+                <a:spcPts val="595"/>
+              </a:spcBef>
+              <a:spcAft>
+                <a:spcPts val="0"/>
+              </a:spcAft>
+              <a:buSzPts val="1445"/>
+              <a:buChar char="▪"/>
+            </a:pPr>
+            <a:r>
+              <a:rPr lang="en-US">
+                <a:latin typeface="Helvetica Neue"/>
+                <a:ea typeface="Helvetica Neue"/>
+                <a:cs typeface="Helvetica Neue"/>
+                <a:sym typeface="Helvetica Neue"/>
+              </a:rPr>
+              <a:t>data can be replicated at remote sites, and system can function even if a site fails.</a:t>
+            </a:r>
+            <a:endParaRPr/>
+          </a:p>
+          <a:p>
+            <a:pPr indent="-234950" lvl="0" marL="342900" rtl="0" algn="l">
+              <a:spcBef>
+                <a:spcPts val="595"/>
+              </a:spcBef>
+              <a:spcAft>
+                <a:spcPts val="0"/>
+              </a:spcAft>
+              <a:buSzPts val="1700"/>
+              <a:buNone/>
+            </a:pPr>
+            <a:r>
+              <a:t/>
+            </a:r>
+            <a:endParaRPr b="1">
+              <a:latin typeface="Helvetica Neue"/>
+              <a:ea typeface="Helvetica Neue"/>
+              <a:cs typeface="Helvetica Neue"/>
+              <a:sym typeface="Helvetica Neue"/>
+            </a:endParaRPr>
+          </a:p>
+          <a:p>
+            <a:pPr indent="-224155" lvl="0" marL="342900" rtl="0" algn="l">
+              <a:spcBef>
+                <a:spcPts val="595"/>
+              </a:spcBef>
+              <a:spcAft>
+                <a:spcPts val="0"/>
+              </a:spcAft>
+              <a:buSzPts val="1870"/>
+              <a:buFont typeface="Noto Sans Symbols"/>
+              <a:buNone/>
+            </a:pPr>
+            <a:r>
+              <a:t/>
+            </a:r>
+            <a:endParaRPr/>
+          </a:p>
+        </p:txBody>
+      </p:sp>
+    </p:spTree>
+  </p:cSld>
+  <p:clrMapOvr>
+    <a:masterClrMapping/>
+  </p:clrMapOvr>
+</p:sld>
+</file>
+
+<file path=ppt/slides/slide42.xml><?xml version="1.0" encoding="utf-8"?>
+<p:sld xmlns:a="http://schemas.openxmlformats.org/drawingml/2006/main" xmlns:r="http://schemas.openxmlformats.org/officeDocument/2006/relationships" xmlns:mc="http://schemas.openxmlformats.org/markup-compatibility/2006" xmlns:mv="urn:schemas-microsoft-com:mac:vml" xmlns:p="http://schemas.openxmlformats.org/presentationml/2006/main" xmlns:c="http://schemas.openxmlformats.org/drawingml/2006/chart" xmlns:dgm="http://schemas.openxmlformats.org/drawingml/2006/diagram" xmlns:o="urn:schemas-microsoft-com:office:office" xmlns:v="urn:schemas-microsoft-com:vml" xmlns:pvml="urn:schemas-microsoft-com:office:powerpoint" xmlns:com="http://schemas.openxmlformats.org/drawingml/2006/compatibility" xmlns:p14="http://schemas.microsoft.com/office/powerpoint/2010/main" xmlns:p15="http://schemas.microsoft.com/office/powerpoint/2012/main" xmlns:ahyp="http://schemas.microsoft.com/office/drawing/2018/hyperlinkcolor">
+  <p:cSld>
+    <p:spTree>
+      <p:nvGrpSpPr>
+        <p:cNvPr id="382" name="Shape 382"/>
+        <p:cNvGrpSpPr/>
+        <p:nvPr/>
+      </p:nvGrpSpPr>
+      <p:grpSpPr>
+        <a:xfrm>
+          <a:off x="0" y="0"/>
+          <a:ext cx="0" cy="0"/>
+          <a:chOff x="0" y="0"/>
+          <a:chExt cx="0" cy="0"/>
+        </a:xfrm>
+      </p:grpSpPr>
+      <p:sp>
+        <p:nvSpPr>
+          <p:cNvPr id="383" name="Google Shape;383;p39"/>
           <p:cNvSpPr txBox="1"/>
           <p:nvPr>
             <p:ph type="title"/>
@@ -27666,7 +30278,7 @@
       </p:sp>
       <p:sp>
         <p:nvSpPr>
-          <p:cNvPr id="362" name="Google Shape;362;p39"/>
+          <p:cNvPr id="384" name="Google Shape;384;p39"/>
           <p:cNvSpPr txBox="1"/>
           <p:nvPr>
             <p:ph idx="1" type="body"/>
@@ -27811,13 +30423,17 @@
               <a:buChar char="▪"/>
             </a:pPr>
             <a:r>
+              <a:rPr b="1" lang="en-US"/>
+              <a:t>2PC is not always appropriate</a:t>
+            </a:r>
+            <a:r>
               <a:rPr lang="en-US">
                 <a:latin typeface="Helvetica Neue"/>
                 <a:ea typeface="Helvetica Neue"/>
                 <a:cs typeface="Helvetica Neue"/>
                 <a:sym typeface="Helvetica Neue"/>
               </a:rPr>
-              <a:t>2PC is not always appropriate:  other transaction models based on persistent messaging, and workflows, are also used </a:t>
+              <a:t>:  other transaction models based on persistent messaging, and workflows, are also used </a:t>
             </a:r>
             <a:endParaRPr/>
           </a:p>
@@ -27833,13 +30449,17 @@
               <a:buChar char="▪"/>
             </a:pPr>
             <a:r>
+              <a:rPr b="1" lang="en-US"/>
+              <a:t>Distributed concurrency control </a:t>
+            </a:r>
+            <a:r>
               <a:rPr lang="en-US">
                 <a:latin typeface="Helvetica Neue"/>
                 <a:ea typeface="Helvetica Neue"/>
                 <a:cs typeface="Helvetica Neue"/>
                 <a:sym typeface="Helvetica Neue"/>
               </a:rPr>
-              <a:t>Distributed concurrency control (and deadlock detection) required</a:t>
+              <a:t>(and deadlock detection) required</a:t>
             </a:r>
             <a:endParaRPr/>
           </a:p>
@@ -27861,7 +30481,20 @@
                 <a:cs typeface="Helvetica Neue"/>
                 <a:sym typeface="Helvetica Neue"/>
               </a:rPr>
-              <a:t>Data items may be replicated to improve data availability</a:t>
+              <a:t>Data items may be</a:t>
+            </a:r>
+            <a:r>
+              <a:rPr b="1" lang="en-US"/>
+              <a:t> replicated</a:t>
+            </a:r>
+            <a:r>
+              <a:rPr lang="en-US">
+                <a:latin typeface="Helvetica Neue"/>
+                <a:ea typeface="Helvetica Neue"/>
+                <a:cs typeface="Helvetica Neue"/>
+                <a:sym typeface="Helvetica Neue"/>
+              </a:rPr>
+              <a:t> to improve data availability</a:t>
             </a:r>
             <a:endParaRPr/>
           </a:p>
@@ -27919,12 +30552,12 @@
 </p:sld>
 </file>
 
-<file path=ppt/slides/slide41.xml><?xml version="1.0" encoding="utf-8"?>
+<file path=ppt/slides/slide43.xml><?xml version="1.0" encoding="utf-8"?>
 <p:sld xmlns:a="http://schemas.openxmlformats.org/drawingml/2006/main" xmlns:r="http://schemas.openxmlformats.org/officeDocument/2006/relationships" xmlns:mc="http://schemas.openxmlformats.org/markup-compatibility/2006" xmlns:mv="urn:schemas-microsoft-com:mac:vml" xmlns:p="http://schemas.openxmlformats.org/presentationml/2006/main" xmlns:c="http://schemas.openxmlformats.org/drawingml/2006/chart" xmlns:dgm="http://schemas.openxmlformats.org/drawingml/2006/diagram" xmlns:o="urn:schemas-microsoft-com:office:office" xmlns:v="urn:schemas-microsoft-com:vml" xmlns:pvml="urn:schemas-microsoft-com:office:powerpoint" xmlns:com="http://schemas.openxmlformats.org/drawingml/2006/compatibility" xmlns:p14="http://schemas.microsoft.com/office/powerpoint/2010/main" xmlns:p15="http://schemas.microsoft.com/office/powerpoint/2012/main" xmlns:ahyp="http://schemas.microsoft.com/office/drawing/2018/hyperlinkcolor">
   <p:cSld>
     <p:spTree>
       <p:nvGrpSpPr>
-        <p:cNvPr id="366" name="Shape 366"/>
+        <p:cNvPr id="388" name="Shape 388"/>
         <p:cNvGrpSpPr/>
         <p:nvPr/>
       </p:nvGrpSpPr>
@@ -27938,7 +30571,7 @@
       </p:grpSpPr>
       <p:sp>
         <p:nvSpPr>
-          <p:cNvPr id="367" name="Google Shape;367;p40"/>
+          <p:cNvPr id="389" name="Google Shape;389;p40"/>
           <p:cNvSpPr txBox="1"/>
           <p:nvPr>
             <p:ph type="title"/>
@@ -27982,7 +30615,7 @@
       </p:sp>
       <p:sp>
         <p:nvSpPr>
-          <p:cNvPr id="368" name="Google Shape;368;p40"/>
+          <p:cNvPr id="390" name="Google Shape;390;p40"/>
           <p:cNvSpPr txBox="1"/>
           <p:nvPr>
             <p:ph idx="1" type="body"/>
@@ -28058,7 +30691,7 @@
                 <a:cs typeface="Helvetica Neue"/>
                 <a:sym typeface="Helvetica Neue"/>
               </a:rPr>
-              <a:t>elasticity</a:t>
+              <a:t>elasticity (Memory increase, processor increase)</a:t>
             </a:r>
             <a:endParaRPr/>
           </a:p>
@@ -28292,12 +30925,12 @@
 </p:sld>
 </file>
 
-<file path=ppt/slides/slide42.xml><?xml version="1.0" encoding="utf-8"?>
+<file path=ppt/slides/slide44.xml><?xml version="1.0" encoding="utf-8"?>
 <p:sld xmlns:a="http://schemas.openxmlformats.org/drawingml/2006/main" xmlns:r="http://schemas.openxmlformats.org/officeDocument/2006/relationships" xmlns:mc="http://schemas.openxmlformats.org/markup-compatibility/2006" xmlns:mv="urn:schemas-microsoft-com:mac:vml" xmlns:p="http://schemas.openxmlformats.org/presentationml/2006/main" xmlns:c="http://schemas.openxmlformats.org/drawingml/2006/chart" xmlns:dgm="http://schemas.openxmlformats.org/drawingml/2006/diagram" xmlns:o="urn:schemas-microsoft-com:office:office" xmlns:v="urn:schemas-microsoft-com:vml" xmlns:pvml="urn:schemas-microsoft-com:office:powerpoint" xmlns:com="http://schemas.openxmlformats.org/drawingml/2006/compatibility" xmlns:p14="http://schemas.microsoft.com/office/powerpoint/2010/main" xmlns:p15="http://schemas.microsoft.com/office/powerpoint/2012/main" xmlns:ahyp="http://schemas.microsoft.com/office/drawing/2018/hyperlinkcolor">
   <p:cSld>
     <p:spTree>
       <p:nvGrpSpPr>
-        <p:cNvPr id="372" name="Shape 372"/>
+        <p:cNvPr id="394" name="Shape 394"/>
         <p:cNvGrpSpPr/>
         <p:nvPr/>
       </p:nvGrpSpPr>
@@ -28311,7 +30944,7 @@
       </p:grpSpPr>
       <p:sp>
         <p:nvSpPr>
-          <p:cNvPr id="373" name="Google Shape;373;p41"/>
+          <p:cNvPr id="395" name="Google Shape;395;p41"/>
           <p:cNvSpPr txBox="1"/>
           <p:nvPr>
             <p:ph type="title"/>
@@ -28355,7 +30988,7 @@
       </p:sp>
       <p:pic>
         <p:nvPicPr>
-          <p:cNvPr descr="21_10-eps-converted-to.pdf" id="374" name="Google Shape;374;p41"/>
+          <p:cNvPr descr="21_10-eps-converted-to.pdf" id="396" name="Google Shape;396;p41"/>
           <p:cNvPicPr preferRelativeResize="0"/>
           <p:nvPr/>
         </p:nvPicPr>
@@ -28388,12 +31021,12 @@
 </p:sld>
 </file>
 
-<file path=ppt/slides/slide43.xml><?xml version="1.0" encoding="utf-8"?>
+<file path=ppt/slides/slide45.xml><?xml version="1.0" encoding="utf-8"?>
 <p:sld xmlns:a="http://schemas.openxmlformats.org/drawingml/2006/main" xmlns:r="http://schemas.openxmlformats.org/officeDocument/2006/relationships" xmlns:mc="http://schemas.openxmlformats.org/markup-compatibility/2006" xmlns:mv="urn:schemas-microsoft-com:mac:vml" xmlns:p="http://schemas.openxmlformats.org/presentationml/2006/main" xmlns:c="http://schemas.openxmlformats.org/drawingml/2006/chart" xmlns:dgm="http://schemas.openxmlformats.org/drawingml/2006/diagram" xmlns:o="urn:schemas-microsoft-com:office:office" xmlns:v="urn:schemas-microsoft-com:vml" xmlns:pvml="urn:schemas-microsoft-com:office:powerpoint" xmlns:com="http://schemas.openxmlformats.org/drawingml/2006/compatibility" xmlns:p14="http://schemas.microsoft.com/office/powerpoint/2010/main" xmlns:p15="http://schemas.microsoft.com/office/powerpoint/2012/main" xmlns:ahyp="http://schemas.microsoft.com/office/drawing/2018/hyperlinkcolor">
   <p:cSld>
     <p:spTree>
       <p:nvGrpSpPr>
-        <p:cNvPr id="378" name="Shape 378"/>
+        <p:cNvPr id="400" name="Shape 400"/>
         <p:cNvGrpSpPr/>
         <p:nvPr/>
       </p:nvGrpSpPr>
@@ -28407,7 +31040,7 @@
       </p:grpSpPr>
       <p:sp>
         <p:nvSpPr>
-          <p:cNvPr id="379" name="Google Shape;379;p42"/>
+          <p:cNvPr id="401" name="Google Shape;401;p42"/>
           <p:cNvSpPr txBox="1"/>
           <p:nvPr>
             <p:ph type="title"/>
@@ -28451,7 +31084,7 @@
       </p:sp>
       <p:pic>
         <p:nvPicPr>
-          <p:cNvPr id="380" name="Google Shape;380;p42"/>
+          <p:cNvPr id="402" name="Google Shape;402;p42"/>
           <p:cNvPicPr preferRelativeResize="0"/>
           <p:nvPr/>
         </p:nvPicPr>
@@ -28478,7 +31111,7 @@
       </p:pic>
       <p:sp>
         <p:nvSpPr>
-          <p:cNvPr id="381" name="Google Shape;381;p42"/>
+          <p:cNvPr id="403" name="Google Shape;403;p42"/>
           <p:cNvSpPr txBox="1"/>
           <p:nvPr/>
         </p:nvSpPr>
@@ -28557,12 +31190,12 @@
 </p:sld>
 </file>
 
-<file path=ppt/slides/slide44.xml><?xml version="1.0" encoding="utf-8"?>
+<file path=ppt/slides/slide46.xml><?xml version="1.0" encoding="utf-8"?>
 <p:sld xmlns:a="http://schemas.openxmlformats.org/drawingml/2006/main" xmlns:r="http://schemas.openxmlformats.org/officeDocument/2006/relationships" xmlns:mc="http://schemas.openxmlformats.org/markup-compatibility/2006" xmlns:mv="urn:schemas-microsoft-com:mac:vml" xmlns:p="http://schemas.openxmlformats.org/presentationml/2006/main" xmlns:c="http://schemas.openxmlformats.org/drawingml/2006/chart" xmlns:dgm="http://schemas.openxmlformats.org/drawingml/2006/diagram" xmlns:o="urn:schemas-microsoft-com:office:office" xmlns:v="urn:schemas-microsoft-com:vml" xmlns:pvml="urn:schemas-microsoft-com:office:powerpoint" xmlns:com="http://schemas.openxmlformats.org/drawingml/2006/compatibility" xmlns:p14="http://schemas.microsoft.com/office/powerpoint/2010/main" xmlns:p15="http://schemas.microsoft.com/office/powerpoint/2012/main" xmlns:ahyp="http://schemas.microsoft.com/office/drawing/2018/hyperlinkcolor">
   <p:cSld>
     <p:spTree>
       <p:nvGrpSpPr>
-        <p:cNvPr id="385" name="Shape 385"/>
+        <p:cNvPr id="407" name="Shape 407"/>
         <p:cNvGrpSpPr/>
         <p:nvPr/>
       </p:nvGrpSpPr>
@@ -28576,7 +31209,7 @@
       </p:grpSpPr>
       <p:sp>
         <p:nvSpPr>
-          <p:cNvPr id="386" name="Google Shape;386;p43"/>
+          <p:cNvPr id="408" name="Google Shape;408;p43"/>
           <p:cNvSpPr txBox="1"/>
           <p:nvPr>
             <p:ph type="title"/>
@@ -28620,7 +31253,7 @@
       </p:sp>
       <p:sp>
         <p:nvSpPr>
-          <p:cNvPr id="387" name="Google Shape;387;p43"/>
+          <p:cNvPr id="409" name="Google Shape;409;p43"/>
           <p:cNvSpPr txBox="1"/>
           <p:nvPr>
             <p:ph idx="1" type="body"/>
@@ -28742,12 +31375,12 @@
 </p:sld>
 </file>
 
-<file path=ppt/slides/slide45.xml><?xml version="1.0" encoding="utf-8"?>
+<file path=ppt/slides/slide47.xml><?xml version="1.0" encoding="utf-8"?>
 <p:sld xmlns:a="http://schemas.openxmlformats.org/drawingml/2006/main" xmlns:r="http://schemas.openxmlformats.org/officeDocument/2006/relationships" xmlns:mc="http://schemas.openxmlformats.org/markup-compatibility/2006" xmlns:mv="urn:schemas-microsoft-com:mac:vml" xmlns:p="http://schemas.openxmlformats.org/presentationml/2006/main" xmlns:c="http://schemas.openxmlformats.org/drawingml/2006/chart" xmlns:dgm="http://schemas.openxmlformats.org/drawingml/2006/diagram" xmlns:o="urn:schemas-microsoft-com:office:office" xmlns:v="urn:schemas-microsoft-com:vml" xmlns:pvml="urn:schemas-microsoft-com:office:powerpoint" xmlns:com="http://schemas.openxmlformats.org/drawingml/2006/compatibility" xmlns:p14="http://schemas.microsoft.com/office/powerpoint/2010/main" xmlns:p15="http://schemas.microsoft.com/office/powerpoint/2012/main" xmlns:ahyp="http://schemas.microsoft.com/office/drawing/2018/hyperlinkcolor">
   <p:cSld>
     <p:spTree>
       <p:nvGrpSpPr>
-        <p:cNvPr id="392" name="Shape 392"/>
+        <p:cNvPr id="414" name="Shape 414"/>
         <p:cNvGrpSpPr/>
         <p:nvPr/>
       </p:nvGrpSpPr>
@@ -28761,7 +31394,7 @@
       </p:grpSpPr>
       <p:sp>
         <p:nvSpPr>
-          <p:cNvPr id="393" name="Google Shape;393;p44"/>
+          <p:cNvPr id="415" name="Google Shape;415;p44"/>
           <p:cNvSpPr txBox="1"/>
           <p:nvPr>
             <p:ph type="ctrTitle"/>
@@ -28816,12 +31449,12 @@
 </p:sld>
 </file>
 
-<file path=ppt/slides/slide46.xml><?xml version="1.0" encoding="utf-8"?>
+<file path=ppt/slides/slide48.xml><?xml version="1.0" encoding="utf-8"?>
 <p:sld xmlns:a="http://schemas.openxmlformats.org/drawingml/2006/main" xmlns:r="http://schemas.openxmlformats.org/officeDocument/2006/relationships" xmlns:mc="http://schemas.openxmlformats.org/markup-compatibility/2006" xmlns:mv="urn:schemas-microsoft-com:mac:vml" xmlns:p="http://schemas.openxmlformats.org/presentationml/2006/main" xmlns:c="http://schemas.openxmlformats.org/drawingml/2006/chart" xmlns:dgm="http://schemas.openxmlformats.org/drawingml/2006/diagram" xmlns:o="urn:schemas-microsoft-com:office:office" xmlns:v="urn:schemas-microsoft-com:vml" xmlns:pvml="urn:schemas-microsoft-com:office:powerpoint" xmlns:com="http://schemas.openxmlformats.org/drawingml/2006/compatibility" xmlns:p14="http://schemas.microsoft.com/office/powerpoint/2010/main" xmlns:p15="http://schemas.microsoft.com/office/powerpoint/2012/main" xmlns:ahyp="http://schemas.microsoft.com/office/drawing/2018/hyperlinkcolor">
   <p:cSld>
     <p:spTree>
       <p:nvGrpSpPr>
-        <p:cNvPr id="398" name="Shape 398"/>
+        <p:cNvPr id="420" name="Shape 420"/>
         <p:cNvGrpSpPr/>
         <p:nvPr/>
       </p:nvGrpSpPr>
@@ -28835,7 +31468,7 @@
       </p:grpSpPr>
       <p:sp>
         <p:nvSpPr>
-          <p:cNvPr id="399" name="Google Shape;399;p45"/>
+          <p:cNvPr id="421" name="Google Shape;421;p45"/>
           <p:cNvSpPr txBox="1"/>
           <p:nvPr>
             <p:ph type="ctrTitle"/>
@@ -31238,6 +33871,285 @@
 </file>
 
 <file path=ppt/theme/theme1.xml><?xml version="1.0" encoding="utf-8"?>
+<a:theme xmlns:a="http://schemas.openxmlformats.org/drawingml/2006/main" xmlns:r="http://schemas.openxmlformats.org/officeDocument/2006/relationships" name="2_db-5-grey">
+  <a:themeElements>
+    <a:clrScheme name="">
+      <a:dk1>
+        <a:srgbClr val="000000"/>
+      </a:dk1>
+      <a:lt1>
+        <a:srgbClr val="CCECFF"/>
+      </a:lt1>
+      <a:dk2>
+        <a:srgbClr val="CC3300"/>
+      </a:dk2>
+      <a:lt2>
+        <a:srgbClr val="666699"/>
+      </a:lt2>
+      <a:accent1>
+        <a:srgbClr val="FFFFFF"/>
+      </a:accent1>
+      <a:accent2>
+        <a:srgbClr val="CCCC00"/>
+      </a:accent2>
+      <a:accent3>
+        <a:srgbClr val="E2F4FF"/>
+      </a:accent3>
+      <a:accent4>
+        <a:srgbClr val="000000"/>
+      </a:accent4>
+      <a:accent5>
+        <a:srgbClr val="FFFFFF"/>
+      </a:accent5>
+      <a:accent6>
+        <a:srgbClr val="B9B900"/>
+      </a:accent6>
+      <a:hlink>
+        <a:srgbClr val="FF9900"/>
+      </a:hlink>
+      <a:folHlink>
+        <a:srgbClr val="FF9933"/>
+      </a:folHlink>
+    </a:clrScheme>
+    <a:fontScheme name="Office">
+      <a:majorFont>
+        <a:latin typeface="Arial"/>
+        <a:ea typeface=""/>
+        <a:cs typeface=""/>
+        <a:font script="Jpan" typeface="ＭＳ Ｐゴシック"/>
+        <a:font script="Hang" typeface="맑은 고딕"/>
+        <a:font script="Hans" typeface="宋体"/>
+        <a:font script="Hant" typeface="新細明體"/>
+        <a:font script="Arab" typeface="Times New Roman"/>
+        <a:font script="Hebr" typeface="Times New Roman"/>
+        <a:font script="Thai" typeface="Angsana New"/>
+        <a:font script="Ethi" typeface="Nyala"/>
+        <a:font script="Beng" typeface="Vrinda"/>
+        <a:font script="Gujr" typeface="Shruti"/>
+        <a:font script="Khmr" typeface="MoolBoran"/>
+        <a:font script="Knda" typeface="Tunga"/>
+        <a:font script="Guru" typeface="Raavi"/>
+        <a:font script="Cans" typeface="Euphemia"/>
+        <a:font script="Cher" typeface="Plantagenet Cherokee"/>
+        <a:font script="Yiii" typeface="Microsoft Yi Baiti"/>
+        <a:font script="Tibt" typeface="Microsoft Himalaya"/>
+        <a:font script="Thaa" typeface="MV Boli"/>
+        <a:font script="Deva" typeface="Mangal"/>
+        <a:font script="Telu" typeface="Gautami"/>
+        <a:font script="Taml" typeface="Latha"/>
+        <a:font script="Syrc" typeface="Estrangelo Edessa"/>
+        <a:font script="Orya" typeface="Kalinga"/>
+        <a:font script="Mlym" typeface="Kartika"/>
+        <a:font script="Laoo" typeface="DokChampa"/>
+        <a:font script="Sinh" typeface="Iskoola Pota"/>
+        <a:font script="Mong" typeface="Mongolian Baiti"/>
+        <a:font script="Viet" typeface="Times New Roman"/>
+        <a:font script="Uigh" typeface="Microsoft Uighur"/>
+        <a:font script="Geor" typeface="Sylfaen"/>
+      </a:majorFont>
+      <a:minorFont>
+        <a:latin typeface="Arial"/>
+        <a:ea typeface=""/>
+        <a:cs typeface=""/>
+        <a:font script="Jpan" typeface="ＭＳ Ｐゴシック"/>
+        <a:font script="Hang" typeface="맑은 고딕"/>
+        <a:font script="Hans" typeface="宋体"/>
+        <a:font script="Hant" typeface="新細明體"/>
+        <a:font script="Arab" typeface="Arial"/>
+        <a:font script="Hebr" typeface="Arial"/>
+        <a:font script="Thai" typeface="Cordia New"/>
+        <a:font script="Ethi" typeface="Nyala"/>
+        <a:font script="Beng" typeface="Vrinda"/>
+        <a:font script="Gujr" typeface="Shruti"/>
+        <a:font script="Khmr" typeface="DaunPenh"/>
+        <a:font script="Knda" typeface="Tunga"/>
+        <a:font script="Guru" typeface="Raavi"/>
+        <a:font script="Cans" typeface="Euphemia"/>
+        <a:font script="Cher" typeface="Plantagenet Cherokee"/>
+        <a:font script="Yiii" typeface="Microsoft Yi Baiti"/>
+        <a:font script="Tibt" typeface="Microsoft Himalaya"/>
+        <a:font script="Thaa" typeface="MV Boli"/>
+        <a:font script="Deva" typeface="Mangal"/>
+        <a:font script="Telu" typeface="Gautami"/>
+        <a:font script="Taml" typeface="Latha"/>
+        <a:font script="Syrc" typeface="Estrangelo Edessa"/>
+        <a:font script="Orya" typeface="Kalinga"/>
+        <a:font script="Mlym" typeface="Kartika"/>
+        <a:font script="Laoo" typeface="DokChampa"/>
+        <a:font script="Sinh" typeface="Iskoola Pota"/>
+        <a:font script="Mong" typeface="Mongolian Baiti"/>
+        <a:font script="Viet" typeface="Arial"/>
+        <a:font script="Uigh" typeface="Microsoft Uighur"/>
+        <a:font script="Geor" typeface="Sylfaen"/>
+      </a:minorFont>
+    </a:fontScheme>
+    <a:fmtScheme name="Office">
+      <a:fillStyleLst>
+        <a:solidFill>
+          <a:schemeClr val="phClr"/>
+        </a:solidFill>
+        <a:gradFill rotWithShape="1">
+          <a:gsLst>
+            <a:gs pos="0">
+              <a:schemeClr val="phClr">
+                <a:tint val="50000"/>
+                <a:satMod val="300000"/>
+              </a:schemeClr>
+            </a:gs>
+            <a:gs pos="35000">
+              <a:schemeClr val="phClr">
+                <a:tint val="37000"/>
+                <a:satMod val="300000"/>
+              </a:schemeClr>
+            </a:gs>
+            <a:gs pos="100000">
+              <a:schemeClr val="phClr">
+                <a:tint val="15000"/>
+                <a:satMod val="350000"/>
+              </a:schemeClr>
+            </a:gs>
+          </a:gsLst>
+          <a:lin ang="16200000" scaled="1"/>
+        </a:gradFill>
+        <a:gradFill rotWithShape="1">
+          <a:gsLst>
+            <a:gs pos="0">
+              <a:schemeClr val="phClr">
+                <a:tint val="100000"/>
+                <a:shade val="100000"/>
+                <a:satMod val="130000"/>
+              </a:schemeClr>
+            </a:gs>
+            <a:gs pos="100000">
+              <a:schemeClr val="phClr">
+                <a:tint val="50000"/>
+                <a:shade val="100000"/>
+                <a:satMod val="350000"/>
+              </a:schemeClr>
+            </a:gs>
+          </a:gsLst>
+          <a:lin ang="16200000" scaled="0"/>
+        </a:gradFill>
+      </a:fillStyleLst>
+      <a:lnStyleLst>
+        <a:ln w="9525" cap="flat" cmpd="sng" algn="ctr">
+          <a:solidFill>
+            <a:schemeClr val="phClr">
+              <a:shade val="95000"/>
+              <a:satMod val="105000"/>
+            </a:schemeClr>
+          </a:solidFill>
+          <a:prstDash val="solid"/>
+        </a:ln>
+        <a:ln w="25400" cap="flat" cmpd="sng" algn="ctr">
+          <a:solidFill>
+            <a:schemeClr val="phClr"/>
+          </a:solidFill>
+          <a:prstDash val="solid"/>
+        </a:ln>
+        <a:ln w="38100" cap="flat" cmpd="sng" algn="ctr">
+          <a:solidFill>
+            <a:schemeClr val="phClr"/>
+          </a:solidFill>
+          <a:prstDash val="solid"/>
+        </a:ln>
+      </a:lnStyleLst>
+      <a:effectStyleLst>
+        <a:effectStyle>
+          <a:effectLst>
+            <a:outerShdw blurRad="40000" dist="20000" dir="5400000" rotWithShape="0">
+              <a:srgbClr val="000000">
+                <a:alpha val="38000"/>
+              </a:srgbClr>
+            </a:outerShdw>
+          </a:effectLst>
+        </a:effectStyle>
+        <a:effectStyle>
+          <a:effectLst>
+            <a:outerShdw blurRad="40000" dist="23000" dir="5400000" rotWithShape="0">
+              <a:srgbClr val="000000">
+                <a:alpha val="35000"/>
+              </a:srgbClr>
+            </a:outerShdw>
+          </a:effectLst>
+        </a:effectStyle>
+        <a:effectStyle>
+          <a:effectLst>
+            <a:outerShdw blurRad="40000" dist="23000" dir="5400000" rotWithShape="0">
+              <a:srgbClr val="000000">
+                <a:alpha val="35000"/>
+              </a:srgbClr>
+            </a:outerShdw>
+          </a:effectLst>
+          <a:scene3d>
+            <a:camera prst="orthographicFront">
+              <a:rot lat="0" lon="0" rev="0"/>
+            </a:camera>
+            <a:lightRig rig="threePt" dir="t">
+              <a:rot lat="0" lon="0" rev="1200000"/>
+            </a:lightRig>
+          </a:scene3d>
+          <a:sp3d>
+            <a:bevelT w="63500" h="25400"/>
+          </a:sp3d>
+        </a:effectStyle>
+      </a:effectStyleLst>
+      <a:bgFillStyleLst>
+        <a:solidFill>
+          <a:schemeClr val="phClr"/>
+        </a:solidFill>
+        <a:gradFill rotWithShape="1">
+          <a:gsLst>
+            <a:gs pos="0">
+              <a:schemeClr val="phClr">
+                <a:tint val="40000"/>
+                <a:satMod val="350000"/>
+              </a:schemeClr>
+            </a:gs>
+            <a:gs pos="40000">
+              <a:schemeClr val="phClr">
+                <a:tint val="45000"/>
+                <a:shade val="99000"/>
+                <a:satMod val="350000"/>
+              </a:schemeClr>
+            </a:gs>
+            <a:gs pos="100000">
+              <a:schemeClr val="phClr">
+                <a:shade val="20000"/>
+                <a:satMod val="255000"/>
+              </a:schemeClr>
+            </a:gs>
+          </a:gsLst>
+          <a:path path="circle">
+            <a:fillToRect l="50000" t="-80000" r="50000" b="180000"/>
+          </a:path>
+        </a:gradFill>
+        <a:gradFill rotWithShape="1">
+          <a:gsLst>
+            <a:gs pos="0">
+              <a:schemeClr val="phClr">
+                <a:tint val="80000"/>
+                <a:satMod val="300000"/>
+              </a:schemeClr>
+            </a:gs>
+            <a:gs pos="100000">
+              <a:schemeClr val="phClr">
+                <a:shade val="30000"/>
+                <a:satMod val="200000"/>
+              </a:schemeClr>
+            </a:gs>
+          </a:gsLst>
+          <a:path path="circle">
+            <a:fillToRect l="50000" t="50000" r="50000" b="50000"/>
+          </a:path>
+        </a:gradFill>
+      </a:bgFillStyleLst>
+    </a:fmtScheme>
+  </a:themeElements>
+</a:theme>
+</file>
+
+<file path=ppt/theme/theme2.xml><?xml version="1.0" encoding="utf-8"?>
 <a:theme xmlns:a="http://schemas.openxmlformats.org/drawingml/2006/main" xmlns:r="http://schemas.openxmlformats.org/officeDocument/2006/relationships" name="Office Theme">
   <a:themeElements>
     <a:clrScheme name="">
@@ -31514,283 +34426,4 @@
     </a:fmtScheme>
   </a:themeElements>
 </a:theme>
-</file>
-
-<file path=ppt/theme/theme2.xml><?xml version="1.0" encoding="utf-8"?>
-<a:theme xmlns:a="http://schemas.openxmlformats.org/drawingml/2006/main" xmlns:r="http://schemas.openxmlformats.org/officeDocument/2006/relationships" name="2_db-5-grey">
-  <a:themeElements>
-    <a:clrScheme name="">
-      <a:dk1>
-        <a:srgbClr val="000000"/>
-      </a:dk1>
-      <a:lt1>
-        <a:srgbClr val="CCECFF"/>
-      </a:lt1>
-      <a:dk2>
-        <a:srgbClr val="CC3300"/>
-      </a:dk2>
-      <a:lt2>
-        <a:srgbClr val="666699"/>
-      </a:lt2>
-      <a:accent1>
-        <a:srgbClr val="FFFFFF"/>
-      </a:accent1>
-      <a:accent2>
-        <a:srgbClr val="CCCC00"/>
-      </a:accent2>
-      <a:accent3>
-        <a:srgbClr val="E2F4FF"/>
-      </a:accent3>
-      <a:accent4>
-        <a:srgbClr val="000000"/>
-      </a:accent4>
-      <a:accent5>
-        <a:srgbClr val="FFFFFF"/>
-      </a:accent5>
-      <a:accent6>
-        <a:srgbClr val="B9B900"/>
-      </a:accent6>
-      <a:hlink>
-        <a:srgbClr val="FF9900"/>
-      </a:hlink>
-      <a:folHlink>
-        <a:srgbClr val="FF9933"/>
-      </a:folHlink>
-    </a:clrScheme>
-    <a:fontScheme name="Office">
-      <a:majorFont>
-        <a:latin typeface="Arial"/>
-        <a:ea typeface=""/>
-        <a:cs typeface=""/>
-        <a:font script="Jpan" typeface="ＭＳ Ｐゴシック"/>
-        <a:font script="Hang" typeface="맑은 고딕"/>
-        <a:font script="Hans" typeface="宋体"/>
-        <a:font script="Hant" typeface="新細明體"/>
-        <a:font script="Arab" typeface="Times New Roman"/>
-        <a:font script="Hebr" typeface="Times New Roman"/>
-        <a:font script="Thai" typeface="Angsana New"/>
-        <a:font script="Ethi" typeface="Nyala"/>
-        <a:font script="Beng" typeface="Vrinda"/>
-        <a:font script="Gujr" typeface="Shruti"/>
-        <a:font script="Khmr" typeface="MoolBoran"/>
-        <a:font script="Knda" typeface="Tunga"/>
-        <a:font script="Guru" typeface="Raavi"/>
-        <a:font script="Cans" typeface="Euphemia"/>
-        <a:font script="Cher" typeface="Plantagenet Cherokee"/>
-        <a:font script="Yiii" typeface="Microsoft Yi Baiti"/>
-        <a:font script="Tibt" typeface="Microsoft Himalaya"/>
-        <a:font script="Thaa" typeface="MV Boli"/>
-        <a:font script="Deva" typeface="Mangal"/>
-        <a:font script="Telu" typeface="Gautami"/>
-        <a:font script="Taml" typeface="Latha"/>
-        <a:font script="Syrc" typeface="Estrangelo Edessa"/>
-        <a:font script="Orya" typeface="Kalinga"/>
-        <a:font script="Mlym" typeface="Kartika"/>
-        <a:font script="Laoo" typeface="DokChampa"/>
-        <a:font script="Sinh" typeface="Iskoola Pota"/>
-        <a:font script="Mong" typeface="Mongolian Baiti"/>
-        <a:font script="Viet" typeface="Times New Roman"/>
-        <a:font script="Uigh" typeface="Microsoft Uighur"/>
-        <a:font script="Geor" typeface="Sylfaen"/>
-      </a:majorFont>
-      <a:minorFont>
-        <a:latin typeface="Arial"/>
-        <a:ea typeface=""/>
-        <a:cs typeface=""/>
-        <a:font script="Jpan" typeface="ＭＳ Ｐゴシック"/>
-        <a:font script="Hang" typeface="맑은 고딕"/>
-        <a:font script="Hans" typeface="宋体"/>
-        <a:font script="Hant" typeface="新細明體"/>
-        <a:font script="Arab" typeface="Arial"/>
-        <a:font script="Hebr" typeface="Arial"/>
-        <a:font script="Thai" typeface="Cordia New"/>
-        <a:font script="Ethi" typeface="Nyala"/>
-        <a:font script="Beng" typeface="Vrinda"/>
-        <a:font script="Gujr" typeface="Shruti"/>
-        <a:font script="Khmr" typeface="DaunPenh"/>
-        <a:font script="Knda" typeface="Tunga"/>
-        <a:font script="Guru" typeface="Raavi"/>
-        <a:font script="Cans" typeface="Euphemia"/>
-        <a:font script="Cher" typeface="Plantagenet Cherokee"/>
-        <a:font script="Yiii" typeface="Microsoft Yi Baiti"/>
-        <a:font script="Tibt" typeface="Microsoft Himalaya"/>
-        <a:font script="Thaa" typeface="MV Boli"/>
-        <a:font script="Deva" typeface="Mangal"/>
-        <a:font script="Telu" typeface="Gautami"/>
-        <a:font script="Taml" typeface="Latha"/>
-        <a:font script="Syrc" typeface="Estrangelo Edessa"/>
-        <a:font script="Orya" typeface="Kalinga"/>
-        <a:font script="Mlym" typeface="Kartika"/>
-        <a:font script="Laoo" typeface="DokChampa"/>
-        <a:font script="Sinh" typeface="Iskoola Pota"/>
-        <a:font script="Mong" typeface="Mongolian Baiti"/>
-        <a:font script="Viet" typeface="Arial"/>
-        <a:font script="Uigh" typeface="Microsoft Uighur"/>
-        <a:font script="Geor" typeface="Sylfaen"/>
-      </a:minorFont>
-    </a:fontScheme>
-    <a:fmtScheme name="Office">
-      <a:fillStyleLst>
-        <a:solidFill>
-          <a:schemeClr val="phClr"/>
-        </a:solidFill>
-        <a:gradFill rotWithShape="1">
-          <a:gsLst>
-            <a:gs pos="0">
-              <a:schemeClr val="phClr">
-                <a:tint val="50000"/>
-                <a:satMod val="300000"/>
-              </a:schemeClr>
-            </a:gs>
-            <a:gs pos="35000">
-              <a:schemeClr val="phClr">
-                <a:tint val="37000"/>
-                <a:satMod val="300000"/>
-              </a:schemeClr>
-            </a:gs>
-            <a:gs pos="100000">
-              <a:schemeClr val="phClr">
-                <a:tint val="15000"/>
-                <a:satMod val="350000"/>
-              </a:schemeClr>
-            </a:gs>
-          </a:gsLst>
-          <a:lin ang="16200000" scaled="1"/>
-        </a:gradFill>
-        <a:gradFill rotWithShape="1">
-          <a:gsLst>
-            <a:gs pos="0">
-              <a:schemeClr val="phClr">
-                <a:tint val="100000"/>
-                <a:shade val="100000"/>
-                <a:satMod val="130000"/>
-              </a:schemeClr>
-            </a:gs>
-            <a:gs pos="100000">
-              <a:schemeClr val="phClr">
-                <a:tint val="50000"/>
-                <a:shade val="100000"/>
-                <a:satMod val="350000"/>
-              </a:schemeClr>
-            </a:gs>
-          </a:gsLst>
-          <a:lin ang="16200000" scaled="0"/>
-        </a:gradFill>
-      </a:fillStyleLst>
-      <a:lnStyleLst>
-        <a:ln w="9525" cap="flat" cmpd="sng" algn="ctr">
-          <a:solidFill>
-            <a:schemeClr val="phClr">
-              <a:shade val="95000"/>
-              <a:satMod val="105000"/>
-            </a:schemeClr>
-          </a:solidFill>
-          <a:prstDash val="solid"/>
-        </a:ln>
-        <a:ln w="25400" cap="flat" cmpd="sng" algn="ctr">
-          <a:solidFill>
-            <a:schemeClr val="phClr"/>
-          </a:solidFill>
-          <a:prstDash val="solid"/>
-        </a:ln>
-        <a:ln w="38100" cap="flat" cmpd="sng" algn="ctr">
-          <a:solidFill>
-            <a:schemeClr val="phClr"/>
-          </a:solidFill>
-          <a:prstDash val="solid"/>
-        </a:ln>
-      </a:lnStyleLst>
-      <a:effectStyleLst>
-        <a:effectStyle>
-          <a:effectLst>
-            <a:outerShdw blurRad="40000" dist="20000" dir="5400000" rotWithShape="0">
-              <a:srgbClr val="000000">
-                <a:alpha val="38000"/>
-              </a:srgbClr>
-            </a:outerShdw>
-          </a:effectLst>
-        </a:effectStyle>
-        <a:effectStyle>
-          <a:effectLst>
-            <a:outerShdw blurRad="40000" dist="23000" dir="5400000" rotWithShape="0">
-              <a:srgbClr val="000000">
-                <a:alpha val="35000"/>
-              </a:srgbClr>
-            </a:outerShdw>
-          </a:effectLst>
-        </a:effectStyle>
-        <a:effectStyle>
-          <a:effectLst>
-            <a:outerShdw blurRad="40000" dist="23000" dir="5400000" rotWithShape="0">
-              <a:srgbClr val="000000">
-                <a:alpha val="35000"/>
-              </a:srgbClr>
-            </a:outerShdw>
-          </a:effectLst>
-          <a:scene3d>
-            <a:camera prst="orthographicFront">
-              <a:rot lat="0" lon="0" rev="0"/>
-            </a:camera>
-            <a:lightRig rig="threePt" dir="t">
-              <a:rot lat="0" lon="0" rev="1200000"/>
-            </a:lightRig>
-          </a:scene3d>
-          <a:sp3d>
-            <a:bevelT w="63500" h="25400"/>
-          </a:sp3d>
-        </a:effectStyle>
-      </a:effectStyleLst>
-      <a:bgFillStyleLst>
-        <a:solidFill>
-          <a:schemeClr val="phClr"/>
-        </a:solidFill>
-        <a:gradFill rotWithShape="1">
-          <a:gsLst>
-            <a:gs pos="0">
-              <a:schemeClr val="phClr">
-                <a:tint val="40000"/>
-                <a:satMod val="350000"/>
-              </a:schemeClr>
-            </a:gs>
-            <a:gs pos="40000">
-              <a:schemeClr val="phClr">
-                <a:tint val="45000"/>
-                <a:shade val="99000"/>
-                <a:satMod val="350000"/>
-              </a:schemeClr>
-            </a:gs>
-            <a:gs pos="100000">
-              <a:schemeClr val="phClr">
-                <a:shade val="20000"/>
-                <a:satMod val="255000"/>
-              </a:schemeClr>
-            </a:gs>
-          </a:gsLst>
-          <a:path path="circle">
-            <a:fillToRect l="50000" t="-80000" r="50000" b="180000"/>
-          </a:path>
-        </a:gradFill>
-        <a:gradFill rotWithShape="1">
-          <a:gsLst>
-            <a:gs pos="0">
-              <a:schemeClr val="phClr">
-                <a:tint val="80000"/>
-                <a:satMod val="300000"/>
-              </a:schemeClr>
-            </a:gs>
-            <a:gs pos="100000">
-              <a:schemeClr val="phClr">
-                <a:shade val="30000"/>
-                <a:satMod val="200000"/>
-              </a:schemeClr>
-            </a:gs>
-          </a:gsLst>
-          <a:path path="circle">
-            <a:fillToRect l="50000" t="50000" r="50000" b="50000"/>
-          </a:path>
-        </a:gradFill>
-      </a:bgFillStyleLst>
-    </a:fmtScheme>
-  </a:themeElements>
-</a:theme>
 </file>